--- a/근화여자중학교_겨울방학_자기주도학습_프로그램_제안서.pptx
+++ b/근화여자중학교_겨울방학_자기주도학습_프로그램_제안서.pptx
@@ -2,20 +2,19 @@
 <file path=ppt/presentation.xml><?xml version="1.0" encoding="utf-8"?>
 <p:presentation xmlns:a="http://schemas.openxmlformats.org/drawingml/2006/main" xmlns:r="http://schemas.openxmlformats.org/officeDocument/2006/relationships" xmlns:p="http://schemas.openxmlformats.org/presentationml/2006/main" saveSubsetFonts="1" autoCompressPictures="0">
   <p:sldMasterIdLst>
-    <p:sldMasterId id="2147483648" r:id="rId1"/>
+    <p:sldMasterId id="2147483660" r:id="rId1"/>
   </p:sldMasterIdLst>
   <p:sldIdLst>
-    <p:sldId id="256" r:id="rId7"/>
-    <p:sldId id="257" r:id="rId8"/>
-    <p:sldId id="258" r:id="rId9"/>
-    <p:sldId id="259" r:id="rId10"/>
-    <p:sldId id="260" r:id="rId11"/>
-    <p:sldId id="261" r:id="rId12"/>
-    <p:sldId id="262" r:id="rId13"/>
-    <p:sldId id="263" r:id="rId14"/>
-    <p:sldId id="264" r:id="rId15"/>
-    <p:sldId id="265" r:id="rId16"/>
-    <p:sldId id="266" r:id="rId17"/>
+    <p:sldId id="256" r:id="rId2"/>
+    <p:sldId id="257" r:id="rId3"/>
+    <p:sldId id="258" r:id="rId4"/>
+    <p:sldId id="259" r:id="rId5"/>
+    <p:sldId id="260" r:id="rId6"/>
+    <p:sldId id="261" r:id="rId7"/>
+    <p:sldId id="262" r:id="rId8"/>
+    <p:sldId id="263" r:id="rId9"/>
+    <p:sldId id="264" r:id="rId10"/>
+    <p:sldId id="266" r:id="rId11"/>
   </p:sldIdLst>
   <p:sldSz cx="9144000" cy="6858000" type="screen4x3"/>
   <p:notesSz cx="6858000" cy="9144000"/>
@@ -114,12 +113,28 @@
       </a:defRPr>
     </a:lvl9pPr>
   </p:defaultTextStyle>
+  <p:extLst>
+    <p:ext uri="{EFAFB233-063F-42B5-8137-9DF3F51BA10A}">
+      <p15:sldGuideLst xmlns:p15="http://schemas.microsoft.com/office/powerpoint/2012/main">
+        <p15:guide id="1" orient="horz" pos="2160">
+          <p15:clr>
+            <a:srgbClr val="A4A3A4"/>
+          </p15:clr>
+        </p15:guide>
+        <p15:guide id="2" pos="2880">
+          <p15:clr>
+            <a:srgbClr val="A4A3A4"/>
+          </p15:clr>
+        </p15:guide>
+      </p15:sldGuideLst>
+    </p:ext>
+  </p:extLst>
 </p:presentation>
 </file>
 
 <file path=ppt/slideLayouts/slideLayout1.xml><?xml version="1.0" encoding="utf-8"?>
-<p:sldLayout xmlns:a="http://schemas.openxmlformats.org/drawingml/2006/main" xmlns:r="http://schemas.openxmlformats.org/officeDocument/2006/relationships" xmlns:p="http://schemas.openxmlformats.org/presentationml/2006/main" type="title" preserve="1">
-  <p:cSld name="Title Slide">
+<p:sldLayout xmlns:a="http://schemas.openxmlformats.org/drawingml/2006/main" xmlns:r="http://schemas.openxmlformats.org/officeDocument/2006/relationships" xmlns:p="http://schemas.openxmlformats.org/presentationml/2006/main" showMasterSp="0" type="title" preserve="1">
+  <p:cSld name="제목 슬라이드">
     <p:spTree>
       <p:nvGrpSpPr>
         <p:cNvPr id="1" name=""/>
@@ -134,6 +149,196 @@
           <a:chExt cx="0" cy="0"/>
         </a:xfrm>
       </p:grpSpPr>
+      <p:grpSp>
+        <p:nvGrpSpPr>
+          <p:cNvPr id="16" name="Group 15"/>
+          <p:cNvGrpSpPr/>
+          <p:nvPr/>
+        </p:nvGrpSpPr>
+        <p:grpSpPr>
+          <a:xfrm>
+            <a:off x="4334933" y="1169931"/>
+            <a:ext cx="4814835" cy="4993802"/>
+            <a:chOff x="4334933" y="1169931"/>
+            <a:chExt cx="4814835" cy="4993802"/>
+          </a:xfrm>
+        </p:grpSpPr>
+        <p:cxnSp>
+          <p:nvCxnSpPr>
+            <p:cNvPr id="17" name="Straight Connector 16"/>
+            <p:cNvCxnSpPr/>
+            <p:nvPr/>
+          </p:nvCxnSpPr>
+          <p:spPr>
+            <a:xfrm flipH="1">
+              <a:off x="6009259" y="1169931"/>
+              <a:ext cx="3134741" cy="3134741"/>
+            </a:xfrm>
+            <a:prstGeom prst="line">
+              <a:avLst/>
+            </a:prstGeom>
+            <a:ln w="12700">
+              <a:solidFill>
+                <a:schemeClr val="tx1"/>
+              </a:solidFill>
+            </a:ln>
+          </p:spPr>
+          <p:style>
+            <a:lnRef idx="2">
+              <a:schemeClr val="accent1"/>
+            </a:lnRef>
+            <a:fillRef idx="0">
+              <a:schemeClr val="accent1"/>
+            </a:fillRef>
+            <a:effectRef idx="1">
+              <a:schemeClr val="accent1"/>
+            </a:effectRef>
+            <a:fontRef idx="minor">
+              <a:schemeClr val="tx1"/>
+            </a:fontRef>
+          </p:style>
+        </p:cxnSp>
+        <p:cxnSp>
+          <p:nvCxnSpPr>
+            <p:cNvPr id="19" name="Straight Connector 18"/>
+            <p:cNvCxnSpPr/>
+            <p:nvPr/>
+          </p:nvCxnSpPr>
+          <p:spPr>
+            <a:xfrm flipH="1">
+              <a:off x="4334933" y="1348898"/>
+              <a:ext cx="4814835" cy="4814835"/>
+            </a:xfrm>
+            <a:prstGeom prst="line">
+              <a:avLst/>
+            </a:prstGeom>
+            <a:ln w="12700">
+              <a:solidFill>
+                <a:schemeClr val="tx1"/>
+              </a:solidFill>
+            </a:ln>
+          </p:spPr>
+          <p:style>
+            <a:lnRef idx="2">
+              <a:schemeClr val="accent1"/>
+            </a:lnRef>
+            <a:fillRef idx="0">
+              <a:schemeClr val="accent1"/>
+            </a:fillRef>
+            <a:effectRef idx="1">
+              <a:schemeClr val="accent1"/>
+            </a:effectRef>
+            <a:fontRef idx="minor">
+              <a:schemeClr val="tx1"/>
+            </a:fontRef>
+          </p:style>
+        </p:cxnSp>
+        <p:cxnSp>
+          <p:nvCxnSpPr>
+            <p:cNvPr id="21" name="Straight Connector 20"/>
+            <p:cNvCxnSpPr/>
+            <p:nvPr/>
+          </p:nvCxnSpPr>
+          <p:spPr>
+            <a:xfrm flipH="1">
+              <a:off x="5225595" y="1469269"/>
+              <a:ext cx="3912054" cy="3912054"/>
+            </a:xfrm>
+            <a:prstGeom prst="line">
+              <a:avLst/>
+            </a:prstGeom>
+            <a:ln w="12700">
+              <a:solidFill>
+                <a:schemeClr val="tx1"/>
+              </a:solidFill>
+            </a:ln>
+          </p:spPr>
+          <p:style>
+            <a:lnRef idx="2">
+              <a:schemeClr val="accent1"/>
+            </a:lnRef>
+            <a:fillRef idx="0">
+              <a:schemeClr val="accent1"/>
+            </a:fillRef>
+            <a:effectRef idx="1">
+              <a:schemeClr val="accent1"/>
+            </a:effectRef>
+            <a:fontRef idx="minor">
+              <a:schemeClr val="tx1"/>
+            </a:fontRef>
+          </p:style>
+        </p:cxnSp>
+        <p:cxnSp>
+          <p:nvCxnSpPr>
+            <p:cNvPr id="22" name="Straight Connector 21"/>
+            <p:cNvCxnSpPr/>
+            <p:nvPr/>
+          </p:nvCxnSpPr>
+          <p:spPr>
+            <a:xfrm flipH="1">
+              <a:off x="5304588" y="1307856"/>
+              <a:ext cx="3839412" cy="3839412"/>
+            </a:xfrm>
+            <a:prstGeom prst="line">
+              <a:avLst/>
+            </a:prstGeom>
+            <a:ln w="31750">
+              <a:solidFill>
+                <a:schemeClr val="tx1"/>
+              </a:solidFill>
+            </a:ln>
+          </p:spPr>
+          <p:style>
+            <a:lnRef idx="2">
+              <a:schemeClr val="accent1"/>
+            </a:lnRef>
+            <a:fillRef idx="0">
+              <a:schemeClr val="accent1"/>
+            </a:fillRef>
+            <a:effectRef idx="1">
+              <a:schemeClr val="accent1"/>
+            </a:effectRef>
+            <a:fontRef idx="minor">
+              <a:schemeClr val="tx1"/>
+            </a:fontRef>
+          </p:style>
+        </p:cxnSp>
+        <p:cxnSp>
+          <p:nvCxnSpPr>
+            <p:cNvPr id="23" name="Straight Connector 22"/>
+            <p:cNvCxnSpPr/>
+            <p:nvPr/>
+          </p:nvCxnSpPr>
+          <p:spPr>
+            <a:xfrm flipH="1">
+              <a:off x="5707078" y="1770196"/>
+              <a:ext cx="3430571" cy="3430570"/>
+            </a:xfrm>
+            <a:prstGeom prst="line">
+              <a:avLst/>
+            </a:prstGeom>
+            <a:ln w="31750">
+              <a:solidFill>
+                <a:schemeClr val="tx1"/>
+              </a:solidFill>
+            </a:ln>
+          </p:spPr>
+          <p:style>
+            <a:lnRef idx="2">
+              <a:schemeClr val="accent1"/>
+            </a:lnRef>
+            <a:fillRef idx="0">
+              <a:schemeClr val="accent1"/>
+            </a:fillRef>
+            <a:effectRef idx="1">
+              <a:schemeClr val="accent1"/>
+            </a:effectRef>
+            <a:fontRef idx="minor">
+              <a:schemeClr val="tx1"/>
+            </a:fontRef>
+          </p:style>
+        </p:cxnSp>
+      </p:grpSp>
       <p:sp>
         <p:nvSpPr>
           <p:cNvPr id="2" name="Title 1"/>
@@ -146,19 +351,27 @@
         </p:nvSpPr>
         <p:spPr>
           <a:xfrm>
-            <a:off x="685800" y="2130425"/>
-            <a:ext cx="7772400" cy="1470025"/>
-          </a:xfrm>
-        </p:spPr>
-        <p:txBody>
-          <a:bodyPr/>
-          <a:lstStyle/>
-          <a:p>
-            <a:r>
-              <a:rPr lang="en-US" smtClean="0"/>
-              <a:t>Click to edit Master title style</a:t>
-            </a:r>
-            <a:endParaRPr lang="en-US"/>
+            <a:off x="533400" y="533400"/>
+            <a:ext cx="6154713" cy="3124201"/>
+          </a:xfrm>
+        </p:spPr>
+        <p:txBody>
+          <a:bodyPr anchor="b">
+            <a:normAutofit/>
+          </a:bodyPr>
+          <a:lstStyle>
+            <a:lvl1pPr algn="l">
+              <a:defRPr sz="4400">
+                <a:effectLst/>
+              </a:defRPr>
+            </a:lvl1pPr>
+          </a:lstStyle>
+          <a:p>
+            <a:r>
+              <a:rPr lang="ko-KR" altLang="en-US"/>
+              <a:t>마스터 제목 스타일 편집</a:t>
+            </a:r>
+            <a:endParaRPr lang="en-US" dirty="0"/>
           </a:p>
         </p:txBody>
       </p:sp>
@@ -174,14 +387,26 @@
         </p:nvSpPr>
         <p:spPr>
           <a:xfrm>
-            <a:off x="1371600" y="3886200"/>
-            <a:ext cx="6400800" cy="1752600"/>
-          </a:xfrm>
-        </p:spPr>
-        <p:txBody>
-          <a:bodyPr/>
+            <a:off x="533400" y="3843868"/>
+            <a:ext cx="4954250" cy="1913466"/>
+          </a:xfrm>
+        </p:spPr>
+        <p:txBody>
+          <a:bodyPr anchor="t">
+            <a:normAutofit/>
+          </a:bodyPr>
           <a:lstStyle>
-            <a:lvl1pPr marL="0" indent="0" algn="ctr">
+            <a:lvl1pPr marL="0" indent="0" algn="l">
+              <a:buNone/>
+              <a:defRPr sz="2000">
+                <a:solidFill>
+                  <a:schemeClr val="bg2">
+                    <a:lumMod val="75000"/>
+                  </a:schemeClr>
+                </a:solidFill>
+              </a:defRPr>
+            </a:lvl1pPr>
+            <a:lvl2pPr marL="457200" indent="0" algn="ctr">
               <a:buNone/>
               <a:defRPr>
                 <a:solidFill>
@@ -190,8 +415,8 @@
                   </a:schemeClr>
                 </a:solidFill>
               </a:defRPr>
-            </a:lvl1pPr>
-            <a:lvl2pPr marL="457200" indent="0" algn="ctr">
+            </a:lvl2pPr>
+            <a:lvl3pPr marL="914400" indent="0" algn="ctr">
               <a:buNone/>
               <a:defRPr>
                 <a:solidFill>
@@ -200,8 +425,8 @@
                   </a:schemeClr>
                 </a:solidFill>
               </a:defRPr>
-            </a:lvl2pPr>
-            <a:lvl3pPr marL="914400" indent="0" algn="ctr">
+            </a:lvl3pPr>
+            <a:lvl4pPr marL="1371600" indent="0" algn="ctr">
               <a:buNone/>
               <a:defRPr>
                 <a:solidFill>
@@ -210,8 +435,8 @@
                   </a:schemeClr>
                 </a:solidFill>
               </a:defRPr>
-            </a:lvl3pPr>
-            <a:lvl4pPr marL="1371600" indent="0" algn="ctr">
+            </a:lvl4pPr>
+            <a:lvl5pPr marL="1828800" indent="0" algn="ctr">
               <a:buNone/>
               <a:defRPr>
                 <a:solidFill>
@@ -220,8 +445,8 @@
                   </a:schemeClr>
                 </a:solidFill>
               </a:defRPr>
-            </a:lvl4pPr>
-            <a:lvl5pPr marL="1828800" indent="0" algn="ctr">
+            </a:lvl5pPr>
+            <a:lvl6pPr marL="2286000" indent="0" algn="ctr">
               <a:buNone/>
               <a:defRPr>
                 <a:solidFill>
@@ -230,8 +455,8 @@
                   </a:schemeClr>
                 </a:solidFill>
               </a:defRPr>
-            </a:lvl5pPr>
-            <a:lvl6pPr marL="2286000" indent="0" algn="ctr">
+            </a:lvl6pPr>
+            <a:lvl7pPr marL="2743200" indent="0" algn="ctr">
               <a:buNone/>
               <a:defRPr>
                 <a:solidFill>
@@ -240,8 +465,8 @@
                   </a:schemeClr>
                 </a:solidFill>
               </a:defRPr>
-            </a:lvl6pPr>
-            <a:lvl7pPr marL="2743200" indent="0" algn="ctr">
+            </a:lvl7pPr>
+            <a:lvl8pPr marL="3200400" indent="0" algn="ctr">
               <a:buNone/>
               <a:defRPr>
                 <a:solidFill>
@@ -250,8 +475,8 @@
                   </a:schemeClr>
                 </a:solidFill>
               </a:defRPr>
-            </a:lvl7pPr>
-            <a:lvl8pPr marL="3200400" indent="0" algn="ctr">
+            </a:lvl8pPr>
+            <a:lvl9pPr marL="3657600" indent="0" algn="ctr">
               <a:buNone/>
               <a:defRPr>
                 <a:solidFill>
@@ -260,24 +485,14 @@
                   </a:schemeClr>
                 </a:solidFill>
               </a:defRPr>
-            </a:lvl8pPr>
-            <a:lvl9pPr marL="3657600" indent="0" algn="ctr">
-              <a:buNone/>
-              <a:defRPr>
-                <a:solidFill>
-                  <a:schemeClr val="tx1">
-                    <a:tint val="75000"/>
-                  </a:schemeClr>
-                </a:solidFill>
-              </a:defRPr>
             </a:lvl9pPr>
           </a:lstStyle>
           <a:p>
             <a:r>
-              <a:rPr lang="en-US" smtClean="0"/>
-              <a:t>Click to edit Master subtitle style</a:t>
-            </a:r>
-            <a:endParaRPr lang="en-US"/>
+              <a:rPr lang="ko-KR" altLang="en-US"/>
+              <a:t>클릭하여 마스터 부제목 스타일 편집</a:t>
+            </a:r>
+            <a:endParaRPr lang="en-US" dirty="0"/>
           </a:p>
         </p:txBody>
       </p:sp>
@@ -298,7 +513,7 @@
           <a:p>
             <a:fld id="{5BCAD085-E8A6-8845-BD4E-CB4CCA059FC4}" type="datetimeFigureOut">
               <a:rPr lang="en-US" smtClean="0"/>
-              <a:t>1/27/13</a:t>
+              <a:t>12/18/2025</a:t>
             </a:fld>
             <a:endParaRPr lang="en-US"/>
           </a:p>
@@ -349,7 +564,7 @@
     </p:spTree>
     <p:extLst>
       <p:ext uri="{BB962C8B-B14F-4D97-AF65-F5344CB8AC3E}">
-        <p14:creationId xmlns:p14="http://schemas.microsoft.com/office/powerpoint/2010/main" val="3168075583"/>
+        <p14:creationId xmlns:p14="http://schemas.microsoft.com/office/powerpoint/2010/main" val="544902629"/>
       </p:ext>
     </p:extLst>
   </p:cSld>
@@ -360,8 +575,8 @@
 </file>
 
 <file path=ppt/slideLayouts/slideLayout10.xml><?xml version="1.0" encoding="utf-8"?>
-<p:sldLayout xmlns:a="http://schemas.openxmlformats.org/drawingml/2006/main" xmlns:r="http://schemas.openxmlformats.org/officeDocument/2006/relationships" xmlns:p="http://schemas.openxmlformats.org/presentationml/2006/main" type="vertTx" preserve="1">
-  <p:cSld name="Title and Vertical Text">
+<p:sldLayout xmlns:a="http://schemas.openxmlformats.org/drawingml/2006/main" xmlns:r="http://schemas.openxmlformats.org/officeDocument/2006/relationships" xmlns:p="http://schemas.openxmlformats.org/presentationml/2006/main" preserve="1">
+  <p:cSld name="캡션 있는 파노라마 그림">
     <p:spTree>
       <p:nvGrpSpPr>
         <p:cNvPr id="1" name=""/>
@@ -386,74 +601,170 @@
             <p:ph type="title"/>
           </p:nvPr>
         </p:nvSpPr>
-        <p:spPr/>
+        <p:spPr>
+          <a:xfrm>
+            <a:off x="533400" y="4495800"/>
+            <a:ext cx="6554867" cy="1524000"/>
+          </a:xfrm>
+        </p:spPr>
         <p:txBody>
           <a:bodyPr/>
           <a:lstStyle/>
           <a:p>
             <a:r>
-              <a:rPr lang="en-US" smtClean="0"/>
-              <a:t>Click to edit Master title style</a:t>
-            </a:r>
-            <a:endParaRPr lang="en-US"/>
-          </a:p>
-        </p:txBody>
-      </p:sp>
-      <p:sp>
-        <p:nvSpPr>
-          <p:cNvPr id="3" name="Vertical Text Placeholder 2"/>
+              <a:rPr lang="ko-KR" altLang="en-US"/>
+              <a:t>마스터 제목 스타일 편집</a:t>
+            </a:r>
+            <a:endParaRPr lang="en-US" dirty="0"/>
+          </a:p>
+        </p:txBody>
+      </p:sp>
+      <p:sp>
+        <p:nvSpPr>
+          <p:cNvPr id="6" name="Picture Placeholder 2"/>
+          <p:cNvSpPr>
+            <a:spLocks noGrp="1" noChangeAspect="1"/>
+          </p:cNvSpPr>
+          <p:nvPr>
+            <p:ph type="pic" idx="13"/>
+          </p:nvPr>
+        </p:nvSpPr>
+        <p:spPr>
+          <a:xfrm>
+            <a:off x="533400" y="533400"/>
+            <a:ext cx="8077200" cy="3124200"/>
+          </a:xfrm>
+          <a:prstGeom prst="snip2DiagRect">
+            <a:avLst>
+              <a:gd name="adj1" fmla="val 10815"/>
+              <a:gd name="adj2" fmla="val 0"/>
+            </a:avLst>
+          </a:prstGeom>
+          <a:ln w="15875">
+            <a:solidFill>
+              <a:schemeClr val="tx1">
+                <a:alpha val="40000"/>
+              </a:schemeClr>
+            </a:solidFill>
+          </a:ln>
+          <a:effectLst>
+            <a:innerShdw blurRad="57150" dist="38100" dir="14460000">
+              <a:srgbClr val="000000">
+                <a:alpha val="70000"/>
+              </a:srgbClr>
+            </a:innerShdw>
+          </a:effectLst>
+        </p:spPr>
+        <p:txBody>
+          <a:bodyPr anchor="t">
+            <a:normAutofit/>
+          </a:bodyPr>
+          <a:lstStyle>
+            <a:lvl1pPr marL="0" indent="0" algn="ctr">
+              <a:buNone/>
+              <a:defRPr sz="1600"/>
+            </a:lvl1pPr>
+            <a:lvl2pPr marL="457200" indent="0">
+              <a:buNone/>
+              <a:defRPr sz="1600"/>
+            </a:lvl2pPr>
+            <a:lvl3pPr marL="914400" indent="0">
+              <a:buNone/>
+              <a:defRPr sz="1600"/>
+            </a:lvl3pPr>
+            <a:lvl4pPr marL="1371600" indent="0">
+              <a:buNone/>
+              <a:defRPr sz="1600"/>
+            </a:lvl4pPr>
+            <a:lvl5pPr marL="1828800" indent="0">
+              <a:buNone/>
+              <a:defRPr sz="1600"/>
+            </a:lvl5pPr>
+            <a:lvl6pPr marL="2286000" indent="0">
+              <a:buNone/>
+              <a:defRPr sz="1600"/>
+            </a:lvl6pPr>
+            <a:lvl7pPr marL="2743200" indent="0">
+              <a:buNone/>
+              <a:defRPr sz="1600"/>
+            </a:lvl7pPr>
+            <a:lvl8pPr marL="3200400" indent="0">
+              <a:buNone/>
+              <a:defRPr sz="1600"/>
+            </a:lvl8pPr>
+            <a:lvl9pPr marL="3657600" indent="0">
+              <a:buNone/>
+              <a:defRPr sz="1600"/>
+            </a:lvl9pPr>
+          </a:lstStyle>
+          <a:p>
+            <a:r>
+              <a:rPr lang="ko-KR" altLang="en-US"/>
+              <a:t>그림을 추가하려면 아이콘을 클릭하십시오</a:t>
+            </a:r>
+            <a:endParaRPr lang="en-US" dirty="0"/>
+          </a:p>
+        </p:txBody>
+      </p:sp>
+      <p:sp>
+        <p:nvSpPr>
+          <p:cNvPr id="9" name="Text Placeholder 9"/>
           <p:cNvSpPr>
             <a:spLocks noGrp="1"/>
           </p:cNvSpPr>
           <p:nvPr>
-            <p:ph type="body" orient="vert" idx="1"/>
-          </p:nvPr>
-        </p:nvSpPr>
-        <p:spPr/>
-        <p:txBody>
-          <a:bodyPr vert="eaVert"/>
-          <a:lstStyle/>
+            <p:ph type="body" sz="quarter" idx="14"/>
+          </p:nvPr>
+        </p:nvSpPr>
+        <p:spPr>
+          <a:xfrm>
+            <a:off x="762002" y="3843867"/>
+            <a:ext cx="7281332" cy="457200"/>
+          </a:xfrm>
+        </p:spPr>
+        <p:txBody>
+          <a:bodyPr anchor="t">
+            <a:normAutofit/>
+          </a:bodyPr>
+          <a:lstStyle>
+            <a:lvl1pPr marL="0" indent="0">
+              <a:buFontTx/>
+              <a:buNone/>
+              <a:defRPr sz="1600"/>
+            </a:lvl1pPr>
+            <a:lvl2pPr marL="457200" indent="0">
+              <a:buFontTx/>
+              <a:buNone/>
+              <a:defRPr/>
+            </a:lvl2pPr>
+            <a:lvl3pPr marL="914400" indent="0">
+              <a:buFontTx/>
+              <a:buNone/>
+              <a:defRPr/>
+            </a:lvl3pPr>
+            <a:lvl4pPr marL="1371600" indent="0">
+              <a:buFontTx/>
+              <a:buNone/>
+              <a:defRPr/>
+            </a:lvl4pPr>
+            <a:lvl5pPr marL="1828800" indent="0">
+              <a:buFontTx/>
+              <a:buNone/>
+              <a:defRPr/>
+            </a:lvl5pPr>
+          </a:lstStyle>
           <a:p>
             <a:pPr lvl="0"/>
             <a:r>
-              <a:rPr lang="en-US" smtClean="0"/>
-              <a:t>Click to edit Master text styles</a:t>
-            </a:r>
-          </a:p>
-          <a:p>
-            <a:pPr lvl="1"/>
-            <a:r>
-              <a:rPr lang="en-US" smtClean="0"/>
-              <a:t>Second level</a:t>
-            </a:r>
-          </a:p>
-          <a:p>
-            <a:pPr lvl="2"/>
-            <a:r>
-              <a:rPr lang="en-US" smtClean="0"/>
-              <a:t>Third level</a:t>
-            </a:r>
-          </a:p>
-          <a:p>
-            <a:pPr lvl="3"/>
-            <a:r>
-              <a:rPr lang="en-US" smtClean="0"/>
-              <a:t>Fourth level</a:t>
-            </a:r>
-          </a:p>
-          <a:p>
-            <a:pPr lvl="4"/>
-            <a:r>
-              <a:rPr lang="en-US" smtClean="0"/>
-              <a:t>Fifth level</a:t>
-            </a:r>
-            <a:endParaRPr lang="en-US"/>
-          </a:p>
-        </p:txBody>
-      </p:sp>
-      <p:sp>
-        <p:nvSpPr>
-          <p:cNvPr id="4" name="Date Placeholder 3"/>
+              <a:rPr lang="ko-KR" altLang="en-US"/>
+              <a:t>마스터 텍스트 스타일을 편집하려면 클릭</a:t>
+            </a:r>
+          </a:p>
+        </p:txBody>
+      </p:sp>
+      <p:sp>
+        <p:nvSpPr>
+          <p:cNvPr id="3" name="Date Placeholder 2"/>
           <p:cNvSpPr>
             <a:spLocks noGrp="1"/>
           </p:cNvSpPr>
@@ -468,7 +779,7 @@
           <a:p>
             <a:fld id="{5BCAD085-E8A6-8845-BD4E-CB4CCA059FC4}" type="datetimeFigureOut">
               <a:rPr lang="en-US" smtClean="0"/>
-              <a:t>1/27/13</a:t>
+              <a:t>12/18/2025</a:t>
             </a:fld>
             <a:endParaRPr lang="en-US"/>
           </a:p>
@@ -476,7 +787,7 @@
       </p:sp>
       <p:sp>
         <p:nvSpPr>
-          <p:cNvPr id="5" name="Footer Placeholder 4"/>
+          <p:cNvPr id="4" name="Footer Placeholder 3"/>
           <p:cNvSpPr>
             <a:spLocks noGrp="1"/>
           </p:cNvSpPr>
@@ -495,7 +806,7 @@
       </p:sp>
       <p:sp>
         <p:nvSpPr>
-          <p:cNvPr id="6" name="Slide Number Placeholder 5"/>
+          <p:cNvPr id="5" name="Slide Number Placeholder 4"/>
           <p:cNvSpPr>
             <a:spLocks noGrp="1"/>
           </p:cNvSpPr>
@@ -519,7 +830,7 @@
     </p:spTree>
     <p:extLst>
       <p:ext uri="{BB962C8B-B14F-4D97-AF65-F5344CB8AC3E}">
-        <p14:creationId xmlns:p14="http://schemas.microsoft.com/office/powerpoint/2010/main" val="2910927964"/>
+        <p14:creationId xmlns:p14="http://schemas.microsoft.com/office/powerpoint/2010/main" val="2943818646"/>
       </p:ext>
     </p:extLst>
   </p:cSld>
@@ -530,8 +841,8 @@
 </file>
 
 <file path=ppt/slideLayouts/slideLayout11.xml><?xml version="1.0" encoding="utf-8"?>
-<p:sldLayout xmlns:a="http://schemas.openxmlformats.org/drawingml/2006/main" xmlns:r="http://schemas.openxmlformats.org/officeDocument/2006/relationships" xmlns:p="http://schemas.openxmlformats.org/presentationml/2006/main" type="vertTitleAndTx" preserve="1">
-  <p:cSld name="Vertical Title and Text">
+<p:sldLayout xmlns:a="http://schemas.openxmlformats.org/drawingml/2006/main" xmlns:r="http://schemas.openxmlformats.org/officeDocument/2006/relationships" xmlns:p="http://schemas.openxmlformats.org/presentationml/2006/main" preserve="1">
+  <p:cSld name="제목 및 캡션">
     <p:spTree>
       <p:nvGrpSpPr>
         <p:cNvPr id="1" name=""/>
@@ -548,86 +859,156 @@
       </p:grpSpPr>
       <p:sp>
         <p:nvSpPr>
-          <p:cNvPr id="2" name="Vertical Title 1"/>
+          <p:cNvPr id="2" name="Title 1"/>
           <p:cNvSpPr>
             <a:spLocks noGrp="1"/>
           </p:cNvSpPr>
           <p:nvPr>
-            <p:ph type="title" orient="vert"/>
-          </p:nvPr>
-        </p:nvSpPr>
-        <p:spPr>
-          <a:xfrm>
-            <a:off x="6629400" y="274638"/>
-            <a:ext cx="2057400" cy="5851525"/>
-          </a:xfrm>
-        </p:spPr>
-        <p:txBody>
-          <a:bodyPr vert="eaVert"/>
-          <a:lstStyle/>
-          <a:p>
-            <a:r>
-              <a:rPr lang="en-US" smtClean="0"/>
-              <a:t>Click to edit Master title style</a:t>
-            </a:r>
-            <a:endParaRPr lang="en-US"/>
-          </a:p>
-        </p:txBody>
-      </p:sp>
-      <p:sp>
-        <p:nvSpPr>
-          <p:cNvPr id="3" name="Vertical Text Placeholder 2"/>
+            <p:ph type="title"/>
+          </p:nvPr>
+        </p:nvSpPr>
+        <p:spPr>
+          <a:xfrm>
+            <a:off x="533400" y="533400"/>
+            <a:ext cx="8077200" cy="2895600"/>
+          </a:xfrm>
+        </p:spPr>
+        <p:txBody>
+          <a:bodyPr anchor="ctr">
+            <a:normAutofit/>
+          </a:bodyPr>
+          <a:lstStyle>
+            <a:lvl1pPr algn="l">
+              <a:defRPr sz="2800" b="0" cap="all"/>
+            </a:lvl1pPr>
+          </a:lstStyle>
+          <a:p>
+            <a:r>
+              <a:rPr lang="ko-KR" altLang="en-US"/>
+              <a:t>마스터 제목 스타일 편집</a:t>
+            </a:r>
+            <a:endParaRPr lang="en-US" dirty="0"/>
+          </a:p>
+        </p:txBody>
+      </p:sp>
+      <p:sp>
+        <p:nvSpPr>
+          <p:cNvPr id="3" name="Text Placeholder 2"/>
           <p:cNvSpPr>
             <a:spLocks noGrp="1"/>
           </p:cNvSpPr>
           <p:nvPr>
-            <p:ph type="body" orient="vert" idx="1"/>
-          </p:nvPr>
-        </p:nvSpPr>
-        <p:spPr>
-          <a:xfrm>
-            <a:off x="457200" y="274638"/>
-            <a:ext cx="6019800" cy="5851525"/>
-          </a:xfrm>
-        </p:spPr>
-        <p:txBody>
-          <a:bodyPr vert="eaVert"/>
-          <a:lstStyle/>
+            <p:ph type="body" idx="1"/>
+          </p:nvPr>
+        </p:nvSpPr>
+        <p:spPr>
+          <a:xfrm>
+            <a:off x="533400" y="4114800"/>
+            <a:ext cx="6383552" cy="1905000"/>
+          </a:xfrm>
+        </p:spPr>
+        <p:txBody>
+          <a:bodyPr anchor="ctr">
+            <a:normAutofit/>
+          </a:bodyPr>
+          <a:lstStyle>
+            <a:lvl1pPr marL="0" indent="0" algn="l">
+              <a:buNone/>
+              <a:defRPr sz="1800">
+                <a:solidFill>
+                  <a:schemeClr val="bg2">
+                    <a:lumMod val="75000"/>
+                  </a:schemeClr>
+                </a:solidFill>
+              </a:defRPr>
+            </a:lvl1pPr>
+            <a:lvl2pPr marL="457200" indent="0">
+              <a:buNone/>
+              <a:defRPr sz="1800">
+                <a:solidFill>
+                  <a:schemeClr val="tx1">
+                    <a:tint val="75000"/>
+                  </a:schemeClr>
+                </a:solidFill>
+              </a:defRPr>
+            </a:lvl2pPr>
+            <a:lvl3pPr marL="914400" indent="0">
+              <a:buNone/>
+              <a:defRPr sz="1600">
+                <a:solidFill>
+                  <a:schemeClr val="tx1">
+                    <a:tint val="75000"/>
+                  </a:schemeClr>
+                </a:solidFill>
+              </a:defRPr>
+            </a:lvl3pPr>
+            <a:lvl4pPr marL="1371600" indent="0">
+              <a:buNone/>
+              <a:defRPr sz="1400">
+                <a:solidFill>
+                  <a:schemeClr val="tx1">
+                    <a:tint val="75000"/>
+                  </a:schemeClr>
+                </a:solidFill>
+              </a:defRPr>
+            </a:lvl4pPr>
+            <a:lvl5pPr marL="1828800" indent="0">
+              <a:buNone/>
+              <a:defRPr sz="1400">
+                <a:solidFill>
+                  <a:schemeClr val="tx1">
+                    <a:tint val="75000"/>
+                  </a:schemeClr>
+                </a:solidFill>
+              </a:defRPr>
+            </a:lvl5pPr>
+            <a:lvl6pPr marL="2286000" indent="0">
+              <a:buNone/>
+              <a:defRPr sz="1400">
+                <a:solidFill>
+                  <a:schemeClr val="tx1">
+                    <a:tint val="75000"/>
+                  </a:schemeClr>
+                </a:solidFill>
+              </a:defRPr>
+            </a:lvl6pPr>
+            <a:lvl7pPr marL="2743200" indent="0">
+              <a:buNone/>
+              <a:defRPr sz="1400">
+                <a:solidFill>
+                  <a:schemeClr val="tx1">
+                    <a:tint val="75000"/>
+                  </a:schemeClr>
+                </a:solidFill>
+              </a:defRPr>
+            </a:lvl7pPr>
+            <a:lvl8pPr marL="3200400" indent="0">
+              <a:buNone/>
+              <a:defRPr sz="1400">
+                <a:solidFill>
+                  <a:schemeClr val="tx1">
+                    <a:tint val="75000"/>
+                  </a:schemeClr>
+                </a:solidFill>
+              </a:defRPr>
+            </a:lvl8pPr>
+            <a:lvl9pPr marL="3657600" indent="0">
+              <a:buNone/>
+              <a:defRPr sz="1400">
+                <a:solidFill>
+                  <a:schemeClr val="tx1">
+                    <a:tint val="75000"/>
+                  </a:schemeClr>
+                </a:solidFill>
+              </a:defRPr>
+            </a:lvl9pPr>
+          </a:lstStyle>
           <a:p>
             <a:pPr lvl="0"/>
             <a:r>
-              <a:rPr lang="en-US" smtClean="0"/>
-              <a:t>Click to edit Master text styles</a:t>
-            </a:r>
-          </a:p>
-          <a:p>
-            <a:pPr lvl="1"/>
-            <a:r>
-              <a:rPr lang="en-US" smtClean="0"/>
-              <a:t>Second level</a:t>
-            </a:r>
-          </a:p>
-          <a:p>
-            <a:pPr lvl="2"/>
-            <a:r>
-              <a:rPr lang="en-US" smtClean="0"/>
-              <a:t>Third level</a:t>
-            </a:r>
-          </a:p>
-          <a:p>
-            <a:pPr lvl="3"/>
-            <a:r>
-              <a:rPr lang="en-US" smtClean="0"/>
-              <a:t>Fourth level</a:t>
-            </a:r>
-          </a:p>
-          <a:p>
-            <a:pPr lvl="4"/>
-            <a:r>
-              <a:rPr lang="en-US" smtClean="0"/>
-              <a:t>Fifth level</a:t>
-            </a:r>
-            <a:endParaRPr lang="en-US"/>
+              <a:rPr lang="ko-KR" altLang="en-US"/>
+              <a:t>마스터 텍스트 스타일을 편집하려면 클릭</a:t>
+            </a:r>
           </a:p>
         </p:txBody>
       </p:sp>
@@ -648,7 +1029,7 @@
           <a:p>
             <a:fld id="{5BCAD085-E8A6-8845-BD4E-CB4CCA059FC4}" type="datetimeFigureOut">
               <a:rPr lang="en-US" smtClean="0"/>
-              <a:t>1/27/13</a:t>
+              <a:t>12/18/2025</a:t>
             </a:fld>
             <a:endParaRPr lang="en-US"/>
           </a:p>
@@ -699,7 +1080,7 @@
     </p:spTree>
     <p:extLst>
       <p:ext uri="{BB962C8B-B14F-4D97-AF65-F5344CB8AC3E}">
-        <p14:creationId xmlns:p14="http://schemas.microsoft.com/office/powerpoint/2010/main" val="3612223792"/>
+        <p14:creationId xmlns:p14="http://schemas.microsoft.com/office/powerpoint/2010/main" val="445919992"/>
       </p:ext>
     </p:extLst>
   </p:cSld>
@@ -709,9 +1090,9 @@
 </p:sldLayout>
 </file>
 
-<file path=ppt/slideLayouts/slideLayout2.xml><?xml version="1.0" encoding="utf-8"?>
-<p:sldLayout xmlns:a="http://schemas.openxmlformats.org/drawingml/2006/main" xmlns:r="http://schemas.openxmlformats.org/officeDocument/2006/relationships" xmlns:p="http://schemas.openxmlformats.org/presentationml/2006/main" type="obj" preserve="1">
-  <p:cSld name="Title and Content">
+<file path=ppt/slideLayouts/slideLayout12.xml><?xml version="1.0" encoding="utf-8"?>
+<p:sldLayout xmlns:a="http://schemas.openxmlformats.org/drawingml/2006/main" xmlns:r="http://schemas.openxmlformats.org/officeDocument/2006/relationships" xmlns:p="http://schemas.openxmlformats.org/presentationml/2006/main" preserve="1">
+  <p:cSld name="캡션 있는 인용문">
     <p:spTree>
       <p:nvGrpSpPr>
         <p:cNvPr id="1" name=""/>
@@ -736,68 +1117,206 @@
             <p:ph type="title"/>
           </p:nvPr>
         </p:nvSpPr>
-        <p:spPr/>
-        <p:txBody>
-          <a:bodyPr/>
-          <a:lstStyle/>
-          <a:p>
-            <a:r>
-              <a:rPr lang="en-US" smtClean="0"/>
-              <a:t>Click to edit Master title style</a:t>
-            </a:r>
-            <a:endParaRPr lang="en-US"/>
-          </a:p>
-        </p:txBody>
-      </p:sp>
-      <p:sp>
-        <p:nvSpPr>
-          <p:cNvPr id="3" name="Content Placeholder 2"/>
+        <p:spPr>
+          <a:xfrm>
+            <a:off x="856283" y="533400"/>
+            <a:ext cx="6859787" cy="2895600"/>
+          </a:xfrm>
+        </p:spPr>
+        <p:txBody>
+          <a:bodyPr anchor="ctr">
+            <a:normAutofit/>
+          </a:bodyPr>
+          <a:lstStyle>
+            <a:lvl1pPr algn="l">
+              <a:defRPr sz="2800" b="0" cap="all">
+                <a:solidFill>
+                  <a:schemeClr val="tx1"/>
+                </a:solidFill>
+              </a:defRPr>
+            </a:lvl1pPr>
+          </a:lstStyle>
+          <a:p>
+            <a:r>
+              <a:rPr lang="ko-KR" altLang="en-US"/>
+              <a:t>마스터 제목 스타일 편집</a:t>
+            </a:r>
+            <a:endParaRPr lang="en-US" dirty="0"/>
+          </a:p>
+        </p:txBody>
+      </p:sp>
+      <p:sp>
+        <p:nvSpPr>
+          <p:cNvPr id="10" name="Text Placeholder 9"/>
           <p:cNvSpPr>
             <a:spLocks noGrp="1"/>
           </p:cNvSpPr>
           <p:nvPr>
-            <p:ph idx="1"/>
-          </p:nvPr>
-        </p:nvSpPr>
-        <p:spPr/>
-        <p:txBody>
-          <a:bodyPr/>
-          <a:lstStyle/>
+            <p:ph type="body" sz="quarter" idx="13"/>
+          </p:nvPr>
+        </p:nvSpPr>
+        <p:spPr>
+          <a:xfrm>
+            <a:off x="1066800" y="3429000"/>
+            <a:ext cx="6402467" cy="482600"/>
+          </a:xfrm>
+        </p:spPr>
+        <p:txBody>
+          <a:bodyPr anchor="ctr"/>
+          <a:lstStyle>
+            <a:lvl1pPr marL="0" indent="0">
+              <a:buFontTx/>
+              <a:buNone/>
+              <a:defRPr/>
+            </a:lvl1pPr>
+            <a:lvl2pPr marL="457200" indent="0">
+              <a:buFontTx/>
+              <a:buNone/>
+              <a:defRPr/>
+            </a:lvl2pPr>
+            <a:lvl3pPr marL="914400" indent="0">
+              <a:buFontTx/>
+              <a:buNone/>
+              <a:defRPr/>
+            </a:lvl3pPr>
+            <a:lvl4pPr marL="1371600" indent="0">
+              <a:buFontTx/>
+              <a:buNone/>
+              <a:defRPr/>
+            </a:lvl4pPr>
+            <a:lvl5pPr marL="1828800" indent="0">
+              <a:buFontTx/>
+              <a:buNone/>
+              <a:defRPr/>
+            </a:lvl5pPr>
+          </a:lstStyle>
           <a:p>
             <a:pPr lvl="0"/>
             <a:r>
-              <a:rPr lang="en-US" smtClean="0"/>
-              <a:t>Click to edit Master text styles</a:t>
-            </a:r>
-          </a:p>
-          <a:p>
-            <a:pPr lvl="1"/>
-            <a:r>
-              <a:rPr lang="en-US" smtClean="0"/>
-              <a:t>Second level</a:t>
-            </a:r>
-          </a:p>
-          <a:p>
-            <a:pPr lvl="2"/>
-            <a:r>
-              <a:rPr lang="en-US" smtClean="0"/>
-              <a:t>Third level</a:t>
-            </a:r>
-          </a:p>
-          <a:p>
-            <a:pPr lvl="3"/>
-            <a:r>
-              <a:rPr lang="en-US" smtClean="0"/>
-              <a:t>Fourth level</a:t>
-            </a:r>
-          </a:p>
-          <a:p>
-            <a:pPr lvl="4"/>
-            <a:r>
-              <a:rPr lang="en-US" smtClean="0"/>
-              <a:t>Fifth level</a:t>
-            </a:r>
-            <a:endParaRPr lang="en-US"/>
+              <a:rPr lang="ko-KR" altLang="en-US"/>
+              <a:t>마스터 텍스트 스타일을 편집하려면 클릭</a:t>
+            </a:r>
+          </a:p>
+        </p:txBody>
+      </p:sp>
+      <p:sp>
+        <p:nvSpPr>
+          <p:cNvPr id="3" name="Text Placeholder 2"/>
+          <p:cNvSpPr>
+            <a:spLocks noGrp="1"/>
+          </p:cNvSpPr>
+          <p:nvPr>
+            <p:ph type="body" idx="1"/>
+          </p:nvPr>
+        </p:nvSpPr>
+        <p:spPr>
+          <a:xfrm>
+            <a:off x="533400" y="4301070"/>
+            <a:ext cx="6382361" cy="1718730"/>
+          </a:xfrm>
+        </p:spPr>
+        <p:txBody>
+          <a:bodyPr anchor="ctr">
+            <a:normAutofit/>
+          </a:bodyPr>
+          <a:lstStyle>
+            <a:lvl1pPr marL="0" indent="0" algn="l">
+              <a:buNone/>
+              <a:defRPr sz="2000">
+                <a:solidFill>
+                  <a:schemeClr val="bg2">
+                    <a:lumMod val="75000"/>
+                  </a:schemeClr>
+                </a:solidFill>
+              </a:defRPr>
+            </a:lvl1pPr>
+            <a:lvl2pPr marL="457200" indent="0">
+              <a:buNone/>
+              <a:defRPr sz="1800">
+                <a:solidFill>
+                  <a:schemeClr val="tx1">
+                    <a:tint val="75000"/>
+                  </a:schemeClr>
+                </a:solidFill>
+              </a:defRPr>
+            </a:lvl2pPr>
+            <a:lvl3pPr marL="914400" indent="0">
+              <a:buNone/>
+              <a:defRPr sz="1600">
+                <a:solidFill>
+                  <a:schemeClr val="tx1">
+                    <a:tint val="75000"/>
+                  </a:schemeClr>
+                </a:solidFill>
+              </a:defRPr>
+            </a:lvl3pPr>
+            <a:lvl4pPr marL="1371600" indent="0">
+              <a:buNone/>
+              <a:defRPr sz="1400">
+                <a:solidFill>
+                  <a:schemeClr val="tx1">
+                    <a:tint val="75000"/>
+                  </a:schemeClr>
+                </a:solidFill>
+              </a:defRPr>
+            </a:lvl4pPr>
+            <a:lvl5pPr marL="1828800" indent="0">
+              <a:buNone/>
+              <a:defRPr sz="1400">
+                <a:solidFill>
+                  <a:schemeClr val="tx1">
+                    <a:tint val="75000"/>
+                  </a:schemeClr>
+                </a:solidFill>
+              </a:defRPr>
+            </a:lvl5pPr>
+            <a:lvl6pPr marL="2286000" indent="0">
+              <a:buNone/>
+              <a:defRPr sz="1400">
+                <a:solidFill>
+                  <a:schemeClr val="tx1">
+                    <a:tint val="75000"/>
+                  </a:schemeClr>
+                </a:solidFill>
+              </a:defRPr>
+            </a:lvl6pPr>
+            <a:lvl7pPr marL="2743200" indent="0">
+              <a:buNone/>
+              <a:defRPr sz="1400">
+                <a:solidFill>
+                  <a:schemeClr val="tx1">
+                    <a:tint val="75000"/>
+                  </a:schemeClr>
+                </a:solidFill>
+              </a:defRPr>
+            </a:lvl7pPr>
+            <a:lvl8pPr marL="3200400" indent="0">
+              <a:buNone/>
+              <a:defRPr sz="1400">
+                <a:solidFill>
+                  <a:schemeClr val="tx1">
+                    <a:tint val="75000"/>
+                  </a:schemeClr>
+                </a:solidFill>
+              </a:defRPr>
+            </a:lvl8pPr>
+            <a:lvl9pPr marL="3657600" indent="0">
+              <a:buNone/>
+              <a:defRPr sz="1400">
+                <a:solidFill>
+                  <a:schemeClr val="tx1">
+                    <a:tint val="75000"/>
+                  </a:schemeClr>
+                </a:solidFill>
+              </a:defRPr>
+            </a:lvl9pPr>
+          </a:lstStyle>
+          <a:p>
+            <a:pPr lvl="0"/>
+            <a:r>
+              <a:rPr lang="ko-KR" altLang="en-US"/>
+              <a:t>마스터 텍스트 스타일을 편집하려면 클릭</a:t>
+            </a:r>
           </a:p>
         </p:txBody>
       </p:sp>
@@ -818,7 +1337,7 @@
           <a:p>
             <a:fld id="{5BCAD085-E8A6-8845-BD4E-CB4CCA059FC4}" type="datetimeFigureOut">
               <a:rPr lang="en-US" smtClean="0"/>
-              <a:t>1/27/13</a:t>
+              <a:t>12/18/2025</a:t>
             </a:fld>
             <a:endParaRPr lang="en-US"/>
           </a:p>
@@ -866,10 +1385,78 @@
           </a:p>
         </p:txBody>
       </p:sp>
+      <p:sp>
+        <p:nvSpPr>
+          <p:cNvPr id="14" name="TextBox 13"/>
+          <p:cNvSpPr txBox="1"/>
+          <p:nvPr/>
+        </p:nvSpPr>
+        <p:spPr>
+          <a:xfrm>
+            <a:off x="228600" y="710624"/>
+            <a:ext cx="457319" cy="584776"/>
+          </a:xfrm>
+          <a:prstGeom prst="rect">
+            <a:avLst/>
+          </a:prstGeom>
+        </p:spPr>
+        <p:txBody>
+          <a:bodyPr vert="horz" lIns="91440" tIns="45720" rIns="91440" bIns="45720" rtlCol="0" anchor="ctr">
+            <a:noAutofit/>
+          </a:bodyPr>
+          <a:lstStyle/>
+          <a:p>
+            <a:pPr lvl="0"/>
+            <a:r>
+              <a:rPr lang="en-US" sz="8000" dirty="0">
+                <a:solidFill>
+                  <a:schemeClr val="tx1"/>
+                </a:solidFill>
+                <a:effectLst/>
+              </a:rPr>
+              <a:t>“</a:t>
+            </a:r>
+          </a:p>
+        </p:txBody>
+      </p:sp>
+      <p:sp>
+        <p:nvSpPr>
+          <p:cNvPr id="15" name="TextBox 14"/>
+          <p:cNvSpPr txBox="1"/>
+          <p:nvPr/>
+        </p:nvSpPr>
+        <p:spPr>
+          <a:xfrm>
+            <a:off x="7696200" y="2768601"/>
+            <a:ext cx="457319" cy="584776"/>
+          </a:xfrm>
+          <a:prstGeom prst="rect">
+            <a:avLst/>
+          </a:prstGeom>
+        </p:spPr>
+        <p:txBody>
+          <a:bodyPr vert="horz" lIns="91440" tIns="45720" rIns="91440" bIns="45720" rtlCol="0" anchor="ctr">
+            <a:noAutofit/>
+          </a:bodyPr>
+          <a:lstStyle/>
+          <a:p>
+            <a:pPr lvl="0" algn="r"/>
+            <a:r>
+              <a:rPr lang="en-US" sz="8000" dirty="0">
+                <a:solidFill>
+                  <a:schemeClr val="tx1"/>
+                </a:solidFill>
+                <a:effectLst/>
+              </a:rPr>
+              <a:t>”</a:t>
+            </a:r>
+          </a:p>
+        </p:txBody>
+      </p:sp>
     </p:spTree>
     <p:extLst>
       <p:ext uri="{BB962C8B-B14F-4D97-AF65-F5344CB8AC3E}">
-        <p14:creationId xmlns:p14="http://schemas.microsoft.com/office/powerpoint/2010/main" val="2614314258"/>
+        <p14:creationId xmlns:p14="http://schemas.microsoft.com/office/powerpoint/2010/main" val="1153106653"/>
       </p:ext>
     </p:extLst>
   </p:cSld>
@@ -879,9 +1466,9 @@
 </p:sldLayout>
 </file>
 
-<file path=ppt/slideLayouts/slideLayout3.xml><?xml version="1.0" encoding="utf-8"?>
-<p:sldLayout xmlns:a="http://schemas.openxmlformats.org/drawingml/2006/main" xmlns:r="http://schemas.openxmlformats.org/officeDocument/2006/relationships" xmlns:p="http://schemas.openxmlformats.org/presentationml/2006/main" type="secHead" preserve="1">
-  <p:cSld name="Section Header">
+<file path=ppt/slideLayouts/slideLayout13.xml><?xml version="1.0" encoding="utf-8"?>
+<p:sldLayout xmlns:a="http://schemas.openxmlformats.org/drawingml/2006/main" xmlns:r="http://schemas.openxmlformats.org/officeDocument/2006/relationships" xmlns:p="http://schemas.openxmlformats.org/presentationml/2006/main" preserve="1">
+  <p:cSld name="명함">
     <p:spTree>
       <p:nvGrpSpPr>
         <p:cNvPr id="1" name=""/>
@@ -908,23 +1495,25 @@
         </p:nvSpPr>
         <p:spPr>
           <a:xfrm>
-            <a:off x="722313" y="4406900"/>
-            <a:ext cx="7772400" cy="1362075"/>
-          </a:xfrm>
-        </p:spPr>
-        <p:txBody>
-          <a:bodyPr anchor="t"/>
+            <a:off x="533400" y="3429000"/>
+            <a:ext cx="6382361" cy="1697400"/>
+          </a:xfrm>
+        </p:spPr>
+        <p:txBody>
+          <a:bodyPr anchor="b">
+            <a:normAutofit/>
+          </a:bodyPr>
           <a:lstStyle>
             <a:lvl1pPr algn="l">
-              <a:defRPr sz="4000" b="1" cap="all"/>
+              <a:defRPr sz="2800" b="0" cap="all"/>
             </a:lvl1pPr>
           </a:lstStyle>
           <a:p>
             <a:r>
-              <a:rPr lang="en-US" smtClean="0"/>
-              <a:t>Click to edit Master title style</a:t>
-            </a:r>
-            <a:endParaRPr lang="en-US"/>
+              <a:rPr lang="ko-KR" altLang="en-US"/>
+              <a:t>마스터 제목 스타일 편집</a:t>
+            </a:r>
+            <a:endParaRPr lang="en-US" dirty="0"/>
           </a:p>
         </p:txBody>
       </p:sp>
@@ -940,44 +1529,56 @@
         </p:nvSpPr>
         <p:spPr>
           <a:xfrm>
-            <a:off x="722313" y="2906713"/>
-            <a:ext cx="7772400" cy="1500187"/>
-          </a:xfrm>
-        </p:spPr>
-        <p:txBody>
-          <a:bodyPr anchor="b"/>
+            <a:off x="533400" y="5132980"/>
+            <a:ext cx="6383552" cy="886819"/>
+          </a:xfrm>
+        </p:spPr>
+        <p:txBody>
+          <a:bodyPr anchor="t">
+            <a:normAutofit/>
+          </a:bodyPr>
           <a:lstStyle>
-            <a:lvl1pPr marL="0" indent="0">
-              <a:buNone/>
-              <a:defRPr sz="2000">
+            <a:lvl1pPr marL="0" indent="0" algn="l">
+              <a:buNone/>
+              <a:defRPr sz="1800">
+                <a:solidFill>
+                  <a:schemeClr val="bg2">
+                    <a:lumMod val="75000"/>
+                  </a:schemeClr>
+                </a:solidFill>
+              </a:defRPr>
+            </a:lvl1pPr>
+            <a:lvl2pPr marL="457200" indent="0">
+              <a:buNone/>
+              <a:defRPr sz="1800">
                 <a:solidFill>
                   <a:schemeClr val="tx1">
                     <a:tint val="75000"/>
                   </a:schemeClr>
                 </a:solidFill>
               </a:defRPr>
-            </a:lvl1pPr>
-            <a:lvl2pPr marL="457200" indent="0">
-              <a:buNone/>
-              <a:defRPr sz="1800">
+            </a:lvl2pPr>
+            <a:lvl3pPr marL="914400" indent="0">
+              <a:buNone/>
+              <a:defRPr sz="1600">
                 <a:solidFill>
                   <a:schemeClr val="tx1">
                     <a:tint val="75000"/>
                   </a:schemeClr>
                 </a:solidFill>
               </a:defRPr>
-            </a:lvl2pPr>
-            <a:lvl3pPr marL="914400" indent="0">
-              <a:buNone/>
-              <a:defRPr sz="1600">
+            </a:lvl3pPr>
+            <a:lvl4pPr marL="1371600" indent="0">
+              <a:buNone/>
+              <a:defRPr sz="1400">
                 <a:solidFill>
                   <a:schemeClr val="tx1">
                     <a:tint val="75000"/>
                   </a:schemeClr>
                 </a:solidFill>
               </a:defRPr>
-            </a:lvl3pPr>
-            <a:lvl4pPr marL="1371600" indent="0">
+            </a:lvl4pPr>
+            <a:lvl5pPr marL="1828800" indent="0">
               <a:buNone/>
               <a:defRPr sz="1400">
                 <a:solidFill>
@@ -986,8 +1587,8 @@
                   </a:schemeClr>
                 </a:solidFill>
               </a:defRPr>
-            </a:lvl4pPr>
-            <a:lvl5pPr marL="1828800" indent="0">
+            </a:lvl5pPr>
+            <a:lvl6pPr marL="2286000" indent="0">
               <a:buNone/>
               <a:defRPr sz="1400">
                 <a:solidFill>
@@ -996,8 +1597,8 @@
                   </a:schemeClr>
                 </a:solidFill>
               </a:defRPr>
-            </a:lvl5pPr>
-            <a:lvl6pPr marL="2286000" indent="0">
+            </a:lvl6pPr>
+            <a:lvl7pPr marL="2743200" indent="0">
               <a:buNone/>
               <a:defRPr sz="1400">
                 <a:solidFill>
@@ -1006,8 +1607,8 @@
                   </a:schemeClr>
                 </a:solidFill>
               </a:defRPr>
-            </a:lvl6pPr>
-            <a:lvl7pPr marL="2743200" indent="0">
+            </a:lvl7pPr>
+            <a:lvl8pPr marL="3200400" indent="0">
               <a:buNone/>
               <a:defRPr sz="1400">
                 <a:solidFill>
@@ -1016,8 +1617,8 @@
                   </a:schemeClr>
                 </a:solidFill>
               </a:defRPr>
-            </a:lvl7pPr>
-            <a:lvl8pPr marL="3200400" indent="0">
+            </a:lvl8pPr>
+            <a:lvl9pPr marL="3657600" indent="0">
               <a:buNone/>
               <a:defRPr sz="1400">
                 <a:solidFill>
@@ -1026,23 +1627,13 @@
                   </a:schemeClr>
                 </a:solidFill>
               </a:defRPr>
-            </a:lvl8pPr>
-            <a:lvl9pPr marL="3657600" indent="0">
-              <a:buNone/>
-              <a:defRPr sz="1400">
-                <a:solidFill>
-                  <a:schemeClr val="tx1">
-                    <a:tint val="75000"/>
-                  </a:schemeClr>
-                </a:solidFill>
-              </a:defRPr>
             </a:lvl9pPr>
           </a:lstStyle>
           <a:p>
             <a:pPr lvl="0"/>
             <a:r>
-              <a:rPr lang="en-US" smtClean="0"/>
-              <a:t>Click to edit Master text styles</a:t>
+              <a:rPr lang="ko-KR" altLang="en-US"/>
+              <a:t>마스터 텍스트 스타일을 편집하려면 클릭</a:t>
             </a:r>
           </a:p>
         </p:txBody>
@@ -1064,7 +1655,7 @@
           <a:p>
             <a:fld id="{5BCAD085-E8A6-8845-BD4E-CB4CCA059FC4}" type="datetimeFigureOut">
               <a:rPr lang="en-US" smtClean="0"/>
-              <a:t>1/27/13</a:t>
+              <a:t>12/18/2025</a:t>
             </a:fld>
             <a:endParaRPr lang="en-US"/>
           </a:p>
@@ -1115,7 +1706,7 @@
     </p:spTree>
     <p:extLst>
       <p:ext uri="{BB962C8B-B14F-4D97-AF65-F5344CB8AC3E}">
-        <p14:creationId xmlns:p14="http://schemas.microsoft.com/office/powerpoint/2010/main" val="960648375"/>
+        <p14:creationId xmlns:p14="http://schemas.microsoft.com/office/powerpoint/2010/main" val="2545251791"/>
       </p:ext>
     </p:extLst>
   </p:cSld>
@@ -1125,9 +1716,9 @@
 </p:sldLayout>
 </file>
 
-<file path=ppt/slideLayouts/slideLayout4.xml><?xml version="1.0" encoding="utf-8"?>
-<p:sldLayout xmlns:a="http://schemas.openxmlformats.org/drawingml/2006/main" xmlns:r="http://schemas.openxmlformats.org/officeDocument/2006/relationships" xmlns:p="http://schemas.openxmlformats.org/presentationml/2006/main" type="twoObj" preserve="1">
-  <p:cSld name="Two Content">
+<file path=ppt/slideLayouts/slideLayout14.xml><?xml version="1.0" encoding="utf-8"?>
+<p:sldLayout xmlns:a="http://schemas.openxmlformats.org/drawingml/2006/main" xmlns:r="http://schemas.openxmlformats.org/officeDocument/2006/relationships" xmlns:p="http://schemas.openxmlformats.org/presentationml/2006/main" preserve="1">
+  <p:cSld name="인용문 있는 명함">
     <p:spTree>
       <p:nvGrpSpPr>
         <p:cNvPr id="1" name=""/>
@@ -1152,192 +1743,206 @@
             <p:ph type="title"/>
           </p:nvPr>
         </p:nvSpPr>
-        <p:spPr/>
-        <p:txBody>
-          <a:bodyPr/>
-          <a:lstStyle/>
-          <a:p>
-            <a:r>
-              <a:rPr lang="en-US" smtClean="0"/>
-              <a:t>Click to edit Master title style</a:t>
-            </a:r>
-            <a:endParaRPr lang="en-US"/>
-          </a:p>
-        </p:txBody>
-      </p:sp>
-      <p:sp>
-        <p:nvSpPr>
-          <p:cNvPr id="3" name="Content Placeholder 2"/>
+        <p:spPr>
+          <a:xfrm>
+            <a:off x="856284" y="533400"/>
+            <a:ext cx="6859786" cy="2895600"/>
+          </a:xfrm>
+        </p:spPr>
+        <p:txBody>
+          <a:bodyPr anchor="ctr">
+            <a:normAutofit/>
+          </a:bodyPr>
+          <a:lstStyle>
+            <a:lvl1pPr algn="l">
+              <a:defRPr sz="2800" b="0" cap="all">
+                <a:solidFill>
+                  <a:schemeClr val="tx1"/>
+                </a:solidFill>
+              </a:defRPr>
+            </a:lvl1pPr>
+          </a:lstStyle>
+          <a:p>
+            <a:r>
+              <a:rPr lang="ko-KR" altLang="en-US"/>
+              <a:t>마스터 제목 스타일 편집</a:t>
+            </a:r>
+            <a:endParaRPr lang="en-US" dirty="0"/>
+          </a:p>
+        </p:txBody>
+      </p:sp>
+      <p:sp>
+        <p:nvSpPr>
+          <p:cNvPr id="10" name="Text Placeholder 9"/>
           <p:cNvSpPr>
             <a:spLocks noGrp="1"/>
           </p:cNvSpPr>
           <p:nvPr>
-            <p:ph sz="half" idx="1"/>
-          </p:nvPr>
-        </p:nvSpPr>
-        <p:spPr>
-          <a:xfrm>
-            <a:off x="457200" y="1600200"/>
-            <a:ext cx="4038600" cy="4525963"/>
-          </a:xfrm>
-        </p:spPr>
-        <p:txBody>
-          <a:bodyPr/>
+            <p:ph type="body" sz="quarter" idx="13"/>
+          </p:nvPr>
+        </p:nvSpPr>
+        <p:spPr>
+          <a:xfrm>
+            <a:off x="533400" y="3886200"/>
+            <a:ext cx="6382361" cy="1049866"/>
+          </a:xfrm>
+        </p:spPr>
+        <p:txBody>
+          <a:bodyPr vert="horz" lIns="91440" tIns="45720" rIns="91440" bIns="45720" rtlCol="0" anchor="b">
+            <a:normAutofit/>
+          </a:bodyPr>
           <a:lstStyle>
             <a:lvl1pPr>
-              <a:defRPr sz="2800"/>
+              <a:buNone/>
+              <a:defRPr lang="en-US" sz="2000" b="0" cap="all" dirty="0">
+                <a:ln w="3175" cmpd="sng">
+                  <a:noFill/>
+                </a:ln>
+                <a:solidFill>
+                  <a:schemeClr val="tx1"/>
+                </a:solidFill>
+                <a:effectLst/>
+              </a:defRPr>
             </a:lvl1pPr>
-            <a:lvl2pPr>
-              <a:defRPr sz="2400"/>
+          </a:lstStyle>
+          <a:p>
+            <a:pPr marL="0" lvl="0">
+              <a:spcBef>
+                <a:spcPct val="0"/>
+              </a:spcBef>
+              <a:buNone/>
+            </a:pPr>
+            <a:r>
+              <a:rPr lang="ko-KR" altLang="en-US"/>
+              <a:t>마스터 텍스트 스타일을 편집하려면 클릭</a:t>
+            </a:r>
+          </a:p>
+        </p:txBody>
+      </p:sp>
+      <p:sp>
+        <p:nvSpPr>
+          <p:cNvPr id="3" name="Text Placeholder 2"/>
+          <p:cNvSpPr>
+            <a:spLocks noGrp="1"/>
+          </p:cNvSpPr>
+          <p:nvPr>
+            <p:ph type="body" idx="1"/>
+          </p:nvPr>
+        </p:nvSpPr>
+        <p:spPr>
+          <a:xfrm>
+            <a:off x="533400" y="4953000"/>
+            <a:ext cx="6382360" cy="1066800"/>
+          </a:xfrm>
+        </p:spPr>
+        <p:txBody>
+          <a:bodyPr anchor="t">
+            <a:normAutofit/>
+          </a:bodyPr>
+          <a:lstStyle>
+            <a:lvl1pPr marL="0" indent="0" algn="l">
+              <a:buNone/>
+              <a:defRPr sz="1800">
+                <a:solidFill>
+                  <a:schemeClr val="bg2">
+                    <a:lumMod val="75000"/>
+                  </a:schemeClr>
+                </a:solidFill>
+              </a:defRPr>
+            </a:lvl1pPr>
+            <a:lvl2pPr marL="457200" indent="0">
+              <a:buNone/>
+              <a:defRPr sz="1800">
+                <a:solidFill>
+                  <a:schemeClr val="tx1">
+                    <a:tint val="75000"/>
+                  </a:schemeClr>
+                </a:solidFill>
+              </a:defRPr>
             </a:lvl2pPr>
-            <a:lvl3pPr>
-              <a:defRPr sz="2000"/>
+            <a:lvl3pPr marL="914400" indent="0">
+              <a:buNone/>
+              <a:defRPr sz="1600">
+                <a:solidFill>
+                  <a:schemeClr val="tx1">
+                    <a:tint val="75000"/>
+                  </a:schemeClr>
+                </a:solidFill>
+              </a:defRPr>
             </a:lvl3pPr>
-            <a:lvl4pPr>
-              <a:defRPr sz="1800"/>
+            <a:lvl4pPr marL="1371600" indent="0">
+              <a:buNone/>
+              <a:defRPr sz="1400">
+                <a:solidFill>
+                  <a:schemeClr val="tx1">
+                    <a:tint val="75000"/>
+                  </a:schemeClr>
+                </a:solidFill>
+              </a:defRPr>
             </a:lvl4pPr>
-            <a:lvl5pPr>
-              <a:defRPr sz="1800"/>
+            <a:lvl5pPr marL="1828800" indent="0">
+              <a:buNone/>
+              <a:defRPr sz="1400">
+                <a:solidFill>
+                  <a:schemeClr val="tx1">
+                    <a:tint val="75000"/>
+                  </a:schemeClr>
+                </a:solidFill>
+              </a:defRPr>
             </a:lvl5pPr>
-            <a:lvl6pPr>
-              <a:defRPr sz="1800"/>
+            <a:lvl6pPr marL="2286000" indent="0">
+              <a:buNone/>
+              <a:defRPr sz="1400">
+                <a:solidFill>
+                  <a:schemeClr val="tx1">
+                    <a:tint val="75000"/>
+                  </a:schemeClr>
+                </a:solidFill>
+              </a:defRPr>
             </a:lvl6pPr>
-            <a:lvl7pPr>
-              <a:defRPr sz="1800"/>
+            <a:lvl7pPr marL="2743200" indent="0">
+              <a:buNone/>
+              <a:defRPr sz="1400">
+                <a:solidFill>
+                  <a:schemeClr val="tx1">
+                    <a:tint val="75000"/>
+                  </a:schemeClr>
+                </a:solidFill>
+              </a:defRPr>
             </a:lvl7pPr>
-            <a:lvl8pPr>
-              <a:defRPr sz="1800"/>
+            <a:lvl8pPr marL="3200400" indent="0">
+              <a:buNone/>
+              <a:defRPr sz="1400">
+                <a:solidFill>
+                  <a:schemeClr val="tx1">
+                    <a:tint val="75000"/>
+                  </a:schemeClr>
+                </a:solidFill>
+              </a:defRPr>
             </a:lvl8pPr>
-            <a:lvl9pPr>
-              <a:defRPr sz="1800"/>
+            <a:lvl9pPr marL="3657600" indent="0">
+              <a:buNone/>
+              <a:defRPr sz="1400">
+                <a:solidFill>
+                  <a:schemeClr val="tx1">
+                    <a:tint val="75000"/>
+                  </a:schemeClr>
+                </a:solidFill>
+              </a:defRPr>
             </a:lvl9pPr>
           </a:lstStyle>
           <a:p>
             <a:pPr lvl="0"/>
             <a:r>
-              <a:rPr lang="en-US" smtClean="0"/>
-              <a:t>Click to edit Master text styles</a:t>
-            </a:r>
-          </a:p>
-          <a:p>
-            <a:pPr lvl="1"/>
-            <a:r>
-              <a:rPr lang="en-US" smtClean="0"/>
-              <a:t>Second level</a:t>
-            </a:r>
-          </a:p>
-          <a:p>
-            <a:pPr lvl="2"/>
-            <a:r>
-              <a:rPr lang="en-US" smtClean="0"/>
-              <a:t>Third level</a:t>
-            </a:r>
-          </a:p>
-          <a:p>
-            <a:pPr lvl="3"/>
-            <a:r>
-              <a:rPr lang="en-US" smtClean="0"/>
-              <a:t>Fourth level</a:t>
-            </a:r>
-          </a:p>
-          <a:p>
-            <a:pPr lvl="4"/>
-            <a:r>
-              <a:rPr lang="en-US" smtClean="0"/>
-              <a:t>Fifth level</a:t>
-            </a:r>
-            <a:endParaRPr lang="en-US"/>
-          </a:p>
-        </p:txBody>
-      </p:sp>
-      <p:sp>
-        <p:nvSpPr>
-          <p:cNvPr id="4" name="Content Placeholder 3"/>
-          <p:cNvSpPr>
-            <a:spLocks noGrp="1"/>
-          </p:cNvSpPr>
-          <p:nvPr>
-            <p:ph sz="half" idx="2"/>
-          </p:nvPr>
-        </p:nvSpPr>
-        <p:spPr>
-          <a:xfrm>
-            <a:off x="4648200" y="1600200"/>
-            <a:ext cx="4038600" cy="4525963"/>
-          </a:xfrm>
-        </p:spPr>
-        <p:txBody>
-          <a:bodyPr/>
-          <a:lstStyle>
-            <a:lvl1pPr>
-              <a:defRPr sz="2800"/>
-            </a:lvl1pPr>
-            <a:lvl2pPr>
-              <a:defRPr sz="2400"/>
-            </a:lvl2pPr>
-            <a:lvl3pPr>
-              <a:defRPr sz="2000"/>
-            </a:lvl3pPr>
-            <a:lvl4pPr>
-              <a:defRPr sz="1800"/>
-            </a:lvl4pPr>
-            <a:lvl5pPr>
-              <a:defRPr sz="1800"/>
-            </a:lvl5pPr>
-            <a:lvl6pPr>
-              <a:defRPr sz="1800"/>
-            </a:lvl6pPr>
-            <a:lvl7pPr>
-              <a:defRPr sz="1800"/>
-            </a:lvl7pPr>
-            <a:lvl8pPr>
-              <a:defRPr sz="1800"/>
-            </a:lvl8pPr>
-            <a:lvl9pPr>
-              <a:defRPr sz="1800"/>
-            </a:lvl9pPr>
-          </a:lstStyle>
-          <a:p>
-            <a:pPr lvl="0"/>
-            <a:r>
-              <a:rPr lang="en-US" smtClean="0"/>
-              <a:t>Click to edit Master text styles</a:t>
-            </a:r>
-          </a:p>
-          <a:p>
-            <a:pPr lvl="1"/>
-            <a:r>
-              <a:rPr lang="en-US" smtClean="0"/>
-              <a:t>Second level</a:t>
-            </a:r>
-          </a:p>
-          <a:p>
-            <a:pPr lvl="2"/>
-            <a:r>
-              <a:rPr lang="en-US" smtClean="0"/>
-              <a:t>Third level</a:t>
-            </a:r>
-          </a:p>
-          <a:p>
-            <a:pPr lvl="3"/>
-            <a:r>
-              <a:rPr lang="en-US" smtClean="0"/>
-              <a:t>Fourth level</a:t>
-            </a:r>
-          </a:p>
-          <a:p>
-            <a:pPr lvl="4"/>
-            <a:r>
-              <a:rPr lang="en-US" smtClean="0"/>
-              <a:t>Fifth level</a:t>
-            </a:r>
-            <a:endParaRPr lang="en-US"/>
-          </a:p>
-        </p:txBody>
-      </p:sp>
-      <p:sp>
-        <p:nvSpPr>
-          <p:cNvPr id="5" name="Date Placeholder 4"/>
+              <a:rPr lang="ko-KR" altLang="en-US"/>
+              <a:t>마스터 텍스트 스타일을 편집하려면 클릭</a:t>
+            </a:r>
+          </a:p>
+        </p:txBody>
+      </p:sp>
+      <p:sp>
+        <p:nvSpPr>
+          <p:cNvPr id="4" name="Date Placeholder 3"/>
           <p:cNvSpPr>
             <a:spLocks noGrp="1"/>
           </p:cNvSpPr>
@@ -1352,7 +1957,7 @@
           <a:p>
             <a:fld id="{5BCAD085-E8A6-8845-BD4E-CB4CCA059FC4}" type="datetimeFigureOut">
               <a:rPr lang="en-US" smtClean="0"/>
-              <a:t>1/27/13</a:t>
+              <a:t>12/18/2025</a:t>
             </a:fld>
             <a:endParaRPr lang="en-US"/>
           </a:p>
@@ -1360,7 +1965,7 @@
       </p:sp>
       <p:sp>
         <p:nvSpPr>
-          <p:cNvPr id="6" name="Footer Placeholder 5"/>
+          <p:cNvPr id="5" name="Footer Placeholder 4"/>
           <p:cNvSpPr>
             <a:spLocks noGrp="1"/>
           </p:cNvSpPr>
@@ -1379,7 +1984,7 @@
       </p:sp>
       <p:sp>
         <p:nvSpPr>
-          <p:cNvPr id="7" name="Slide Number Placeholder 6"/>
+          <p:cNvPr id="6" name="Slide Number Placeholder 5"/>
           <p:cNvSpPr>
             <a:spLocks noGrp="1"/>
           </p:cNvSpPr>
@@ -1400,10 +2005,78 @@
           </a:p>
         </p:txBody>
       </p:sp>
+      <p:sp>
+        <p:nvSpPr>
+          <p:cNvPr id="14" name="TextBox 13"/>
+          <p:cNvSpPr txBox="1"/>
+          <p:nvPr/>
+        </p:nvSpPr>
+        <p:spPr>
+          <a:xfrm>
+            <a:off x="228600" y="710624"/>
+            <a:ext cx="457319" cy="584776"/>
+          </a:xfrm>
+          <a:prstGeom prst="rect">
+            <a:avLst/>
+          </a:prstGeom>
+        </p:spPr>
+        <p:txBody>
+          <a:bodyPr vert="horz" lIns="91440" tIns="45720" rIns="91440" bIns="45720" rtlCol="0" anchor="ctr">
+            <a:noAutofit/>
+          </a:bodyPr>
+          <a:lstStyle/>
+          <a:p>
+            <a:pPr lvl="0"/>
+            <a:r>
+              <a:rPr lang="en-US" sz="8000" dirty="0">
+                <a:solidFill>
+                  <a:schemeClr val="tx1"/>
+                </a:solidFill>
+                <a:effectLst/>
+              </a:rPr>
+              <a:t>“</a:t>
+            </a:r>
+          </a:p>
+        </p:txBody>
+      </p:sp>
+      <p:sp>
+        <p:nvSpPr>
+          <p:cNvPr id="15" name="TextBox 14"/>
+          <p:cNvSpPr txBox="1"/>
+          <p:nvPr/>
+        </p:nvSpPr>
+        <p:spPr>
+          <a:xfrm>
+            <a:off x="7696200" y="2768601"/>
+            <a:ext cx="457319" cy="584776"/>
+          </a:xfrm>
+          <a:prstGeom prst="rect">
+            <a:avLst/>
+          </a:prstGeom>
+        </p:spPr>
+        <p:txBody>
+          <a:bodyPr vert="horz" lIns="91440" tIns="45720" rIns="91440" bIns="45720" rtlCol="0" anchor="ctr">
+            <a:noAutofit/>
+          </a:bodyPr>
+          <a:lstStyle/>
+          <a:p>
+            <a:pPr lvl="0" algn="r"/>
+            <a:r>
+              <a:rPr lang="en-US" sz="8000" dirty="0">
+                <a:solidFill>
+                  <a:schemeClr val="tx1"/>
+                </a:solidFill>
+                <a:effectLst/>
+              </a:rPr>
+              <a:t>”</a:t>
+            </a:r>
+          </a:p>
+        </p:txBody>
+      </p:sp>
     </p:spTree>
     <p:extLst>
       <p:ext uri="{BB962C8B-B14F-4D97-AF65-F5344CB8AC3E}">
-        <p14:creationId xmlns:p14="http://schemas.microsoft.com/office/powerpoint/2010/main" val="2782244947"/>
+        <p14:creationId xmlns:p14="http://schemas.microsoft.com/office/powerpoint/2010/main" val="1151790338"/>
       </p:ext>
     </p:extLst>
   </p:cSld>
@@ -1413,9 +2086,9 @@
 </p:sldLayout>
 </file>
 
-<file path=ppt/slideLayouts/slideLayout5.xml><?xml version="1.0" encoding="utf-8"?>
-<p:sldLayout xmlns:a="http://schemas.openxmlformats.org/drawingml/2006/main" xmlns:r="http://schemas.openxmlformats.org/officeDocument/2006/relationships" xmlns:p="http://schemas.openxmlformats.org/presentationml/2006/main" type="twoTxTwoObj" preserve="1">
-  <p:cSld name="Comparison">
+<file path=ppt/slideLayouts/slideLayout15.xml><?xml version="1.0" encoding="utf-8"?>
+<p:sldLayout xmlns:a="http://schemas.openxmlformats.org/drawingml/2006/main" xmlns:r="http://schemas.openxmlformats.org/officeDocument/2006/relationships" xmlns:p="http://schemas.openxmlformats.org/presentationml/2006/main" preserve="1">
+  <p:cSld name="참 또는 거짓">
     <p:spTree>
       <p:nvGrpSpPr>
         <p:cNvPr id="1" name=""/>
@@ -1440,20 +2113,76 @@
             <p:ph type="title"/>
           </p:nvPr>
         </p:nvSpPr>
-        <p:spPr/>
-        <p:txBody>
-          <a:bodyPr/>
+        <p:spPr>
+          <a:xfrm>
+            <a:off x="533400" y="533400"/>
+            <a:ext cx="7525658" cy="2895600"/>
+          </a:xfrm>
+        </p:spPr>
+        <p:txBody>
+          <a:bodyPr vert="horz" lIns="91440" tIns="45720" rIns="91440" bIns="45720" rtlCol="0" anchor="ctr">
+            <a:normAutofit/>
+          </a:bodyPr>
           <a:lstStyle>
             <a:lvl1pPr>
-              <a:defRPr/>
+              <a:defRPr lang="en-US" sz="2800" b="0" dirty="0"/>
             </a:lvl1pPr>
           </a:lstStyle>
           <a:p>
-            <a:r>
-              <a:rPr lang="en-US" smtClean="0"/>
-              <a:t>Click to edit Master title style</a:t>
-            </a:r>
-            <a:endParaRPr lang="en-US"/>
+            <a:pPr marL="0" lvl="0"/>
+            <a:r>
+              <a:rPr lang="ko-KR" altLang="en-US"/>
+              <a:t>마스터 제목 스타일 편집</a:t>
+            </a:r>
+            <a:endParaRPr lang="en-US" dirty="0"/>
+          </a:p>
+        </p:txBody>
+      </p:sp>
+      <p:sp>
+        <p:nvSpPr>
+          <p:cNvPr id="10" name="Text Placeholder 9"/>
+          <p:cNvSpPr>
+            <a:spLocks noGrp="1"/>
+          </p:cNvSpPr>
+          <p:nvPr>
+            <p:ph type="body" sz="quarter" idx="13"/>
+          </p:nvPr>
+        </p:nvSpPr>
+        <p:spPr>
+          <a:xfrm>
+            <a:off x="533400" y="3928534"/>
+            <a:ext cx="6382361" cy="838200"/>
+          </a:xfrm>
+        </p:spPr>
+        <p:txBody>
+          <a:bodyPr vert="horz" lIns="91440" tIns="45720" rIns="91440" bIns="45720" rtlCol="0" anchor="b">
+            <a:normAutofit/>
+          </a:bodyPr>
+          <a:lstStyle>
+            <a:lvl1pPr>
+              <a:buNone/>
+              <a:defRPr lang="en-US" sz="2000" b="0" cap="all" dirty="0">
+                <a:ln w="3175" cmpd="sng">
+                  <a:noFill/>
+                </a:ln>
+                <a:solidFill>
+                  <a:schemeClr val="tx1"/>
+                </a:solidFill>
+                <a:effectLst/>
+              </a:defRPr>
+            </a:lvl1pPr>
+          </a:lstStyle>
+          <a:p>
+            <a:pPr marL="0" lvl="0">
+              <a:spcBef>
+                <a:spcPct val="0"/>
+              </a:spcBef>
+              <a:buNone/>
+            </a:pPr>
+            <a:r>
+              <a:rPr lang="ko-KR" altLang="en-US"/>
+              <a:t>마스터 텍스트 스타일을 편집하려면 클릭</a:t>
+            </a:r>
           </a:p>
         </p:txBody>
       </p:sp>
@@ -1469,297 +2198,118 @@
         </p:nvSpPr>
         <p:spPr>
           <a:xfrm>
-            <a:off x="457200" y="1535113"/>
-            <a:ext cx="4040188" cy="639762"/>
-          </a:xfrm>
-        </p:spPr>
-        <p:txBody>
-          <a:bodyPr anchor="b"/>
+            <a:off x="533400" y="4766735"/>
+            <a:ext cx="6382360" cy="1253065"/>
+          </a:xfrm>
+        </p:spPr>
+        <p:txBody>
+          <a:bodyPr anchor="t">
+            <a:normAutofit/>
+          </a:bodyPr>
           <a:lstStyle>
-            <a:lvl1pPr marL="0" indent="0">
-              <a:buNone/>
-              <a:defRPr sz="2400" b="1"/>
+            <a:lvl1pPr marL="0" indent="0" algn="l">
+              <a:buNone/>
+              <a:defRPr sz="1800">
+                <a:solidFill>
+                  <a:schemeClr val="bg2">
+                    <a:lumMod val="75000"/>
+                  </a:schemeClr>
+                </a:solidFill>
+              </a:defRPr>
             </a:lvl1pPr>
             <a:lvl2pPr marL="457200" indent="0">
               <a:buNone/>
-              <a:defRPr sz="2000" b="1"/>
+              <a:defRPr sz="1800">
+                <a:solidFill>
+                  <a:schemeClr val="tx1">
+                    <a:tint val="75000"/>
+                  </a:schemeClr>
+                </a:solidFill>
+              </a:defRPr>
             </a:lvl2pPr>
             <a:lvl3pPr marL="914400" indent="0">
               <a:buNone/>
-              <a:defRPr sz="1800" b="1"/>
+              <a:defRPr sz="1600">
+                <a:solidFill>
+                  <a:schemeClr val="tx1">
+                    <a:tint val="75000"/>
+                  </a:schemeClr>
+                </a:solidFill>
+              </a:defRPr>
             </a:lvl3pPr>
             <a:lvl4pPr marL="1371600" indent="0">
               <a:buNone/>
-              <a:defRPr sz="1600" b="1"/>
+              <a:defRPr sz="1400">
+                <a:solidFill>
+                  <a:schemeClr val="tx1">
+                    <a:tint val="75000"/>
+                  </a:schemeClr>
+                </a:solidFill>
+              </a:defRPr>
             </a:lvl4pPr>
             <a:lvl5pPr marL="1828800" indent="0">
               <a:buNone/>
-              <a:defRPr sz="1600" b="1"/>
+              <a:defRPr sz="1400">
+                <a:solidFill>
+                  <a:schemeClr val="tx1">
+                    <a:tint val="75000"/>
+                  </a:schemeClr>
+                </a:solidFill>
+              </a:defRPr>
             </a:lvl5pPr>
             <a:lvl6pPr marL="2286000" indent="0">
               <a:buNone/>
-              <a:defRPr sz="1600" b="1"/>
+              <a:defRPr sz="1400">
+                <a:solidFill>
+                  <a:schemeClr val="tx1">
+                    <a:tint val="75000"/>
+                  </a:schemeClr>
+                </a:solidFill>
+              </a:defRPr>
             </a:lvl6pPr>
             <a:lvl7pPr marL="2743200" indent="0">
               <a:buNone/>
-              <a:defRPr sz="1600" b="1"/>
+              <a:defRPr sz="1400">
+                <a:solidFill>
+                  <a:schemeClr val="tx1">
+                    <a:tint val="75000"/>
+                  </a:schemeClr>
+                </a:solidFill>
+              </a:defRPr>
             </a:lvl7pPr>
             <a:lvl8pPr marL="3200400" indent="0">
               <a:buNone/>
-              <a:defRPr sz="1600" b="1"/>
+              <a:defRPr sz="1400">
+                <a:solidFill>
+                  <a:schemeClr val="tx1">
+                    <a:tint val="75000"/>
+                  </a:schemeClr>
+                </a:solidFill>
+              </a:defRPr>
             </a:lvl8pPr>
             <a:lvl9pPr marL="3657600" indent="0">
               <a:buNone/>
-              <a:defRPr sz="1600" b="1"/>
+              <a:defRPr sz="1400">
+                <a:solidFill>
+                  <a:schemeClr val="tx1">
+                    <a:tint val="75000"/>
+                  </a:schemeClr>
+                </a:solidFill>
+              </a:defRPr>
             </a:lvl9pPr>
           </a:lstStyle>
           <a:p>
             <a:pPr lvl="0"/>
             <a:r>
-              <a:rPr lang="en-US" smtClean="0"/>
-              <a:t>Click to edit Master text styles</a:t>
-            </a:r>
-          </a:p>
-        </p:txBody>
-      </p:sp>
-      <p:sp>
-        <p:nvSpPr>
-          <p:cNvPr id="4" name="Content Placeholder 3"/>
-          <p:cNvSpPr>
-            <a:spLocks noGrp="1"/>
-          </p:cNvSpPr>
-          <p:nvPr>
-            <p:ph sz="half" idx="2"/>
-          </p:nvPr>
-        </p:nvSpPr>
-        <p:spPr>
-          <a:xfrm>
-            <a:off x="457200" y="2174875"/>
-            <a:ext cx="4040188" cy="3951288"/>
-          </a:xfrm>
-        </p:spPr>
-        <p:txBody>
-          <a:bodyPr/>
-          <a:lstStyle>
-            <a:lvl1pPr>
-              <a:defRPr sz="2400"/>
-            </a:lvl1pPr>
-            <a:lvl2pPr>
-              <a:defRPr sz="2000"/>
-            </a:lvl2pPr>
-            <a:lvl3pPr>
-              <a:defRPr sz="1800"/>
-            </a:lvl3pPr>
-            <a:lvl4pPr>
-              <a:defRPr sz="1600"/>
-            </a:lvl4pPr>
-            <a:lvl5pPr>
-              <a:defRPr sz="1600"/>
-            </a:lvl5pPr>
-            <a:lvl6pPr>
-              <a:defRPr sz="1600"/>
-            </a:lvl6pPr>
-            <a:lvl7pPr>
-              <a:defRPr sz="1600"/>
-            </a:lvl7pPr>
-            <a:lvl8pPr>
-              <a:defRPr sz="1600"/>
-            </a:lvl8pPr>
-            <a:lvl9pPr>
-              <a:defRPr sz="1600"/>
-            </a:lvl9pPr>
-          </a:lstStyle>
-          <a:p>
-            <a:pPr lvl="0"/>
-            <a:r>
-              <a:rPr lang="en-US" smtClean="0"/>
-              <a:t>Click to edit Master text styles</a:t>
-            </a:r>
-          </a:p>
-          <a:p>
-            <a:pPr lvl="1"/>
-            <a:r>
-              <a:rPr lang="en-US" smtClean="0"/>
-              <a:t>Second level</a:t>
-            </a:r>
-          </a:p>
-          <a:p>
-            <a:pPr lvl="2"/>
-            <a:r>
-              <a:rPr lang="en-US" smtClean="0"/>
-              <a:t>Third level</a:t>
-            </a:r>
-          </a:p>
-          <a:p>
-            <a:pPr lvl="3"/>
-            <a:r>
-              <a:rPr lang="en-US" smtClean="0"/>
-              <a:t>Fourth level</a:t>
-            </a:r>
-          </a:p>
-          <a:p>
-            <a:pPr lvl="4"/>
-            <a:r>
-              <a:rPr lang="en-US" smtClean="0"/>
-              <a:t>Fifth level</a:t>
-            </a:r>
-            <a:endParaRPr lang="en-US"/>
-          </a:p>
-        </p:txBody>
-      </p:sp>
-      <p:sp>
-        <p:nvSpPr>
-          <p:cNvPr id="5" name="Text Placeholder 4"/>
-          <p:cNvSpPr>
-            <a:spLocks noGrp="1"/>
-          </p:cNvSpPr>
-          <p:nvPr>
-            <p:ph type="body" sz="quarter" idx="3"/>
-          </p:nvPr>
-        </p:nvSpPr>
-        <p:spPr>
-          <a:xfrm>
-            <a:off x="4645025" y="1535113"/>
-            <a:ext cx="4041775" cy="639762"/>
-          </a:xfrm>
-        </p:spPr>
-        <p:txBody>
-          <a:bodyPr anchor="b"/>
-          <a:lstStyle>
-            <a:lvl1pPr marL="0" indent="0">
-              <a:buNone/>
-              <a:defRPr sz="2400" b="1"/>
-            </a:lvl1pPr>
-            <a:lvl2pPr marL="457200" indent="0">
-              <a:buNone/>
-              <a:defRPr sz="2000" b="1"/>
-            </a:lvl2pPr>
-            <a:lvl3pPr marL="914400" indent="0">
-              <a:buNone/>
-              <a:defRPr sz="1800" b="1"/>
-            </a:lvl3pPr>
-            <a:lvl4pPr marL="1371600" indent="0">
-              <a:buNone/>
-              <a:defRPr sz="1600" b="1"/>
-            </a:lvl4pPr>
-            <a:lvl5pPr marL="1828800" indent="0">
-              <a:buNone/>
-              <a:defRPr sz="1600" b="1"/>
-            </a:lvl5pPr>
-            <a:lvl6pPr marL="2286000" indent="0">
-              <a:buNone/>
-              <a:defRPr sz="1600" b="1"/>
-            </a:lvl6pPr>
-            <a:lvl7pPr marL="2743200" indent="0">
-              <a:buNone/>
-              <a:defRPr sz="1600" b="1"/>
-            </a:lvl7pPr>
-            <a:lvl8pPr marL="3200400" indent="0">
-              <a:buNone/>
-              <a:defRPr sz="1600" b="1"/>
-            </a:lvl8pPr>
-            <a:lvl9pPr marL="3657600" indent="0">
-              <a:buNone/>
-              <a:defRPr sz="1600" b="1"/>
-            </a:lvl9pPr>
-          </a:lstStyle>
-          <a:p>
-            <a:pPr lvl="0"/>
-            <a:r>
-              <a:rPr lang="en-US" smtClean="0"/>
-              <a:t>Click to edit Master text styles</a:t>
-            </a:r>
-          </a:p>
-        </p:txBody>
-      </p:sp>
-      <p:sp>
-        <p:nvSpPr>
-          <p:cNvPr id="6" name="Content Placeholder 5"/>
-          <p:cNvSpPr>
-            <a:spLocks noGrp="1"/>
-          </p:cNvSpPr>
-          <p:nvPr>
-            <p:ph sz="quarter" idx="4"/>
-          </p:nvPr>
-        </p:nvSpPr>
-        <p:spPr>
-          <a:xfrm>
-            <a:off x="4645025" y="2174875"/>
-            <a:ext cx="4041775" cy="3951288"/>
-          </a:xfrm>
-        </p:spPr>
-        <p:txBody>
-          <a:bodyPr/>
-          <a:lstStyle>
-            <a:lvl1pPr>
-              <a:defRPr sz="2400"/>
-            </a:lvl1pPr>
-            <a:lvl2pPr>
-              <a:defRPr sz="2000"/>
-            </a:lvl2pPr>
-            <a:lvl3pPr>
-              <a:defRPr sz="1800"/>
-            </a:lvl3pPr>
-            <a:lvl4pPr>
-              <a:defRPr sz="1600"/>
-            </a:lvl4pPr>
-            <a:lvl5pPr>
-              <a:defRPr sz="1600"/>
-            </a:lvl5pPr>
-            <a:lvl6pPr>
-              <a:defRPr sz="1600"/>
-            </a:lvl6pPr>
-            <a:lvl7pPr>
-              <a:defRPr sz="1600"/>
-            </a:lvl7pPr>
-            <a:lvl8pPr>
-              <a:defRPr sz="1600"/>
-            </a:lvl8pPr>
-            <a:lvl9pPr>
-              <a:defRPr sz="1600"/>
-            </a:lvl9pPr>
-          </a:lstStyle>
-          <a:p>
-            <a:pPr lvl="0"/>
-            <a:r>
-              <a:rPr lang="en-US" smtClean="0"/>
-              <a:t>Click to edit Master text styles</a:t>
-            </a:r>
-          </a:p>
-          <a:p>
-            <a:pPr lvl="1"/>
-            <a:r>
-              <a:rPr lang="en-US" smtClean="0"/>
-              <a:t>Second level</a:t>
-            </a:r>
-          </a:p>
-          <a:p>
-            <a:pPr lvl="2"/>
-            <a:r>
-              <a:rPr lang="en-US" smtClean="0"/>
-              <a:t>Third level</a:t>
-            </a:r>
-          </a:p>
-          <a:p>
-            <a:pPr lvl="3"/>
-            <a:r>
-              <a:rPr lang="en-US" smtClean="0"/>
-              <a:t>Fourth level</a:t>
-            </a:r>
-          </a:p>
-          <a:p>
-            <a:pPr lvl="4"/>
-            <a:r>
-              <a:rPr lang="en-US" smtClean="0"/>
-              <a:t>Fifth level</a:t>
-            </a:r>
-            <a:endParaRPr lang="en-US"/>
-          </a:p>
-        </p:txBody>
-      </p:sp>
-      <p:sp>
-        <p:nvSpPr>
-          <p:cNvPr id="7" name="Date Placeholder 6"/>
+              <a:rPr lang="ko-KR" altLang="en-US"/>
+              <a:t>마스터 텍스트 스타일을 편집하려면 클릭</a:t>
+            </a:r>
+          </a:p>
+        </p:txBody>
+      </p:sp>
+      <p:sp>
+        <p:nvSpPr>
+          <p:cNvPr id="4" name="Date Placeholder 3"/>
           <p:cNvSpPr>
             <a:spLocks noGrp="1"/>
           </p:cNvSpPr>
@@ -1774,7 +2324,7 @@
           <a:p>
             <a:fld id="{5BCAD085-E8A6-8845-BD4E-CB4CCA059FC4}" type="datetimeFigureOut">
               <a:rPr lang="en-US" smtClean="0"/>
-              <a:t>1/27/13</a:t>
+              <a:t>12/18/2025</a:t>
             </a:fld>
             <a:endParaRPr lang="en-US"/>
           </a:p>
@@ -1782,7 +2332,7 @@
       </p:sp>
       <p:sp>
         <p:nvSpPr>
-          <p:cNvPr id="8" name="Footer Placeholder 7"/>
+          <p:cNvPr id="5" name="Footer Placeholder 4"/>
           <p:cNvSpPr>
             <a:spLocks noGrp="1"/>
           </p:cNvSpPr>
@@ -1801,7 +2351,7 @@
       </p:sp>
       <p:sp>
         <p:nvSpPr>
-          <p:cNvPr id="9" name="Slide Number Placeholder 8"/>
+          <p:cNvPr id="6" name="Slide Number Placeholder 5"/>
           <p:cNvSpPr>
             <a:spLocks noGrp="1"/>
           </p:cNvSpPr>
@@ -1825,7 +2375,7 @@
     </p:spTree>
     <p:extLst>
       <p:ext uri="{BB962C8B-B14F-4D97-AF65-F5344CB8AC3E}">
-        <p14:creationId xmlns:p14="http://schemas.microsoft.com/office/powerpoint/2010/main" val="990158736"/>
+        <p14:creationId xmlns:p14="http://schemas.microsoft.com/office/powerpoint/2010/main" val="1020275560"/>
       </p:ext>
     </p:extLst>
   </p:cSld>
@@ -1835,9 +2385,9 @@
 </p:sldLayout>
 </file>
 
-<file path=ppt/slideLayouts/slideLayout6.xml><?xml version="1.0" encoding="utf-8"?>
-<p:sldLayout xmlns:a="http://schemas.openxmlformats.org/drawingml/2006/main" xmlns:r="http://schemas.openxmlformats.org/officeDocument/2006/relationships" xmlns:p="http://schemas.openxmlformats.org/presentationml/2006/main" type="titleOnly" preserve="1">
-  <p:cSld name="Title Only">
+<file path=ppt/slideLayouts/slideLayout16.xml><?xml version="1.0" encoding="utf-8"?>
+<p:sldLayout xmlns:a="http://schemas.openxmlformats.org/drawingml/2006/main" xmlns:r="http://schemas.openxmlformats.org/officeDocument/2006/relationships" xmlns:p="http://schemas.openxmlformats.org/presentationml/2006/main" type="vertTx" preserve="1">
+  <p:cSld name="제목 및 세로 텍스트">
     <p:spTree>
       <p:nvGrpSpPr>
         <p:cNvPr id="1" name=""/>
@@ -1862,22 +2412,90 @@
             <p:ph type="title"/>
           </p:nvPr>
         </p:nvSpPr>
-        <p:spPr/>
-        <p:txBody>
-          <a:bodyPr/>
-          <a:lstStyle/>
-          <a:p>
-            <a:r>
-              <a:rPr lang="en-US" smtClean="0"/>
-              <a:t>Click to edit Master title style</a:t>
-            </a:r>
-            <a:endParaRPr lang="en-US"/>
-          </a:p>
-        </p:txBody>
-      </p:sp>
-      <p:sp>
-        <p:nvSpPr>
-          <p:cNvPr id="3" name="Date Placeholder 2"/>
+        <p:spPr>
+          <a:xfrm>
+            <a:off x="533400" y="4495800"/>
+            <a:ext cx="6554867" cy="1524000"/>
+          </a:xfrm>
+        </p:spPr>
+        <p:txBody>
+          <a:bodyPr>
+            <a:normAutofit/>
+          </a:bodyPr>
+          <a:lstStyle>
+            <a:lvl1pPr algn="l">
+              <a:defRPr sz="2800"/>
+            </a:lvl1pPr>
+          </a:lstStyle>
+          <a:p>
+            <a:r>
+              <a:rPr lang="ko-KR" altLang="en-US"/>
+              <a:t>마스터 제목 스타일 편집</a:t>
+            </a:r>
+            <a:endParaRPr lang="en-US" dirty="0"/>
+          </a:p>
+        </p:txBody>
+      </p:sp>
+      <p:sp>
+        <p:nvSpPr>
+          <p:cNvPr id="3" name="Vertical Text Placeholder 2"/>
+          <p:cNvSpPr>
+            <a:spLocks noGrp="1"/>
+          </p:cNvSpPr>
+          <p:nvPr>
+            <p:ph type="body" orient="vert" idx="1"/>
+          </p:nvPr>
+        </p:nvSpPr>
+        <p:spPr>
+          <a:xfrm>
+            <a:off x="533400" y="533401"/>
+            <a:ext cx="6554867" cy="3767670"/>
+          </a:xfrm>
+        </p:spPr>
+        <p:txBody>
+          <a:bodyPr vert="eaVert" anchor="t"/>
+          <a:lstStyle/>
+          <a:p>
+            <a:pPr lvl="0"/>
+            <a:r>
+              <a:rPr lang="ko-KR" altLang="en-US"/>
+              <a:t>마스터 텍스트 스타일을 편집하려면 클릭</a:t>
+            </a:r>
+          </a:p>
+          <a:p>
+            <a:pPr lvl="1"/>
+            <a:r>
+              <a:rPr lang="ko-KR" altLang="en-US"/>
+              <a:t>두 번째 수준</a:t>
+            </a:r>
+          </a:p>
+          <a:p>
+            <a:pPr lvl="2"/>
+            <a:r>
+              <a:rPr lang="ko-KR" altLang="en-US"/>
+              <a:t>세 번째 수준</a:t>
+            </a:r>
+          </a:p>
+          <a:p>
+            <a:pPr lvl="3"/>
+            <a:r>
+              <a:rPr lang="ko-KR" altLang="en-US"/>
+              <a:t>네 번째 수준</a:t>
+            </a:r>
+          </a:p>
+          <a:p>
+            <a:pPr lvl="4"/>
+            <a:r>
+              <a:rPr lang="ko-KR" altLang="en-US"/>
+              <a:t>다섯 번째 수준</a:t>
+            </a:r>
+            <a:endParaRPr lang="en-US" dirty="0"/>
+          </a:p>
+        </p:txBody>
+      </p:sp>
+      <p:sp>
+        <p:nvSpPr>
+          <p:cNvPr id="4" name="Date Placeholder 3"/>
           <p:cNvSpPr>
             <a:spLocks noGrp="1"/>
           </p:cNvSpPr>
@@ -1892,7 +2510,7 @@
           <a:p>
             <a:fld id="{5BCAD085-E8A6-8845-BD4E-CB4CCA059FC4}" type="datetimeFigureOut">
               <a:rPr lang="en-US" smtClean="0"/>
-              <a:t>1/27/13</a:t>
+              <a:t>12/18/2025</a:t>
             </a:fld>
             <a:endParaRPr lang="en-US"/>
           </a:p>
@@ -1900,7 +2518,7 @@
       </p:sp>
       <p:sp>
         <p:nvSpPr>
-          <p:cNvPr id="4" name="Footer Placeholder 3"/>
+          <p:cNvPr id="5" name="Footer Placeholder 4"/>
           <p:cNvSpPr>
             <a:spLocks noGrp="1"/>
           </p:cNvSpPr>
@@ -1919,7 +2537,7 @@
       </p:sp>
       <p:sp>
         <p:nvSpPr>
-          <p:cNvPr id="5" name="Slide Number Placeholder 4"/>
+          <p:cNvPr id="6" name="Slide Number Placeholder 5"/>
           <p:cNvSpPr>
             <a:spLocks noGrp="1"/>
           </p:cNvSpPr>
@@ -1943,7 +2561,7 @@
     </p:spTree>
     <p:extLst>
       <p:ext uri="{BB962C8B-B14F-4D97-AF65-F5344CB8AC3E}">
-        <p14:creationId xmlns:p14="http://schemas.microsoft.com/office/powerpoint/2010/main" val="727027711"/>
+        <p14:creationId xmlns:p14="http://schemas.microsoft.com/office/powerpoint/2010/main" val="2208396750"/>
       </p:ext>
     </p:extLst>
   </p:cSld>
@@ -1953,9 +2571,9 @@
 </p:sldLayout>
 </file>
 
-<file path=ppt/slideLayouts/slideLayout7.xml><?xml version="1.0" encoding="utf-8"?>
-<p:sldLayout xmlns:a="http://schemas.openxmlformats.org/drawingml/2006/main" xmlns:r="http://schemas.openxmlformats.org/officeDocument/2006/relationships" xmlns:p="http://schemas.openxmlformats.org/presentationml/2006/main" type="blank" preserve="1">
-  <p:cSld name="Blank">
+<file path=ppt/slideLayouts/slideLayout17.xml><?xml version="1.0" encoding="utf-8"?>
+<p:sldLayout xmlns:a="http://schemas.openxmlformats.org/drawingml/2006/main" xmlns:r="http://schemas.openxmlformats.org/officeDocument/2006/relationships" xmlns:p="http://schemas.openxmlformats.org/presentationml/2006/main" type="vertTitleAndTx" preserve="1">
+  <p:cSld name="세로 제목 및 텍스트">
     <p:spTree>
       <p:nvGrpSpPr>
         <p:cNvPr id="1" name=""/>
@@ -1972,7 +2590,98 @@
       </p:grpSpPr>
       <p:sp>
         <p:nvSpPr>
-          <p:cNvPr id="2" name="Date Placeholder 1"/>
+          <p:cNvPr id="2" name="Vertical Title 1"/>
+          <p:cNvSpPr>
+            <a:spLocks noGrp="1"/>
+          </p:cNvSpPr>
+          <p:nvPr>
+            <p:ph type="title" orient="vert"/>
+          </p:nvPr>
+        </p:nvSpPr>
+        <p:spPr>
+          <a:xfrm>
+            <a:off x="6566406" y="533400"/>
+            <a:ext cx="2044194" cy="4419600"/>
+          </a:xfrm>
+        </p:spPr>
+        <p:txBody>
+          <a:bodyPr vert="eaVert">
+            <a:normAutofit/>
+          </a:bodyPr>
+          <a:lstStyle>
+            <a:lvl1pPr>
+              <a:defRPr sz="2800"/>
+            </a:lvl1pPr>
+          </a:lstStyle>
+          <a:p>
+            <a:r>
+              <a:rPr lang="ko-KR" altLang="en-US"/>
+              <a:t>마스터 제목 스타일 편집</a:t>
+            </a:r>
+            <a:endParaRPr lang="en-US" dirty="0"/>
+          </a:p>
+        </p:txBody>
+      </p:sp>
+      <p:sp>
+        <p:nvSpPr>
+          <p:cNvPr id="3" name="Vertical Text Placeholder 2"/>
+          <p:cNvSpPr>
+            <a:spLocks noGrp="1"/>
+          </p:cNvSpPr>
+          <p:nvPr>
+            <p:ph type="body" orient="vert" idx="1"/>
+          </p:nvPr>
+        </p:nvSpPr>
+        <p:spPr>
+          <a:xfrm>
+            <a:off x="533400" y="533400"/>
+            <a:ext cx="5850012" cy="5486400"/>
+          </a:xfrm>
+        </p:spPr>
+        <p:txBody>
+          <a:bodyPr vert="eaVert" anchor="t"/>
+          <a:lstStyle/>
+          <a:p>
+            <a:pPr lvl="0"/>
+            <a:r>
+              <a:rPr lang="ko-KR" altLang="en-US"/>
+              <a:t>마스터 텍스트 스타일을 편집하려면 클릭</a:t>
+            </a:r>
+          </a:p>
+          <a:p>
+            <a:pPr lvl="1"/>
+            <a:r>
+              <a:rPr lang="ko-KR" altLang="en-US"/>
+              <a:t>두 번째 수준</a:t>
+            </a:r>
+          </a:p>
+          <a:p>
+            <a:pPr lvl="2"/>
+            <a:r>
+              <a:rPr lang="ko-KR" altLang="en-US"/>
+              <a:t>세 번째 수준</a:t>
+            </a:r>
+          </a:p>
+          <a:p>
+            <a:pPr lvl="3"/>
+            <a:r>
+              <a:rPr lang="ko-KR" altLang="en-US"/>
+              <a:t>네 번째 수준</a:t>
+            </a:r>
+          </a:p>
+          <a:p>
+            <a:pPr lvl="4"/>
+            <a:r>
+              <a:rPr lang="ko-KR" altLang="en-US"/>
+              <a:t>다섯 번째 수준</a:t>
+            </a:r>
+            <a:endParaRPr lang="en-US" dirty="0"/>
+          </a:p>
+        </p:txBody>
+      </p:sp>
+      <p:sp>
+        <p:nvSpPr>
+          <p:cNvPr id="4" name="Date Placeholder 3"/>
           <p:cNvSpPr>
             <a:spLocks noGrp="1"/>
           </p:cNvSpPr>
@@ -1987,7 +2696,7 @@
           <a:p>
             <a:fld id="{5BCAD085-E8A6-8845-BD4E-CB4CCA059FC4}" type="datetimeFigureOut">
               <a:rPr lang="en-US" smtClean="0"/>
-              <a:t>1/27/13</a:t>
+              <a:t>12/18/2025</a:t>
             </a:fld>
             <a:endParaRPr lang="en-US"/>
           </a:p>
@@ -1995,7 +2704,7 @@
       </p:sp>
       <p:sp>
         <p:nvSpPr>
-          <p:cNvPr id="3" name="Footer Placeholder 2"/>
+          <p:cNvPr id="5" name="Footer Placeholder 4"/>
           <p:cNvSpPr>
             <a:spLocks noGrp="1"/>
           </p:cNvSpPr>
@@ -2014,7 +2723,7 @@
       </p:sp>
       <p:sp>
         <p:nvSpPr>
-          <p:cNvPr id="4" name="Slide Number Placeholder 3"/>
+          <p:cNvPr id="6" name="Slide Number Placeholder 5"/>
           <p:cNvSpPr>
             <a:spLocks noGrp="1"/>
           </p:cNvSpPr>
@@ -2038,7 +2747,7 @@
     </p:spTree>
     <p:extLst>
       <p:ext uri="{BB962C8B-B14F-4D97-AF65-F5344CB8AC3E}">
-        <p14:creationId xmlns:p14="http://schemas.microsoft.com/office/powerpoint/2010/main" val="1212999818"/>
+        <p14:creationId xmlns:p14="http://schemas.microsoft.com/office/powerpoint/2010/main" val="2429735446"/>
       </p:ext>
     </p:extLst>
   </p:cSld>
@@ -2048,9 +2757,9 @@
 </p:sldLayout>
 </file>
 
-<file path=ppt/slideLayouts/slideLayout8.xml><?xml version="1.0" encoding="utf-8"?>
-<p:sldLayout xmlns:a="http://schemas.openxmlformats.org/drawingml/2006/main" xmlns:r="http://schemas.openxmlformats.org/officeDocument/2006/relationships" xmlns:p="http://schemas.openxmlformats.org/presentationml/2006/main" type="objTx" preserve="1">
-  <p:cSld name="Content with Caption">
+<file path=ppt/slideLayouts/slideLayout2.xml><?xml version="1.0" encoding="utf-8"?>
+<p:sldLayout xmlns:a="http://schemas.openxmlformats.org/drawingml/2006/main" xmlns:r="http://schemas.openxmlformats.org/officeDocument/2006/relationships" xmlns:p="http://schemas.openxmlformats.org/presentationml/2006/main" type="obj" preserve="1">
+  <p:cSld name="제목 및 내용">
     <p:spTree>
       <p:nvGrpSpPr>
         <p:cNvPr id="1" name=""/>
@@ -2077,23 +2786,19 @@
         </p:nvSpPr>
         <p:spPr>
           <a:xfrm>
-            <a:off x="457200" y="273050"/>
-            <a:ext cx="3008313" cy="1162050"/>
-          </a:xfrm>
-        </p:spPr>
-        <p:txBody>
-          <a:bodyPr anchor="b"/>
-          <a:lstStyle>
-            <a:lvl1pPr algn="l">
-              <a:defRPr sz="2000" b="1"/>
-            </a:lvl1pPr>
-          </a:lstStyle>
-          <a:p>
-            <a:r>
-              <a:rPr lang="en-US" smtClean="0"/>
-              <a:t>Click to edit Master title style</a:t>
-            </a:r>
-            <a:endParaRPr lang="en-US"/>
+            <a:off x="533400" y="4495800"/>
+            <a:ext cx="6554867" cy="1524000"/>
+          </a:xfrm>
+        </p:spPr>
+        <p:txBody>
+          <a:bodyPr/>
+          <a:lstStyle/>
+          <a:p>
+            <a:r>
+              <a:rPr lang="ko-KR" altLang="en-US"/>
+              <a:t>마스터 제목 스타일 편집</a:t>
+            </a:r>
+            <a:endParaRPr lang="en-US" dirty="0"/>
           </a:p>
         </p:txBody>
       </p:sp>
@@ -2109,147 +2814,54 @@
         </p:nvSpPr>
         <p:spPr>
           <a:xfrm>
-            <a:off x="3575050" y="273050"/>
-            <a:ext cx="5111750" cy="5853113"/>
-          </a:xfrm>
-        </p:spPr>
-        <p:txBody>
-          <a:bodyPr/>
-          <a:lstStyle>
-            <a:lvl1pPr>
-              <a:defRPr sz="3200"/>
-            </a:lvl1pPr>
-            <a:lvl2pPr>
-              <a:defRPr sz="2800"/>
-            </a:lvl2pPr>
-            <a:lvl3pPr>
-              <a:defRPr sz="2400"/>
-            </a:lvl3pPr>
-            <a:lvl4pPr>
-              <a:defRPr sz="2000"/>
-            </a:lvl4pPr>
-            <a:lvl5pPr>
-              <a:defRPr sz="2000"/>
-            </a:lvl5pPr>
-            <a:lvl6pPr>
-              <a:defRPr sz="2000"/>
-            </a:lvl6pPr>
-            <a:lvl7pPr>
-              <a:defRPr sz="2000"/>
-            </a:lvl7pPr>
-            <a:lvl8pPr>
-              <a:defRPr sz="2000"/>
-            </a:lvl8pPr>
-            <a:lvl9pPr>
-              <a:defRPr sz="2000"/>
-            </a:lvl9pPr>
-          </a:lstStyle>
+            <a:off x="533400" y="533400"/>
+            <a:ext cx="6554867" cy="3767670"/>
+          </a:xfrm>
+        </p:spPr>
+        <p:txBody>
+          <a:bodyPr anchor="ctr"/>
+          <a:lstStyle/>
           <a:p>
             <a:pPr lvl="0"/>
             <a:r>
-              <a:rPr lang="en-US" smtClean="0"/>
-              <a:t>Click to edit Master text styles</a:t>
+              <a:rPr lang="ko-KR" altLang="en-US"/>
+              <a:t>마스터 텍스트 스타일을 편집하려면 클릭</a:t>
             </a:r>
           </a:p>
           <a:p>
             <a:pPr lvl="1"/>
             <a:r>
-              <a:rPr lang="en-US" smtClean="0"/>
-              <a:t>Second level</a:t>
+              <a:rPr lang="ko-KR" altLang="en-US"/>
+              <a:t>두 번째 수준</a:t>
             </a:r>
           </a:p>
           <a:p>
             <a:pPr lvl="2"/>
             <a:r>
-              <a:rPr lang="en-US" smtClean="0"/>
-              <a:t>Third level</a:t>
+              <a:rPr lang="ko-KR" altLang="en-US"/>
+              <a:t>세 번째 수준</a:t>
             </a:r>
           </a:p>
           <a:p>
             <a:pPr lvl="3"/>
             <a:r>
-              <a:rPr lang="en-US" smtClean="0"/>
-              <a:t>Fourth level</a:t>
+              <a:rPr lang="ko-KR" altLang="en-US"/>
+              <a:t>네 번째 수준</a:t>
             </a:r>
           </a:p>
           <a:p>
             <a:pPr lvl="4"/>
             <a:r>
-              <a:rPr lang="en-US" smtClean="0"/>
-              <a:t>Fifth level</a:t>
-            </a:r>
-            <a:endParaRPr lang="en-US"/>
-          </a:p>
-        </p:txBody>
-      </p:sp>
-      <p:sp>
-        <p:nvSpPr>
-          <p:cNvPr id="4" name="Text Placeholder 3"/>
-          <p:cNvSpPr>
-            <a:spLocks noGrp="1"/>
-          </p:cNvSpPr>
-          <p:nvPr>
-            <p:ph type="body" sz="half" idx="2"/>
-          </p:nvPr>
-        </p:nvSpPr>
-        <p:spPr>
-          <a:xfrm>
-            <a:off x="457200" y="1435100"/>
-            <a:ext cx="3008313" cy="4691063"/>
-          </a:xfrm>
-        </p:spPr>
-        <p:txBody>
-          <a:bodyPr/>
-          <a:lstStyle>
-            <a:lvl1pPr marL="0" indent="0">
-              <a:buNone/>
-              <a:defRPr sz="1400"/>
-            </a:lvl1pPr>
-            <a:lvl2pPr marL="457200" indent="0">
-              <a:buNone/>
-              <a:defRPr sz="1200"/>
-            </a:lvl2pPr>
-            <a:lvl3pPr marL="914400" indent="0">
-              <a:buNone/>
-              <a:defRPr sz="1000"/>
-            </a:lvl3pPr>
-            <a:lvl4pPr marL="1371600" indent="0">
-              <a:buNone/>
-              <a:defRPr sz="900"/>
-            </a:lvl4pPr>
-            <a:lvl5pPr marL="1828800" indent="0">
-              <a:buNone/>
-              <a:defRPr sz="900"/>
-            </a:lvl5pPr>
-            <a:lvl6pPr marL="2286000" indent="0">
-              <a:buNone/>
-              <a:defRPr sz="900"/>
-            </a:lvl6pPr>
-            <a:lvl7pPr marL="2743200" indent="0">
-              <a:buNone/>
-              <a:defRPr sz="900"/>
-            </a:lvl7pPr>
-            <a:lvl8pPr marL="3200400" indent="0">
-              <a:buNone/>
-              <a:defRPr sz="900"/>
-            </a:lvl8pPr>
-            <a:lvl9pPr marL="3657600" indent="0">
-              <a:buNone/>
-              <a:defRPr sz="900"/>
-            </a:lvl9pPr>
-          </a:lstStyle>
-          <a:p>
-            <a:pPr lvl="0"/>
-            <a:r>
-              <a:rPr lang="en-US" smtClean="0"/>
-              <a:t>Click to edit Master text styles</a:t>
-            </a:r>
-          </a:p>
-        </p:txBody>
-      </p:sp>
-      <p:sp>
-        <p:nvSpPr>
-          <p:cNvPr id="5" name="Date Placeholder 4"/>
+              <a:rPr lang="ko-KR" altLang="en-US"/>
+              <a:t>다섯 번째 수준</a:t>
+            </a:r>
+            <a:endParaRPr lang="en-US" dirty="0"/>
+          </a:p>
+        </p:txBody>
+      </p:sp>
+      <p:sp>
+        <p:nvSpPr>
+          <p:cNvPr id="4" name="Date Placeholder 3"/>
           <p:cNvSpPr>
             <a:spLocks noGrp="1"/>
           </p:cNvSpPr>
@@ -2264,7 +2876,7 @@
           <a:p>
             <a:fld id="{5BCAD085-E8A6-8845-BD4E-CB4CCA059FC4}" type="datetimeFigureOut">
               <a:rPr lang="en-US" smtClean="0"/>
-              <a:t>1/27/13</a:t>
+              <a:t>12/18/2025</a:t>
             </a:fld>
             <a:endParaRPr lang="en-US"/>
           </a:p>
@@ -2272,7 +2884,7 @@
       </p:sp>
       <p:sp>
         <p:nvSpPr>
-          <p:cNvPr id="6" name="Footer Placeholder 5"/>
+          <p:cNvPr id="5" name="Footer Placeholder 4"/>
           <p:cNvSpPr>
             <a:spLocks noGrp="1"/>
           </p:cNvSpPr>
@@ -2291,7 +2903,7 @@
       </p:sp>
       <p:sp>
         <p:nvSpPr>
-          <p:cNvPr id="7" name="Slide Number Placeholder 6"/>
+          <p:cNvPr id="6" name="Slide Number Placeholder 5"/>
           <p:cNvSpPr>
             <a:spLocks noGrp="1"/>
           </p:cNvSpPr>
@@ -2315,7 +2927,7 @@
     </p:spTree>
     <p:extLst>
       <p:ext uri="{BB962C8B-B14F-4D97-AF65-F5344CB8AC3E}">
-        <p14:creationId xmlns:p14="http://schemas.microsoft.com/office/powerpoint/2010/main" val="1840726560"/>
+        <p14:creationId xmlns:p14="http://schemas.microsoft.com/office/powerpoint/2010/main" val="3845936636"/>
       </p:ext>
     </p:extLst>
   </p:cSld>
@@ -2325,9 +2937,9 @@
 </p:sldLayout>
 </file>
 
-<file path=ppt/slideLayouts/slideLayout9.xml><?xml version="1.0" encoding="utf-8"?>
-<p:sldLayout xmlns:a="http://schemas.openxmlformats.org/drawingml/2006/main" xmlns:r="http://schemas.openxmlformats.org/officeDocument/2006/relationships" xmlns:p="http://schemas.openxmlformats.org/presentationml/2006/main" type="picTx" preserve="1">
-  <p:cSld name="Picture with Caption">
+<file path=ppt/slideLayouts/slideLayout3.xml><?xml version="1.0" encoding="utf-8"?>
+<p:sldLayout xmlns:a="http://schemas.openxmlformats.org/drawingml/2006/main" xmlns:r="http://schemas.openxmlformats.org/officeDocument/2006/relationships" xmlns:p="http://schemas.openxmlformats.org/presentationml/2006/main" type="secHead" preserve="1">
+  <p:cSld name="구역 머리글">
     <p:spTree>
       <p:nvGrpSpPr>
         <p:cNvPr id="1" name=""/>
@@ -2354,155 +2966,152 @@
         </p:nvSpPr>
         <p:spPr>
           <a:xfrm>
-            <a:off x="1792288" y="4800600"/>
-            <a:ext cx="5486400" cy="566738"/>
-          </a:xfrm>
-        </p:spPr>
-        <p:txBody>
-          <a:bodyPr anchor="b"/>
+            <a:off x="533400" y="1981199"/>
+            <a:ext cx="6402468" cy="2319867"/>
+          </a:xfrm>
+        </p:spPr>
+        <p:txBody>
+          <a:bodyPr anchor="b">
+            <a:normAutofit/>
+          </a:bodyPr>
           <a:lstStyle>
             <a:lvl1pPr algn="l">
-              <a:defRPr sz="2000" b="1"/>
+              <a:defRPr sz="3200" b="0" cap="all"/>
             </a:lvl1pPr>
           </a:lstStyle>
           <a:p>
             <a:r>
-              <a:rPr lang="en-US" smtClean="0"/>
-              <a:t>Click to edit Master title style</a:t>
-            </a:r>
-            <a:endParaRPr lang="en-US"/>
-          </a:p>
-        </p:txBody>
-      </p:sp>
-      <p:sp>
-        <p:nvSpPr>
-          <p:cNvPr id="3" name="Picture Placeholder 2"/>
+              <a:rPr lang="ko-KR" altLang="en-US"/>
+              <a:t>마스터 제목 스타일 편집</a:t>
+            </a:r>
+            <a:endParaRPr lang="en-US" dirty="0"/>
+          </a:p>
+        </p:txBody>
+      </p:sp>
+      <p:sp>
+        <p:nvSpPr>
+          <p:cNvPr id="3" name="Text Placeholder 2"/>
           <p:cNvSpPr>
             <a:spLocks noGrp="1"/>
           </p:cNvSpPr>
           <p:nvPr>
-            <p:ph type="pic" idx="1"/>
-          </p:nvPr>
-        </p:nvSpPr>
-        <p:spPr>
-          <a:xfrm>
-            <a:off x="1792288" y="612775"/>
-            <a:ext cx="5486400" cy="4114800"/>
-          </a:xfrm>
-        </p:spPr>
-        <p:txBody>
-          <a:bodyPr/>
+            <p:ph type="body" idx="1"/>
+          </p:nvPr>
+        </p:nvSpPr>
+        <p:spPr>
+          <a:xfrm>
+            <a:off x="533400" y="4487333"/>
+            <a:ext cx="6402467" cy="1532467"/>
+          </a:xfrm>
+        </p:spPr>
+        <p:txBody>
+          <a:bodyPr anchor="t">
+            <a:normAutofit/>
+          </a:bodyPr>
           <a:lstStyle>
-            <a:lvl1pPr marL="0" indent="0">
-              <a:buNone/>
-              <a:defRPr sz="3200"/>
+            <a:lvl1pPr marL="0" indent="0" algn="l">
+              <a:buNone/>
+              <a:defRPr sz="1800">
+                <a:solidFill>
+                  <a:schemeClr val="bg2">
+                    <a:lumMod val="75000"/>
+                  </a:schemeClr>
+                </a:solidFill>
+              </a:defRPr>
             </a:lvl1pPr>
             <a:lvl2pPr marL="457200" indent="0">
               <a:buNone/>
-              <a:defRPr sz="2800"/>
+              <a:defRPr sz="1800">
+                <a:solidFill>
+                  <a:schemeClr val="tx1">
+                    <a:tint val="75000"/>
+                  </a:schemeClr>
+                </a:solidFill>
+              </a:defRPr>
             </a:lvl2pPr>
             <a:lvl3pPr marL="914400" indent="0">
               <a:buNone/>
-              <a:defRPr sz="2400"/>
+              <a:defRPr sz="1600">
+                <a:solidFill>
+                  <a:schemeClr val="tx1">
+                    <a:tint val="75000"/>
+                  </a:schemeClr>
+                </a:solidFill>
+              </a:defRPr>
             </a:lvl3pPr>
             <a:lvl4pPr marL="1371600" indent="0">
               <a:buNone/>
-              <a:defRPr sz="2000"/>
+              <a:defRPr sz="1400">
+                <a:solidFill>
+                  <a:schemeClr val="tx1">
+                    <a:tint val="75000"/>
+                  </a:schemeClr>
+                </a:solidFill>
+              </a:defRPr>
             </a:lvl4pPr>
             <a:lvl5pPr marL="1828800" indent="0">
               <a:buNone/>
-              <a:defRPr sz="2000"/>
+              <a:defRPr sz="1400">
+                <a:solidFill>
+                  <a:schemeClr val="tx1">
+                    <a:tint val="75000"/>
+                  </a:schemeClr>
+                </a:solidFill>
+              </a:defRPr>
             </a:lvl5pPr>
             <a:lvl6pPr marL="2286000" indent="0">
               <a:buNone/>
-              <a:defRPr sz="2000"/>
+              <a:defRPr sz="1400">
+                <a:solidFill>
+                  <a:schemeClr val="tx1">
+                    <a:tint val="75000"/>
+                  </a:schemeClr>
+                </a:solidFill>
+              </a:defRPr>
             </a:lvl6pPr>
             <a:lvl7pPr marL="2743200" indent="0">
               <a:buNone/>
-              <a:defRPr sz="2000"/>
+              <a:defRPr sz="1400">
+                <a:solidFill>
+                  <a:schemeClr val="tx1">
+                    <a:tint val="75000"/>
+                  </a:schemeClr>
+                </a:solidFill>
+              </a:defRPr>
             </a:lvl7pPr>
             <a:lvl8pPr marL="3200400" indent="0">
               <a:buNone/>
-              <a:defRPr sz="2000"/>
+              <a:defRPr sz="1400">
+                <a:solidFill>
+                  <a:schemeClr val="tx1">
+                    <a:tint val="75000"/>
+                  </a:schemeClr>
+                </a:solidFill>
+              </a:defRPr>
             </a:lvl8pPr>
             <a:lvl9pPr marL="3657600" indent="0">
               <a:buNone/>
-              <a:defRPr sz="2000"/>
+              <a:defRPr sz="1400">
+                <a:solidFill>
+                  <a:schemeClr val="tx1">
+                    <a:tint val="75000"/>
+                  </a:schemeClr>
+                </a:solidFill>
+              </a:defRPr>
             </a:lvl9pPr>
           </a:lstStyle>
           <a:p>
-            <a:endParaRPr lang="en-US"/>
-          </a:p>
-        </p:txBody>
-      </p:sp>
-      <p:sp>
-        <p:nvSpPr>
-          <p:cNvPr id="4" name="Text Placeholder 3"/>
-          <p:cNvSpPr>
-            <a:spLocks noGrp="1"/>
-          </p:cNvSpPr>
-          <p:nvPr>
-            <p:ph type="body" sz="half" idx="2"/>
-          </p:nvPr>
-        </p:nvSpPr>
-        <p:spPr>
-          <a:xfrm>
-            <a:off x="1792288" y="5367338"/>
-            <a:ext cx="5486400" cy="804862"/>
-          </a:xfrm>
-        </p:spPr>
-        <p:txBody>
-          <a:bodyPr/>
-          <a:lstStyle>
-            <a:lvl1pPr marL="0" indent="0">
-              <a:buNone/>
-              <a:defRPr sz="1400"/>
-            </a:lvl1pPr>
-            <a:lvl2pPr marL="457200" indent="0">
-              <a:buNone/>
-              <a:defRPr sz="1200"/>
-            </a:lvl2pPr>
-            <a:lvl3pPr marL="914400" indent="0">
-              <a:buNone/>
-              <a:defRPr sz="1000"/>
-            </a:lvl3pPr>
-            <a:lvl4pPr marL="1371600" indent="0">
-              <a:buNone/>
-              <a:defRPr sz="900"/>
-            </a:lvl4pPr>
-            <a:lvl5pPr marL="1828800" indent="0">
-              <a:buNone/>
-              <a:defRPr sz="900"/>
-            </a:lvl5pPr>
-            <a:lvl6pPr marL="2286000" indent="0">
-              <a:buNone/>
-              <a:defRPr sz="900"/>
-            </a:lvl6pPr>
-            <a:lvl7pPr marL="2743200" indent="0">
-              <a:buNone/>
-              <a:defRPr sz="900"/>
-            </a:lvl7pPr>
-            <a:lvl8pPr marL="3200400" indent="0">
-              <a:buNone/>
-              <a:defRPr sz="900"/>
-            </a:lvl8pPr>
-            <a:lvl9pPr marL="3657600" indent="0">
-              <a:buNone/>
-              <a:defRPr sz="900"/>
-            </a:lvl9pPr>
-          </a:lstStyle>
-          <a:p>
             <a:pPr lvl="0"/>
             <a:r>
-              <a:rPr lang="en-US" smtClean="0"/>
-              <a:t>Click to edit Master text styles</a:t>
-            </a:r>
-          </a:p>
-        </p:txBody>
-      </p:sp>
-      <p:sp>
-        <p:nvSpPr>
-          <p:cNvPr id="5" name="Date Placeholder 4"/>
+              <a:rPr lang="ko-KR" altLang="en-US"/>
+              <a:t>마스터 텍스트 스타일을 편집하려면 클릭</a:t>
+            </a:r>
+          </a:p>
+        </p:txBody>
+      </p:sp>
+      <p:sp>
+        <p:nvSpPr>
+          <p:cNvPr id="4" name="Date Placeholder 3"/>
           <p:cNvSpPr>
             <a:spLocks noGrp="1"/>
           </p:cNvSpPr>
@@ -2517,7 +3126,7 @@
           <a:p>
             <a:fld id="{5BCAD085-E8A6-8845-BD4E-CB4CCA059FC4}" type="datetimeFigureOut">
               <a:rPr lang="en-US" smtClean="0"/>
-              <a:t>1/27/13</a:t>
+              <a:t>12/18/2025</a:t>
             </a:fld>
             <a:endParaRPr lang="en-US"/>
           </a:p>
@@ -2525,7 +3134,7 @@
       </p:sp>
       <p:sp>
         <p:nvSpPr>
-          <p:cNvPr id="6" name="Footer Placeholder 5"/>
+          <p:cNvPr id="5" name="Footer Placeholder 4"/>
           <p:cNvSpPr>
             <a:spLocks noGrp="1"/>
           </p:cNvSpPr>
@@ -2544,7 +3153,7 @@
       </p:sp>
       <p:sp>
         <p:nvSpPr>
-          <p:cNvPr id="7" name="Slide Number Placeholder 6"/>
+          <p:cNvPr id="6" name="Slide Number Placeholder 5"/>
           <p:cNvSpPr>
             <a:spLocks noGrp="1"/>
           </p:cNvSpPr>
@@ -2568,7 +3177,1410 @@
     </p:spTree>
     <p:extLst>
       <p:ext uri="{BB962C8B-B14F-4D97-AF65-F5344CB8AC3E}">
-        <p14:creationId xmlns:p14="http://schemas.microsoft.com/office/powerpoint/2010/main" val="3889236939"/>
+        <p14:creationId xmlns:p14="http://schemas.microsoft.com/office/powerpoint/2010/main" val="1519114470"/>
+      </p:ext>
+    </p:extLst>
+  </p:cSld>
+  <p:clrMapOvr>
+    <a:masterClrMapping/>
+  </p:clrMapOvr>
+</p:sldLayout>
+</file>
+
+<file path=ppt/slideLayouts/slideLayout4.xml><?xml version="1.0" encoding="utf-8"?>
+<p:sldLayout xmlns:a="http://schemas.openxmlformats.org/drawingml/2006/main" xmlns:r="http://schemas.openxmlformats.org/officeDocument/2006/relationships" xmlns:p="http://schemas.openxmlformats.org/presentationml/2006/main" type="twoObj" preserve="1">
+  <p:cSld name="콘텐츠 2개">
+    <p:spTree>
+      <p:nvGrpSpPr>
+        <p:cNvPr id="1" name=""/>
+        <p:cNvGrpSpPr/>
+        <p:nvPr/>
+      </p:nvGrpSpPr>
+      <p:grpSpPr>
+        <a:xfrm>
+          <a:off x="0" y="0"/>
+          <a:ext cx="0" cy="0"/>
+          <a:chOff x="0" y="0"/>
+          <a:chExt cx="0" cy="0"/>
+        </a:xfrm>
+      </p:grpSpPr>
+      <p:sp>
+        <p:nvSpPr>
+          <p:cNvPr id="2" name="Title 1"/>
+          <p:cNvSpPr>
+            <a:spLocks noGrp="1"/>
+          </p:cNvSpPr>
+          <p:nvPr>
+            <p:ph type="title"/>
+          </p:nvPr>
+        </p:nvSpPr>
+        <p:spPr>
+          <a:xfrm>
+            <a:off x="533400" y="4495800"/>
+            <a:ext cx="6554867" cy="1524000"/>
+          </a:xfrm>
+        </p:spPr>
+        <p:txBody>
+          <a:bodyPr>
+            <a:normAutofit/>
+          </a:bodyPr>
+          <a:lstStyle>
+            <a:lvl1pPr>
+              <a:defRPr sz="3200"/>
+            </a:lvl1pPr>
+          </a:lstStyle>
+          <a:p>
+            <a:r>
+              <a:rPr lang="ko-KR" altLang="en-US"/>
+              <a:t>마스터 제목 스타일 편집</a:t>
+            </a:r>
+            <a:endParaRPr lang="en-US" dirty="0"/>
+          </a:p>
+        </p:txBody>
+      </p:sp>
+      <p:sp>
+        <p:nvSpPr>
+          <p:cNvPr id="11" name="Content Placeholder 3"/>
+          <p:cNvSpPr>
+            <a:spLocks noGrp="1"/>
+          </p:cNvSpPr>
+          <p:nvPr>
+            <p:ph sz="half" idx="13"/>
+          </p:nvPr>
+        </p:nvSpPr>
+        <p:spPr>
+          <a:xfrm>
+            <a:off x="533400" y="533400"/>
+            <a:ext cx="3949967" cy="3767667"/>
+          </a:xfrm>
+        </p:spPr>
+        <p:txBody>
+          <a:bodyPr anchor="ctr">
+            <a:normAutofit/>
+          </a:bodyPr>
+          <a:lstStyle/>
+          <a:p>
+            <a:pPr lvl="0"/>
+            <a:r>
+              <a:rPr lang="ko-KR" altLang="en-US"/>
+              <a:t>마스터 텍스트 스타일을 편집하려면 클릭</a:t>
+            </a:r>
+          </a:p>
+          <a:p>
+            <a:pPr lvl="1"/>
+            <a:r>
+              <a:rPr lang="ko-KR" altLang="en-US"/>
+              <a:t>두 번째 수준</a:t>
+            </a:r>
+          </a:p>
+          <a:p>
+            <a:pPr lvl="2"/>
+            <a:r>
+              <a:rPr lang="ko-KR" altLang="en-US"/>
+              <a:t>세 번째 수준</a:t>
+            </a:r>
+          </a:p>
+          <a:p>
+            <a:pPr lvl="3"/>
+            <a:r>
+              <a:rPr lang="ko-KR" altLang="en-US"/>
+              <a:t>네 번째 수준</a:t>
+            </a:r>
+          </a:p>
+          <a:p>
+            <a:pPr lvl="4"/>
+            <a:r>
+              <a:rPr lang="ko-KR" altLang="en-US"/>
+              <a:t>다섯 번째 수준</a:t>
+            </a:r>
+            <a:endParaRPr lang="en-US" dirty="0"/>
+          </a:p>
+        </p:txBody>
+      </p:sp>
+      <p:sp>
+        <p:nvSpPr>
+          <p:cNvPr id="12" name="Content Placeholder 5"/>
+          <p:cNvSpPr>
+            <a:spLocks noGrp="1"/>
+          </p:cNvSpPr>
+          <p:nvPr>
+            <p:ph sz="quarter" idx="4"/>
+          </p:nvPr>
+        </p:nvSpPr>
+        <p:spPr>
+          <a:xfrm>
+            <a:off x="4662362" y="533400"/>
+            <a:ext cx="3948238" cy="3759200"/>
+          </a:xfrm>
+        </p:spPr>
+        <p:txBody>
+          <a:bodyPr anchor="ctr">
+            <a:normAutofit/>
+          </a:bodyPr>
+          <a:lstStyle/>
+          <a:p>
+            <a:pPr lvl="0"/>
+            <a:r>
+              <a:rPr lang="ko-KR" altLang="en-US"/>
+              <a:t>마스터 텍스트 스타일을 편집하려면 클릭</a:t>
+            </a:r>
+          </a:p>
+          <a:p>
+            <a:pPr lvl="1"/>
+            <a:r>
+              <a:rPr lang="ko-KR" altLang="en-US"/>
+              <a:t>두 번째 수준</a:t>
+            </a:r>
+          </a:p>
+          <a:p>
+            <a:pPr lvl="2"/>
+            <a:r>
+              <a:rPr lang="ko-KR" altLang="en-US"/>
+              <a:t>세 번째 수준</a:t>
+            </a:r>
+          </a:p>
+          <a:p>
+            <a:pPr lvl="3"/>
+            <a:r>
+              <a:rPr lang="ko-KR" altLang="en-US"/>
+              <a:t>네 번째 수준</a:t>
+            </a:r>
+          </a:p>
+          <a:p>
+            <a:pPr lvl="4"/>
+            <a:r>
+              <a:rPr lang="ko-KR" altLang="en-US"/>
+              <a:t>다섯 번째 수준</a:t>
+            </a:r>
+            <a:endParaRPr lang="en-US" dirty="0"/>
+          </a:p>
+        </p:txBody>
+      </p:sp>
+      <p:sp>
+        <p:nvSpPr>
+          <p:cNvPr id="5" name="Date Placeholder 4"/>
+          <p:cNvSpPr>
+            <a:spLocks noGrp="1"/>
+          </p:cNvSpPr>
+          <p:nvPr>
+            <p:ph type="dt" sz="half" idx="10"/>
+          </p:nvPr>
+        </p:nvSpPr>
+        <p:spPr/>
+        <p:txBody>
+          <a:bodyPr/>
+          <a:lstStyle/>
+          <a:p>
+            <a:fld id="{5BCAD085-E8A6-8845-BD4E-CB4CCA059FC4}" type="datetimeFigureOut">
+              <a:rPr lang="en-US" smtClean="0"/>
+              <a:t>12/18/2025</a:t>
+            </a:fld>
+            <a:endParaRPr lang="en-US"/>
+          </a:p>
+        </p:txBody>
+      </p:sp>
+      <p:sp>
+        <p:nvSpPr>
+          <p:cNvPr id="6" name="Footer Placeholder 5"/>
+          <p:cNvSpPr>
+            <a:spLocks noGrp="1"/>
+          </p:cNvSpPr>
+          <p:nvPr>
+            <p:ph type="ftr" sz="quarter" idx="11"/>
+          </p:nvPr>
+        </p:nvSpPr>
+        <p:spPr/>
+        <p:txBody>
+          <a:bodyPr/>
+          <a:lstStyle/>
+          <a:p>
+            <a:endParaRPr lang="en-US"/>
+          </a:p>
+        </p:txBody>
+      </p:sp>
+      <p:sp>
+        <p:nvSpPr>
+          <p:cNvPr id="7" name="Slide Number Placeholder 6"/>
+          <p:cNvSpPr>
+            <a:spLocks noGrp="1"/>
+          </p:cNvSpPr>
+          <p:nvPr>
+            <p:ph type="sldNum" sz="quarter" idx="12"/>
+          </p:nvPr>
+        </p:nvSpPr>
+        <p:spPr/>
+        <p:txBody>
+          <a:bodyPr/>
+          <a:lstStyle/>
+          <a:p>
+            <a:fld id="{C1FF6DA9-008F-8B48-92A6-B652298478BF}" type="slidenum">
+              <a:rPr lang="en-US" smtClean="0"/>
+              <a:t>‹#›</a:t>
+            </a:fld>
+            <a:endParaRPr lang="en-US"/>
+          </a:p>
+        </p:txBody>
+      </p:sp>
+    </p:spTree>
+    <p:extLst>
+      <p:ext uri="{BB962C8B-B14F-4D97-AF65-F5344CB8AC3E}">
+        <p14:creationId xmlns:p14="http://schemas.microsoft.com/office/powerpoint/2010/main" val="2330684316"/>
+      </p:ext>
+    </p:extLst>
+  </p:cSld>
+  <p:clrMapOvr>
+    <a:masterClrMapping/>
+  </p:clrMapOvr>
+</p:sldLayout>
+</file>
+
+<file path=ppt/slideLayouts/slideLayout5.xml><?xml version="1.0" encoding="utf-8"?>
+<p:sldLayout xmlns:a="http://schemas.openxmlformats.org/drawingml/2006/main" xmlns:r="http://schemas.openxmlformats.org/officeDocument/2006/relationships" xmlns:p="http://schemas.openxmlformats.org/presentationml/2006/main" type="twoTxTwoObj" preserve="1">
+  <p:cSld name="비교">
+    <p:spTree>
+      <p:nvGrpSpPr>
+        <p:cNvPr id="1" name=""/>
+        <p:cNvGrpSpPr/>
+        <p:nvPr/>
+      </p:nvGrpSpPr>
+      <p:grpSpPr>
+        <a:xfrm>
+          <a:off x="0" y="0"/>
+          <a:ext cx="0" cy="0"/>
+          <a:chOff x="0" y="0"/>
+          <a:chExt cx="0" cy="0"/>
+        </a:xfrm>
+      </p:grpSpPr>
+      <p:sp>
+        <p:nvSpPr>
+          <p:cNvPr id="2" name="Title 1"/>
+          <p:cNvSpPr>
+            <a:spLocks noGrp="1"/>
+          </p:cNvSpPr>
+          <p:nvPr>
+            <p:ph type="title"/>
+          </p:nvPr>
+        </p:nvSpPr>
+        <p:spPr>
+          <a:xfrm>
+            <a:off x="533400" y="4495800"/>
+            <a:ext cx="6554867" cy="1524000"/>
+          </a:xfrm>
+        </p:spPr>
+        <p:txBody>
+          <a:bodyPr>
+            <a:normAutofit/>
+          </a:bodyPr>
+          <a:lstStyle>
+            <a:lvl1pPr>
+              <a:defRPr sz="3200"/>
+            </a:lvl1pPr>
+          </a:lstStyle>
+          <a:p>
+            <a:r>
+              <a:rPr lang="ko-KR" altLang="en-US"/>
+              <a:t>마스터 제목 스타일 편집</a:t>
+            </a:r>
+            <a:endParaRPr lang="en-US" dirty="0"/>
+          </a:p>
+        </p:txBody>
+      </p:sp>
+      <p:sp>
+        <p:nvSpPr>
+          <p:cNvPr id="3" name="Text Placeholder 2"/>
+          <p:cNvSpPr>
+            <a:spLocks noGrp="1"/>
+          </p:cNvSpPr>
+          <p:nvPr>
+            <p:ph type="body" idx="1"/>
+          </p:nvPr>
+        </p:nvSpPr>
+        <p:spPr>
+          <a:xfrm>
+            <a:off x="762001" y="533400"/>
+            <a:ext cx="3716866" cy="609600"/>
+          </a:xfrm>
+        </p:spPr>
+        <p:txBody>
+          <a:bodyPr anchor="b">
+            <a:noAutofit/>
+          </a:bodyPr>
+          <a:lstStyle>
+            <a:lvl1pPr marL="0" indent="0">
+              <a:buNone/>
+              <a:defRPr sz="2400" b="0" cap="all">
+                <a:solidFill>
+                  <a:schemeClr val="tx1"/>
+                </a:solidFill>
+              </a:defRPr>
+            </a:lvl1pPr>
+            <a:lvl2pPr marL="457200" indent="0">
+              <a:buNone/>
+              <a:defRPr sz="2000" b="1"/>
+            </a:lvl2pPr>
+            <a:lvl3pPr marL="914400" indent="0">
+              <a:buNone/>
+              <a:defRPr sz="1800" b="1"/>
+            </a:lvl3pPr>
+            <a:lvl4pPr marL="1371600" indent="0">
+              <a:buNone/>
+              <a:defRPr sz="1600" b="1"/>
+            </a:lvl4pPr>
+            <a:lvl5pPr marL="1828800" indent="0">
+              <a:buNone/>
+              <a:defRPr sz="1600" b="1"/>
+            </a:lvl5pPr>
+            <a:lvl6pPr marL="2286000" indent="0">
+              <a:buNone/>
+              <a:defRPr sz="1600" b="1"/>
+            </a:lvl6pPr>
+            <a:lvl7pPr marL="2743200" indent="0">
+              <a:buNone/>
+              <a:defRPr sz="1600" b="1"/>
+            </a:lvl7pPr>
+            <a:lvl8pPr marL="3200400" indent="0">
+              <a:buNone/>
+              <a:defRPr sz="1600" b="1"/>
+            </a:lvl8pPr>
+            <a:lvl9pPr marL="3657600" indent="0">
+              <a:buNone/>
+              <a:defRPr sz="1600" b="1"/>
+            </a:lvl9pPr>
+          </a:lstStyle>
+          <a:p>
+            <a:pPr lvl="0"/>
+            <a:r>
+              <a:rPr lang="ko-KR" altLang="en-US"/>
+              <a:t>마스터 텍스트 스타일을 편집하려면 클릭</a:t>
+            </a:r>
+          </a:p>
+        </p:txBody>
+      </p:sp>
+      <p:sp>
+        <p:nvSpPr>
+          <p:cNvPr id="4" name="Content Placeholder 3"/>
+          <p:cNvSpPr>
+            <a:spLocks noGrp="1"/>
+          </p:cNvSpPr>
+          <p:nvPr>
+            <p:ph sz="half" idx="2"/>
+          </p:nvPr>
+        </p:nvSpPr>
+        <p:spPr>
+          <a:xfrm>
+            <a:off x="533399" y="1143000"/>
+            <a:ext cx="3945467" cy="3158067"/>
+          </a:xfrm>
+        </p:spPr>
+        <p:txBody>
+          <a:bodyPr anchor="t">
+            <a:normAutofit/>
+          </a:bodyPr>
+          <a:lstStyle/>
+          <a:p>
+            <a:pPr lvl="0"/>
+            <a:r>
+              <a:rPr lang="ko-KR" altLang="en-US"/>
+              <a:t>마스터 텍스트 스타일을 편집하려면 클릭</a:t>
+            </a:r>
+          </a:p>
+          <a:p>
+            <a:pPr lvl="1"/>
+            <a:r>
+              <a:rPr lang="ko-KR" altLang="en-US"/>
+              <a:t>두 번째 수준</a:t>
+            </a:r>
+          </a:p>
+          <a:p>
+            <a:pPr lvl="2"/>
+            <a:r>
+              <a:rPr lang="ko-KR" altLang="en-US"/>
+              <a:t>세 번째 수준</a:t>
+            </a:r>
+          </a:p>
+          <a:p>
+            <a:pPr lvl="3"/>
+            <a:r>
+              <a:rPr lang="ko-KR" altLang="en-US"/>
+              <a:t>네 번째 수준</a:t>
+            </a:r>
+          </a:p>
+          <a:p>
+            <a:pPr lvl="4"/>
+            <a:r>
+              <a:rPr lang="ko-KR" altLang="en-US"/>
+              <a:t>다섯 번째 수준</a:t>
+            </a:r>
+            <a:endParaRPr lang="en-US" dirty="0"/>
+          </a:p>
+        </p:txBody>
+      </p:sp>
+      <p:sp>
+        <p:nvSpPr>
+          <p:cNvPr id="5" name="Text Placeholder 4"/>
+          <p:cNvSpPr>
+            <a:spLocks noGrp="1"/>
+          </p:cNvSpPr>
+          <p:nvPr>
+            <p:ph type="body" sz="quarter" idx="3"/>
+          </p:nvPr>
+        </p:nvSpPr>
+        <p:spPr>
+          <a:xfrm>
+            <a:off x="4855016" y="566738"/>
+            <a:ext cx="3764051" cy="576262"/>
+          </a:xfrm>
+        </p:spPr>
+        <p:txBody>
+          <a:bodyPr anchor="b">
+            <a:noAutofit/>
+          </a:bodyPr>
+          <a:lstStyle>
+            <a:lvl1pPr marL="0" indent="0">
+              <a:buNone/>
+              <a:defRPr sz="2400" b="0" cap="all">
+                <a:solidFill>
+                  <a:schemeClr val="tx1"/>
+                </a:solidFill>
+              </a:defRPr>
+            </a:lvl1pPr>
+            <a:lvl2pPr marL="457200" indent="0">
+              <a:buNone/>
+              <a:defRPr sz="2000" b="1"/>
+            </a:lvl2pPr>
+            <a:lvl3pPr marL="914400" indent="0">
+              <a:buNone/>
+              <a:defRPr sz="1800" b="1"/>
+            </a:lvl3pPr>
+            <a:lvl4pPr marL="1371600" indent="0">
+              <a:buNone/>
+              <a:defRPr sz="1600" b="1"/>
+            </a:lvl4pPr>
+            <a:lvl5pPr marL="1828800" indent="0">
+              <a:buNone/>
+              <a:defRPr sz="1600" b="1"/>
+            </a:lvl5pPr>
+            <a:lvl6pPr marL="2286000" indent="0">
+              <a:buNone/>
+              <a:defRPr sz="1600" b="1"/>
+            </a:lvl6pPr>
+            <a:lvl7pPr marL="2743200" indent="0">
+              <a:buNone/>
+              <a:defRPr sz="1600" b="1"/>
+            </a:lvl7pPr>
+            <a:lvl8pPr marL="3200400" indent="0">
+              <a:buNone/>
+              <a:defRPr sz="1600" b="1"/>
+            </a:lvl8pPr>
+            <a:lvl9pPr marL="3657600" indent="0">
+              <a:buNone/>
+              <a:defRPr sz="1600" b="1"/>
+            </a:lvl9pPr>
+          </a:lstStyle>
+          <a:p>
+            <a:pPr lvl="0"/>
+            <a:r>
+              <a:rPr lang="ko-KR" altLang="en-US"/>
+              <a:t>마스터 텍스트 스타일을 편집하려면 클릭</a:t>
+            </a:r>
+          </a:p>
+        </p:txBody>
+      </p:sp>
+      <p:sp>
+        <p:nvSpPr>
+          <p:cNvPr id="6" name="Content Placeholder 5"/>
+          <p:cNvSpPr>
+            <a:spLocks noGrp="1"/>
+          </p:cNvSpPr>
+          <p:nvPr>
+            <p:ph sz="quarter" idx="4"/>
+          </p:nvPr>
+        </p:nvSpPr>
+        <p:spPr>
+          <a:xfrm>
+            <a:off x="4662362" y="1143000"/>
+            <a:ext cx="3956705" cy="3149600"/>
+          </a:xfrm>
+        </p:spPr>
+        <p:txBody>
+          <a:bodyPr anchor="t">
+            <a:normAutofit/>
+          </a:bodyPr>
+          <a:lstStyle/>
+          <a:p>
+            <a:pPr lvl="0"/>
+            <a:r>
+              <a:rPr lang="ko-KR" altLang="en-US"/>
+              <a:t>마스터 텍스트 스타일을 편집하려면 클릭</a:t>
+            </a:r>
+          </a:p>
+          <a:p>
+            <a:pPr lvl="1"/>
+            <a:r>
+              <a:rPr lang="ko-KR" altLang="en-US"/>
+              <a:t>두 번째 수준</a:t>
+            </a:r>
+          </a:p>
+          <a:p>
+            <a:pPr lvl="2"/>
+            <a:r>
+              <a:rPr lang="ko-KR" altLang="en-US"/>
+              <a:t>세 번째 수준</a:t>
+            </a:r>
+          </a:p>
+          <a:p>
+            <a:pPr lvl="3"/>
+            <a:r>
+              <a:rPr lang="ko-KR" altLang="en-US"/>
+              <a:t>네 번째 수준</a:t>
+            </a:r>
+          </a:p>
+          <a:p>
+            <a:pPr lvl="4"/>
+            <a:r>
+              <a:rPr lang="ko-KR" altLang="en-US"/>
+              <a:t>다섯 번째 수준</a:t>
+            </a:r>
+            <a:endParaRPr lang="en-US" dirty="0"/>
+          </a:p>
+        </p:txBody>
+      </p:sp>
+      <p:sp>
+        <p:nvSpPr>
+          <p:cNvPr id="7" name="Date Placeholder 6"/>
+          <p:cNvSpPr>
+            <a:spLocks noGrp="1"/>
+          </p:cNvSpPr>
+          <p:nvPr>
+            <p:ph type="dt" sz="half" idx="10"/>
+          </p:nvPr>
+        </p:nvSpPr>
+        <p:spPr/>
+        <p:txBody>
+          <a:bodyPr/>
+          <a:lstStyle/>
+          <a:p>
+            <a:fld id="{5BCAD085-E8A6-8845-BD4E-CB4CCA059FC4}" type="datetimeFigureOut">
+              <a:rPr lang="en-US" smtClean="0"/>
+              <a:t>12/18/2025</a:t>
+            </a:fld>
+            <a:endParaRPr lang="en-US"/>
+          </a:p>
+        </p:txBody>
+      </p:sp>
+      <p:sp>
+        <p:nvSpPr>
+          <p:cNvPr id="8" name="Footer Placeholder 7"/>
+          <p:cNvSpPr>
+            <a:spLocks noGrp="1"/>
+          </p:cNvSpPr>
+          <p:nvPr>
+            <p:ph type="ftr" sz="quarter" idx="11"/>
+          </p:nvPr>
+        </p:nvSpPr>
+        <p:spPr/>
+        <p:txBody>
+          <a:bodyPr/>
+          <a:lstStyle/>
+          <a:p>
+            <a:endParaRPr lang="en-US"/>
+          </a:p>
+        </p:txBody>
+      </p:sp>
+      <p:sp>
+        <p:nvSpPr>
+          <p:cNvPr id="9" name="Slide Number Placeholder 8"/>
+          <p:cNvSpPr>
+            <a:spLocks noGrp="1"/>
+          </p:cNvSpPr>
+          <p:nvPr>
+            <p:ph type="sldNum" sz="quarter" idx="12"/>
+          </p:nvPr>
+        </p:nvSpPr>
+        <p:spPr/>
+        <p:txBody>
+          <a:bodyPr/>
+          <a:lstStyle/>
+          <a:p>
+            <a:fld id="{C1FF6DA9-008F-8B48-92A6-B652298478BF}" type="slidenum">
+              <a:rPr lang="en-US" smtClean="0"/>
+              <a:t>‹#›</a:t>
+            </a:fld>
+            <a:endParaRPr lang="en-US"/>
+          </a:p>
+        </p:txBody>
+      </p:sp>
+    </p:spTree>
+    <p:extLst>
+      <p:ext uri="{BB962C8B-B14F-4D97-AF65-F5344CB8AC3E}">
+        <p14:creationId xmlns:p14="http://schemas.microsoft.com/office/powerpoint/2010/main" val="3645584894"/>
+      </p:ext>
+    </p:extLst>
+  </p:cSld>
+  <p:clrMapOvr>
+    <a:masterClrMapping/>
+  </p:clrMapOvr>
+</p:sldLayout>
+</file>
+
+<file path=ppt/slideLayouts/slideLayout6.xml><?xml version="1.0" encoding="utf-8"?>
+<p:sldLayout xmlns:a="http://schemas.openxmlformats.org/drawingml/2006/main" xmlns:r="http://schemas.openxmlformats.org/officeDocument/2006/relationships" xmlns:p="http://schemas.openxmlformats.org/presentationml/2006/main" type="titleOnly" preserve="1">
+  <p:cSld name="제목만">
+    <p:spTree>
+      <p:nvGrpSpPr>
+        <p:cNvPr id="1" name=""/>
+        <p:cNvGrpSpPr/>
+        <p:nvPr/>
+      </p:nvGrpSpPr>
+      <p:grpSpPr>
+        <a:xfrm>
+          <a:off x="0" y="0"/>
+          <a:ext cx="0" cy="0"/>
+          <a:chOff x="0" y="0"/>
+          <a:chExt cx="0" cy="0"/>
+        </a:xfrm>
+      </p:grpSpPr>
+      <p:sp>
+        <p:nvSpPr>
+          <p:cNvPr id="2" name="Title 1"/>
+          <p:cNvSpPr>
+            <a:spLocks noGrp="1"/>
+          </p:cNvSpPr>
+          <p:nvPr>
+            <p:ph type="title"/>
+          </p:nvPr>
+        </p:nvSpPr>
+        <p:spPr>
+          <a:xfrm>
+            <a:off x="533400" y="4495800"/>
+            <a:ext cx="6554867" cy="1524000"/>
+          </a:xfrm>
+        </p:spPr>
+        <p:txBody>
+          <a:bodyPr>
+            <a:normAutofit/>
+          </a:bodyPr>
+          <a:lstStyle>
+            <a:lvl1pPr>
+              <a:defRPr sz="3200"/>
+            </a:lvl1pPr>
+          </a:lstStyle>
+          <a:p>
+            <a:r>
+              <a:rPr lang="ko-KR" altLang="en-US"/>
+              <a:t>마스터 제목 스타일 편집</a:t>
+            </a:r>
+            <a:endParaRPr lang="en-US" dirty="0"/>
+          </a:p>
+        </p:txBody>
+      </p:sp>
+      <p:sp>
+        <p:nvSpPr>
+          <p:cNvPr id="3" name="Date Placeholder 2"/>
+          <p:cNvSpPr>
+            <a:spLocks noGrp="1"/>
+          </p:cNvSpPr>
+          <p:nvPr>
+            <p:ph type="dt" sz="half" idx="10"/>
+          </p:nvPr>
+        </p:nvSpPr>
+        <p:spPr/>
+        <p:txBody>
+          <a:bodyPr/>
+          <a:lstStyle/>
+          <a:p>
+            <a:fld id="{5BCAD085-E8A6-8845-BD4E-CB4CCA059FC4}" type="datetimeFigureOut">
+              <a:rPr lang="en-US" smtClean="0"/>
+              <a:t>12/18/2025</a:t>
+            </a:fld>
+            <a:endParaRPr lang="en-US"/>
+          </a:p>
+        </p:txBody>
+      </p:sp>
+      <p:sp>
+        <p:nvSpPr>
+          <p:cNvPr id="4" name="Footer Placeholder 3"/>
+          <p:cNvSpPr>
+            <a:spLocks noGrp="1"/>
+          </p:cNvSpPr>
+          <p:nvPr>
+            <p:ph type="ftr" sz="quarter" idx="11"/>
+          </p:nvPr>
+        </p:nvSpPr>
+        <p:spPr/>
+        <p:txBody>
+          <a:bodyPr/>
+          <a:lstStyle/>
+          <a:p>
+            <a:endParaRPr lang="en-US"/>
+          </a:p>
+        </p:txBody>
+      </p:sp>
+      <p:sp>
+        <p:nvSpPr>
+          <p:cNvPr id="5" name="Slide Number Placeholder 4"/>
+          <p:cNvSpPr>
+            <a:spLocks noGrp="1"/>
+          </p:cNvSpPr>
+          <p:nvPr>
+            <p:ph type="sldNum" sz="quarter" idx="12"/>
+          </p:nvPr>
+        </p:nvSpPr>
+        <p:spPr/>
+        <p:txBody>
+          <a:bodyPr/>
+          <a:lstStyle/>
+          <a:p>
+            <a:fld id="{C1FF6DA9-008F-8B48-92A6-B652298478BF}" type="slidenum">
+              <a:rPr lang="en-US" smtClean="0"/>
+              <a:t>‹#›</a:t>
+            </a:fld>
+            <a:endParaRPr lang="en-US"/>
+          </a:p>
+        </p:txBody>
+      </p:sp>
+    </p:spTree>
+    <p:extLst>
+      <p:ext uri="{BB962C8B-B14F-4D97-AF65-F5344CB8AC3E}">
+        <p14:creationId xmlns:p14="http://schemas.microsoft.com/office/powerpoint/2010/main" val="2191763145"/>
+      </p:ext>
+    </p:extLst>
+  </p:cSld>
+  <p:clrMapOvr>
+    <a:masterClrMapping/>
+  </p:clrMapOvr>
+</p:sldLayout>
+</file>
+
+<file path=ppt/slideLayouts/slideLayout7.xml><?xml version="1.0" encoding="utf-8"?>
+<p:sldLayout xmlns:a="http://schemas.openxmlformats.org/drawingml/2006/main" xmlns:r="http://schemas.openxmlformats.org/officeDocument/2006/relationships" xmlns:p="http://schemas.openxmlformats.org/presentationml/2006/main" type="blank" preserve="1">
+  <p:cSld name="빈 화면">
+    <p:spTree>
+      <p:nvGrpSpPr>
+        <p:cNvPr id="1" name=""/>
+        <p:cNvGrpSpPr/>
+        <p:nvPr/>
+      </p:nvGrpSpPr>
+      <p:grpSpPr>
+        <a:xfrm>
+          <a:off x="0" y="0"/>
+          <a:ext cx="0" cy="0"/>
+          <a:chOff x="0" y="0"/>
+          <a:chExt cx="0" cy="0"/>
+        </a:xfrm>
+      </p:grpSpPr>
+      <p:sp>
+        <p:nvSpPr>
+          <p:cNvPr id="2" name="Date Placeholder 1"/>
+          <p:cNvSpPr>
+            <a:spLocks noGrp="1"/>
+          </p:cNvSpPr>
+          <p:nvPr>
+            <p:ph type="dt" sz="half" idx="10"/>
+          </p:nvPr>
+        </p:nvSpPr>
+        <p:spPr/>
+        <p:txBody>
+          <a:bodyPr/>
+          <a:lstStyle/>
+          <a:p>
+            <a:fld id="{5BCAD085-E8A6-8845-BD4E-CB4CCA059FC4}" type="datetimeFigureOut">
+              <a:rPr lang="en-US" smtClean="0"/>
+              <a:t>12/18/2025</a:t>
+            </a:fld>
+            <a:endParaRPr lang="en-US"/>
+          </a:p>
+        </p:txBody>
+      </p:sp>
+      <p:sp>
+        <p:nvSpPr>
+          <p:cNvPr id="3" name="Footer Placeholder 2"/>
+          <p:cNvSpPr>
+            <a:spLocks noGrp="1"/>
+          </p:cNvSpPr>
+          <p:nvPr>
+            <p:ph type="ftr" sz="quarter" idx="11"/>
+          </p:nvPr>
+        </p:nvSpPr>
+        <p:spPr/>
+        <p:txBody>
+          <a:bodyPr/>
+          <a:lstStyle/>
+          <a:p>
+            <a:endParaRPr lang="en-US"/>
+          </a:p>
+        </p:txBody>
+      </p:sp>
+      <p:sp>
+        <p:nvSpPr>
+          <p:cNvPr id="4" name="Slide Number Placeholder 3"/>
+          <p:cNvSpPr>
+            <a:spLocks noGrp="1"/>
+          </p:cNvSpPr>
+          <p:nvPr>
+            <p:ph type="sldNum" sz="quarter" idx="12"/>
+          </p:nvPr>
+        </p:nvSpPr>
+        <p:spPr/>
+        <p:txBody>
+          <a:bodyPr/>
+          <a:lstStyle/>
+          <a:p>
+            <a:fld id="{C1FF6DA9-008F-8B48-92A6-B652298478BF}" type="slidenum">
+              <a:rPr lang="en-US" smtClean="0"/>
+              <a:t>‹#›</a:t>
+            </a:fld>
+            <a:endParaRPr lang="en-US"/>
+          </a:p>
+        </p:txBody>
+      </p:sp>
+    </p:spTree>
+    <p:extLst>
+      <p:ext uri="{BB962C8B-B14F-4D97-AF65-F5344CB8AC3E}">
+        <p14:creationId xmlns:p14="http://schemas.microsoft.com/office/powerpoint/2010/main" val="2957612069"/>
+      </p:ext>
+    </p:extLst>
+  </p:cSld>
+  <p:clrMapOvr>
+    <a:masterClrMapping/>
+  </p:clrMapOvr>
+</p:sldLayout>
+</file>
+
+<file path=ppt/slideLayouts/slideLayout8.xml><?xml version="1.0" encoding="utf-8"?>
+<p:sldLayout xmlns:a="http://schemas.openxmlformats.org/drawingml/2006/main" xmlns:r="http://schemas.openxmlformats.org/officeDocument/2006/relationships" xmlns:p="http://schemas.openxmlformats.org/presentationml/2006/main" type="objTx" preserve="1">
+  <p:cSld name="캡션 있는 콘텐츠">
+    <p:spTree>
+      <p:nvGrpSpPr>
+        <p:cNvPr id="1" name=""/>
+        <p:cNvGrpSpPr/>
+        <p:nvPr/>
+      </p:nvGrpSpPr>
+      <p:grpSpPr>
+        <a:xfrm>
+          <a:off x="0" y="0"/>
+          <a:ext cx="0" cy="0"/>
+          <a:chOff x="0" y="0"/>
+          <a:chExt cx="0" cy="0"/>
+        </a:xfrm>
+      </p:grpSpPr>
+      <p:sp>
+        <p:nvSpPr>
+          <p:cNvPr id="2" name="Title 1"/>
+          <p:cNvSpPr>
+            <a:spLocks noGrp="1"/>
+          </p:cNvSpPr>
+          <p:nvPr>
+            <p:ph type="title"/>
+          </p:nvPr>
+        </p:nvSpPr>
+        <p:spPr>
+          <a:xfrm>
+            <a:off x="5418667" y="533400"/>
+            <a:ext cx="3200400" cy="1524000"/>
+          </a:xfrm>
+        </p:spPr>
+        <p:txBody>
+          <a:bodyPr anchor="b">
+            <a:normAutofit/>
+          </a:bodyPr>
+          <a:lstStyle>
+            <a:lvl1pPr algn="l">
+              <a:defRPr sz="2000" b="0"/>
+            </a:lvl1pPr>
+          </a:lstStyle>
+          <a:p>
+            <a:r>
+              <a:rPr lang="ko-KR" altLang="en-US"/>
+              <a:t>마스터 제목 스타일 편집</a:t>
+            </a:r>
+            <a:endParaRPr lang="en-US" dirty="0"/>
+          </a:p>
+        </p:txBody>
+      </p:sp>
+      <p:sp>
+        <p:nvSpPr>
+          <p:cNvPr id="3" name="Content Placeholder 2"/>
+          <p:cNvSpPr>
+            <a:spLocks noGrp="1"/>
+          </p:cNvSpPr>
+          <p:nvPr>
+            <p:ph idx="1"/>
+          </p:nvPr>
+        </p:nvSpPr>
+        <p:spPr>
+          <a:xfrm>
+            <a:off x="533399" y="533400"/>
+            <a:ext cx="4438755" cy="5486400"/>
+          </a:xfrm>
+        </p:spPr>
+        <p:txBody>
+          <a:bodyPr anchor="ctr">
+            <a:normAutofit/>
+          </a:bodyPr>
+          <a:lstStyle/>
+          <a:p>
+            <a:pPr lvl="0"/>
+            <a:r>
+              <a:rPr lang="ko-KR" altLang="en-US"/>
+              <a:t>마스터 텍스트 스타일을 편집하려면 클릭</a:t>
+            </a:r>
+          </a:p>
+          <a:p>
+            <a:pPr lvl="1"/>
+            <a:r>
+              <a:rPr lang="ko-KR" altLang="en-US"/>
+              <a:t>두 번째 수준</a:t>
+            </a:r>
+          </a:p>
+          <a:p>
+            <a:pPr lvl="2"/>
+            <a:r>
+              <a:rPr lang="ko-KR" altLang="en-US"/>
+              <a:t>세 번째 수준</a:t>
+            </a:r>
+          </a:p>
+          <a:p>
+            <a:pPr lvl="3"/>
+            <a:r>
+              <a:rPr lang="ko-KR" altLang="en-US"/>
+              <a:t>네 번째 수준</a:t>
+            </a:r>
+          </a:p>
+          <a:p>
+            <a:pPr lvl="4"/>
+            <a:r>
+              <a:rPr lang="ko-KR" altLang="en-US"/>
+              <a:t>다섯 번째 수준</a:t>
+            </a:r>
+            <a:endParaRPr lang="en-US" dirty="0"/>
+          </a:p>
+        </p:txBody>
+      </p:sp>
+      <p:sp>
+        <p:nvSpPr>
+          <p:cNvPr id="4" name="Text Placeholder 3"/>
+          <p:cNvSpPr>
+            <a:spLocks noGrp="1"/>
+          </p:cNvSpPr>
+          <p:nvPr>
+            <p:ph type="body" sz="half" idx="2"/>
+          </p:nvPr>
+        </p:nvSpPr>
+        <p:spPr>
+          <a:xfrm>
+            <a:off x="5418667" y="2209802"/>
+            <a:ext cx="3200400" cy="2091267"/>
+          </a:xfrm>
+        </p:spPr>
+        <p:txBody>
+          <a:bodyPr anchor="t">
+            <a:normAutofit/>
+          </a:bodyPr>
+          <a:lstStyle>
+            <a:lvl1pPr marL="0" indent="0">
+              <a:buNone/>
+              <a:defRPr sz="1600"/>
+            </a:lvl1pPr>
+            <a:lvl2pPr marL="457200" indent="0">
+              <a:buNone/>
+              <a:defRPr sz="1200"/>
+            </a:lvl2pPr>
+            <a:lvl3pPr marL="914400" indent="0">
+              <a:buNone/>
+              <a:defRPr sz="1000"/>
+            </a:lvl3pPr>
+            <a:lvl4pPr marL="1371600" indent="0">
+              <a:buNone/>
+              <a:defRPr sz="900"/>
+            </a:lvl4pPr>
+            <a:lvl5pPr marL="1828800" indent="0">
+              <a:buNone/>
+              <a:defRPr sz="900"/>
+            </a:lvl5pPr>
+            <a:lvl6pPr marL="2286000" indent="0">
+              <a:buNone/>
+              <a:defRPr sz="900"/>
+            </a:lvl6pPr>
+            <a:lvl7pPr marL="2743200" indent="0">
+              <a:buNone/>
+              <a:defRPr sz="900"/>
+            </a:lvl7pPr>
+            <a:lvl8pPr marL="3200400" indent="0">
+              <a:buNone/>
+              <a:defRPr sz="900"/>
+            </a:lvl8pPr>
+            <a:lvl9pPr marL="3657600" indent="0">
+              <a:buNone/>
+              <a:defRPr sz="900"/>
+            </a:lvl9pPr>
+          </a:lstStyle>
+          <a:p>
+            <a:pPr lvl="0"/>
+            <a:r>
+              <a:rPr lang="ko-KR" altLang="en-US"/>
+              <a:t>마스터 텍스트 스타일을 편집하려면 클릭</a:t>
+            </a:r>
+          </a:p>
+        </p:txBody>
+      </p:sp>
+      <p:sp>
+        <p:nvSpPr>
+          <p:cNvPr id="5" name="Date Placeholder 4"/>
+          <p:cNvSpPr>
+            <a:spLocks noGrp="1"/>
+          </p:cNvSpPr>
+          <p:nvPr>
+            <p:ph type="dt" sz="half" idx="10"/>
+          </p:nvPr>
+        </p:nvSpPr>
+        <p:spPr/>
+        <p:txBody>
+          <a:bodyPr/>
+          <a:lstStyle/>
+          <a:p>
+            <a:fld id="{5BCAD085-E8A6-8845-BD4E-CB4CCA059FC4}" type="datetimeFigureOut">
+              <a:rPr lang="en-US" smtClean="0"/>
+              <a:t>12/18/2025</a:t>
+            </a:fld>
+            <a:endParaRPr lang="en-US"/>
+          </a:p>
+        </p:txBody>
+      </p:sp>
+      <p:sp>
+        <p:nvSpPr>
+          <p:cNvPr id="6" name="Footer Placeholder 5"/>
+          <p:cNvSpPr>
+            <a:spLocks noGrp="1"/>
+          </p:cNvSpPr>
+          <p:nvPr>
+            <p:ph type="ftr" sz="quarter" idx="11"/>
+          </p:nvPr>
+        </p:nvSpPr>
+        <p:spPr/>
+        <p:txBody>
+          <a:bodyPr/>
+          <a:lstStyle/>
+          <a:p>
+            <a:endParaRPr lang="en-US"/>
+          </a:p>
+        </p:txBody>
+      </p:sp>
+      <p:sp>
+        <p:nvSpPr>
+          <p:cNvPr id="7" name="Slide Number Placeholder 6"/>
+          <p:cNvSpPr>
+            <a:spLocks noGrp="1"/>
+          </p:cNvSpPr>
+          <p:nvPr>
+            <p:ph type="sldNum" sz="quarter" idx="12"/>
+          </p:nvPr>
+        </p:nvSpPr>
+        <p:spPr/>
+        <p:txBody>
+          <a:bodyPr/>
+          <a:lstStyle/>
+          <a:p>
+            <a:fld id="{C1FF6DA9-008F-8B48-92A6-B652298478BF}" type="slidenum">
+              <a:rPr lang="en-US" smtClean="0"/>
+              <a:t>‹#›</a:t>
+            </a:fld>
+            <a:endParaRPr lang="en-US"/>
+          </a:p>
+        </p:txBody>
+      </p:sp>
+    </p:spTree>
+    <p:extLst>
+      <p:ext uri="{BB962C8B-B14F-4D97-AF65-F5344CB8AC3E}">
+        <p14:creationId xmlns:p14="http://schemas.microsoft.com/office/powerpoint/2010/main" val="3005486973"/>
+      </p:ext>
+    </p:extLst>
+  </p:cSld>
+  <p:clrMapOvr>
+    <a:masterClrMapping/>
+  </p:clrMapOvr>
+</p:sldLayout>
+</file>
+
+<file path=ppt/slideLayouts/slideLayout9.xml><?xml version="1.0" encoding="utf-8"?>
+<p:sldLayout xmlns:a="http://schemas.openxmlformats.org/drawingml/2006/main" xmlns:r="http://schemas.openxmlformats.org/officeDocument/2006/relationships" xmlns:p="http://schemas.openxmlformats.org/presentationml/2006/main" type="picTx" preserve="1">
+  <p:cSld name="캡션 있는 그림">
+    <p:spTree>
+      <p:nvGrpSpPr>
+        <p:cNvPr id="1" name=""/>
+        <p:cNvGrpSpPr/>
+        <p:nvPr/>
+      </p:nvGrpSpPr>
+      <p:grpSpPr>
+        <a:xfrm>
+          <a:off x="0" y="0"/>
+          <a:ext cx="0" cy="0"/>
+          <a:chOff x="0" y="0"/>
+          <a:chExt cx="0" cy="0"/>
+        </a:xfrm>
+      </p:grpSpPr>
+      <p:sp>
+        <p:nvSpPr>
+          <p:cNvPr id="2" name="Title 1"/>
+          <p:cNvSpPr>
+            <a:spLocks noGrp="1"/>
+          </p:cNvSpPr>
+          <p:nvPr>
+            <p:ph type="title"/>
+          </p:nvPr>
+        </p:nvSpPr>
+        <p:spPr>
+          <a:xfrm>
+            <a:off x="4495800" y="1447800"/>
+            <a:ext cx="3563258" cy="1143000"/>
+          </a:xfrm>
+        </p:spPr>
+        <p:txBody>
+          <a:bodyPr anchor="b">
+            <a:normAutofit/>
+          </a:bodyPr>
+          <a:lstStyle>
+            <a:lvl1pPr algn="l">
+              <a:defRPr sz="2400" b="0"/>
+            </a:lvl1pPr>
+          </a:lstStyle>
+          <a:p>
+            <a:r>
+              <a:rPr lang="ko-KR" altLang="en-US"/>
+              <a:t>마스터 제목 스타일 편집</a:t>
+            </a:r>
+            <a:endParaRPr lang="en-US" dirty="0"/>
+          </a:p>
+        </p:txBody>
+      </p:sp>
+      <p:sp>
+        <p:nvSpPr>
+          <p:cNvPr id="17" name="Picture Placeholder 2"/>
+          <p:cNvSpPr>
+            <a:spLocks noGrp="1" noChangeAspect="1"/>
+          </p:cNvSpPr>
+          <p:nvPr>
+            <p:ph type="pic" idx="13"/>
+          </p:nvPr>
+        </p:nvSpPr>
+        <p:spPr>
+          <a:xfrm>
+            <a:off x="762000" y="914400"/>
+            <a:ext cx="3280974" cy="4800600"/>
+          </a:xfrm>
+          <a:prstGeom prst="snip2DiagRect">
+            <a:avLst>
+              <a:gd name="adj1" fmla="val 10815"/>
+              <a:gd name="adj2" fmla="val 0"/>
+            </a:avLst>
+          </a:prstGeom>
+          <a:ln w="15875">
+            <a:solidFill>
+              <a:schemeClr val="tx1">
+                <a:alpha val="40000"/>
+              </a:schemeClr>
+            </a:solidFill>
+          </a:ln>
+          <a:effectLst>
+            <a:innerShdw blurRad="57150" dist="38100" dir="14460000">
+              <a:srgbClr val="000000">
+                <a:alpha val="70000"/>
+              </a:srgbClr>
+            </a:innerShdw>
+          </a:effectLst>
+        </p:spPr>
+        <p:txBody>
+          <a:bodyPr anchor="t">
+            <a:normAutofit/>
+          </a:bodyPr>
+          <a:lstStyle>
+            <a:lvl1pPr marL="0" indent="0" algn="ctr">
+              <a:buNone/>
+              <a:defRPr sz="1600"/>
+            </a:lvl1pPr>
+            <a:lvl2pPr marL="457200" indent="0">
+              <a:buNone/>
+              <a:defRPr sz="1600"/>
+            </a:lvl2pPr>
+            <a:lvl3pPr marL="914400" indent="0">
+              <a:buNone/>
+              <a:defRPr sz="1600"/>
+            </a:lvl3pPr>
+            <a:lvl4pPr marL="1371600" indent="0">
+              <a:buNone/>
+              <a:defRPr sz="1600"/>
+            </a:lvl4pPr>
+            <a:lvl5pPr marL="1828800" indent="0">
+              <a:buNone/>
+              <a:defRPr sz="1600"/>
+            </a:lvl5pPr>
+            <a:lvl6pPr marL="2286000" indent="0">
+              <a:buNone/>
+              <a:defRPr sz="1600"/>
+            </a:lvl6pPr>
+            <a:lvl7pPr marL="2743200" indent="0">
+              <a:buNone/>
+              <a:defRPr sz="1600"/>
+            </a:lvl7pPr>
+            <a:lvl8pPr marL="3200400" indent="0">
+              <a:buNone/>
+              <a:defRPr sz="1600"/>
+            </a:lvl8pPr>
+            <a:lvl9pPr marL="3657600" indent="0">
+              <a:buNone/>
+              <a:defRPr sz="1600"/>
+            </a:lvl9pPr>
+          </a:lstStyle>
+          <a:p>
+            <a:r>
+              <a:rPr lang="ko-KR" altLang="en-US"/>
+              <a:t>그림을 추가하려면 아이콘을 클릭하십시오</a:t>
+            </a:r>
+            <a:endParaRPr lang="en-US" dirty="0"/>
+          </a:p>
+        </p:txBody>
+      </p:sp>
+      <p:sp>
+        <p:nvSpPr>
+          <p:cNvPr id="4" name="Text Placeholder 3"/>
+          <p:cNvSpPr>
+            <a:spLocks noGrp="1"/>
+          </p:cNvSpPr>
+          <p:nvPr>
+            <p:ph type="body" sz="half" idx="2"/>
+          </p:nvPr>
+        </p:nvSpPr>
+        <p:spPr>
+          <a:xfrm>
+            <a:off x="4496027" y="2743200"/>
+            <a:ext cx="3564223" cy="2082800"/>
+          </a:xfrm>
+        </p:spPr>
+        <p:txBody>
+          <a:bodyPr anchor="t">
+            <a:normAutofit/>
+          </a:bodyPr>
+          <a:lstStyle>
+            <a:lvl1pPr marL="0" indent="0">
+              <a:buNone/>
+              <a:defRPr sz="1800"/>
+            </a:lvl1pPr>
+            <a:lvl2pPr marL="457200" indent="0">
+              <a:buNone/>
+              <a:defRPr sz="1200"/>
+            </a:lvl2pPr>
+            <a:lvl3pPr marL="914400" indent="0">
+              <a:buNone/>
+              <a:defRPr sz="1000"/>
+            </a:lvl3pPr>
+            <a:lvl4pPr marL="1371600" indent="0">
+              <a:buNone/>
+              <a:defRPr sz="900"/>
+            </a:lvl4pPr>
+            <a:lvl5pPr marL="1828800" indent="0">
+              <a:buNone/>
+              <a:defRPr sz="900"/>
+            </a:lvl5pPr>
+            <a:lvl6pPr marL="2286000" indent="0">
+              <a:buNone/>
+              <a:defRPr sz="900"/>
+            </a:lvl6pPr>
+            <a:lvl7pPr marL="2743200" indent="0">
+              <a:buNone/>
+              <a:defRPr sz="900"/>
+            </a:lvl7pPr>
+            <a:lvl8pPr marL="3200400" indent="0">
+              <a:buNone/>
+              <a:defRPr sz="900"/>
+            </a:lvl8pPr>
+            <a:lvl9pPr marL="3657600" indent="0">
+              <a:buNone/>
+              <a:defRPr sz="900"/>
+            </a:lvl9pPr>
+          </a:lstStyle>
+          <a:p>
+            <a:pPr lvl="0"/>
+            <a:r>
+              <a:rPr lang="ko-KR" altLang="en-US"/>
+              <a:t>마스터 텍스트 스타일을 편집하려면 클릭</a:t>
+            </a:r>
+          </a:p>
+        </p:txBody>
+      </p:sp>
+      <p:sp>
+        <p:nvSpPr>
+          <p:cNvPr id="5" name="Date Placeholder 4"/>
+          <p:cNvSpPr>
+            <a:spLocks noGrp="1"/>
+          </p:cNvSpPr>
+          <p:nvPr>
+            <p:ph type="dt" sz="half" idx="10"/>
+          </p:nvPr>
+        </p:nvSpPr>
+        <p:spPr/>
+        <p:txBody>
+          <a:bodyPr/>
+          <a:lstStyle/>
+          <a:p>
+            <a:fld id="{5BCAD085-E8A6-8845-BD4E-CB4CCA059FC4}" type="datetimeFigureOut">
+              <a:rPr lang="en-US" smtClean="0"/>
+              <a:t>12/18/2025</a:t>
+            </a:fld>
+            <a:endParaRPr lang="en-US"/>
+          </a:p>
+        </p:txBody>
+      </p:sp>
+      <p:sp>
+        <p:nvSpPr>
+          <p:cNvPr id="6" name="Footer Placeholder 5"/>
+          <p:cNvSpPr>
+            <a:spLocks noGrp="1"/>
+          </p:cNvSpPr>
+          <p:nvPr>
+            <p:ph type="ftr" sz="quarter" idx="11"/>
+          </p:nvPr>
+        </p:nvSpPr>
+        <p:spPr>
+          <a:xfrm>
+            <a:off x="533400" y="6172200"/>
+            <a:ext cx="5811724" cy="365125"/>
+          </a:xfrm>
+        </p:spPr>
+        <p:txBody>
+          <a:bodyPr/>
+          <a:lstStyle/>
+          <a:p>
+            <a:endParaRPr lang="en-US"/>
+          </a:p>
+        </p:txBody>
+      </p:sp>
+      <p:sp>
+        <p:nvSpPr>
+          <p:cNvPr id="7" name="Slide Number Placeholder 6"/>
+          <p:cNvSpPr>
+            <a:spLocks noGrp="1"/>
+          </p:cNvSpPr>
+          <p:nvPr>
+            <p:ph type="sldNum" sz="quarter" idx="12"/>
+          </p:nvPr>
+        </p:nvSpPr>
+        <p:spPr/>
+        <p:txBody>
+          <a:bodyPr/>
+          <a:lstStyle/>
+          <a:p>
+            <a:fld id="{C1FF6DA9-008F-8B48-92A6-B652298478BF}" type="slidenum">
+              <a:rPr lang="en-US" smtClean="0"/>
+              <a:t>‹#›</a:t>
+            </a:fld>
+            <a:endParaRPr lang="en-US"/>
+          </a:p>
+        </p:txBody>
+      </p:sp>
+    </p:spTree>
+    <p:extLst>
+      <p:ext uri="{BB962C8B-B14F-4D97-AF65-F5344CB8AC3E}">
+        <p14:creationId xmlns:p14="http://schemas.microsoft.com/office/powerpoint/2010/main" val="927972585"/>
       </p:ext>
     </p:extLst>
   </p:cSld>
@@ -2582,8 +4594,8 @@
 <p:sldMaster xmlns:a="http://schemas.openxmlformats.org/drawingml/2006/main" xmlns:r="http://schemas.openxmlformats.org/officeDocument/2006/relationships" xmlns:p="http://schemas.openxmlformats.org/presentationml/2006/main">
   <p:cSld>
     <p:bg>
-      <p:bgRef idx="1001">
-        <a:schemeClr val="bg1"/>
+      <p:bgRef idx="1002">
+        <a:schemeClr val="bg2"/>
       </p:bgRef>
     </p:bg>
     <p:spTree>
@@ -2600,6 +4612,196 @@
           <a:chExt cx="0" cy="0"/>
         </a:xfrm>
       </p:grpSpPr>
+      <p:grpSp>
+        <p:nvGrpSpPr>
+          <p:cNvPr id="7" name="Group 6"/>
+          <p:cNvGrpSpPr/>
+          <p:nvPr/>
+        </p:nvGrpSpPr>
+        <p:grpSpPr>
+          <a:xfrm>
+            <a:off x="6670675" y="3894667"/>
+            <a:ext cx="2470456" cy="2658533"/>
+            <a:chOff x="6687077" y="3259666"/>
+            <a:chExt cx="2981857" cy="3208867"/>
+          </a:xfrm>
+        </p:grpSpPr>
+        <p:cxnSp>
+          <p:nvCxnSpPr>
+            <p:cNvPr id="8" name="Straight Connector 7"/>
+            <p:cNvCxnSpPr/>
+            <p:nvPr/>
+          </p:nvCxnSpPr>
+          <p:spPr>
+            <a:xfrm flipH="1">
+              <a:off x="8756120" y="3259666"/>
+              <a:ext cx="912814" cy="912812"/>
+            </a:xfrm>
+            <a:prstGeom prst="line">
+              <a:avLst/>
+            </a:prstGeom>
+            <a:ln w="9525">
+              <a:solidFill>
+                <a:schemeClr val="tx1"/>
+              </a:solidFill>
+            </a:ln>
+          </p:spPr>
+          <p:style>
+            <a:lnRef idx="2">
+              <a:schemeClr val="accent1"/>
+            </a:lnRef>
+            <a:fillRef idx="0">
+              <a:schemeClr val="accent1"/>
+            </a:fillRef>
+            <a:effectRef idx="1">
+              <a:schemeClr val="accent1"/>
+            </a:effectRef>
+            <a:fontRef idx="minor">
+              <a:schemeClr val="tx1"/>
+            </a:fontRef>
+          </p:style>
+        </p:cxnSp>
+        <p:cxnSp>
+          <p:nvCxnSpPr>
+            <p:cNvPr id="9" name="Straight Connector 8"/>
+            <p:cNvCxnSpPr/>
+            <p:nvPr/>
+          </p:nvCxnSpPr>
+          <p:spPr>
+            <a:xfrm flipH="1">
+              <a:off x="6687077" y="3486677"/>
+              <a:ext cx="2981857" cy="2981856"/>
+            </a:xfrm>
+            <a:prstGeom prst="line">
+              <a:avLst/>
+            </a:prstGeom>
+            <a:ln w="9525">
+              <a:solidFill>
+                <a:schemeClr val="tx1"/>
+              </a:solidFill>
+            </a:ln>
+          </p:spPr>
+          <p:style>
+            <a:lnRef idx="2">
+              <a:schemeClr val="accent1"/>
+            </a:lnRef>
+            <a:fillRef idx="0">
+              <a:schemeClr val="accent1"/>
+            </a:fillRef>
+            <a:effectRef idx="1">
+              <a:schemeClr val="accent1"/>
+            </a:effectRef>
+            <a:fontRef idx="minor">
+              <a:schemeClr val="tx1"/>
+            </a:fontRef>
+          </p:style>
+        </p:cxnSp>
+        <p:cxnSp>
+          <p:nvCxnSpPr>
+            <p:cNvPr id="10" name="Straight Connector 9"/>
+            <p:cNvCxnSpPr/>
+            <p:nvPr/>
+          </p:nvCxnSpPr>
+          <p:spPr>
+            <a:xfrm flipH="1">
+              <a:off x="7772400" y="3581400"/>
+              <a:ext cx="1896534" cy="1896533"/>
+            </a:xfrm>
+            <a:prstGeom prst="line">
+              <a:avLst/>
+            </a:prstGeom>
+            <a:ln w="9525">
+              <a:solidFill>
+                <a:schemeClr val="tx1"/>
+              </a:solidFill>
+            </a:ln>
+          </p:spPr>
+          <p:style>
+            <a:lnRef idx="2">
+              <a:schemeClr val="accent1"/>
+            </a:lnRef>
+            <a:fillRef idx="0">
+              <a:schemeClr val="accent1"/>
+            </a:fillRef>
+            <a:effectRef idx="1">
+              <a:schemeClr val="accent1"/>
+            </a:effectRef>
+            <a:fontRef idx="minor">
+              <a:schemeClr val="tx1"/>
+            </a:fontRef>
+          </p:style>
+        </p:cxnSp>
+        <p:cxnSp>
+          <p:nvCxnSpPr>
+            <p:cNvPr id="11" name="Straight Connector 10"/>
+            <p:cNvCxnSpPr/>
+            <p:nvPr/>
+          </p:nvCxnSpPr>
+          <p:spPr>
+            <a:xfrm flipH="1">
+              <a:off x="7923214" y="3433394"/>
+              <a:ext cx="1739738" cy="1739740"/>
+            </a:xfrm>
+            <a:prstGeom prst="line">
+              <a:avLst/>
+            </a:prstGeom>
+            <a:ln w="28575">
+              <a:solidFill>
+                <a:schemeClr val="tx1"/>
+              </a:solidFill>
+            </a:ln>
+          </p:spPr>
+          <p:style>
+            <a:lnRef idx="2">
+              <a:schemeClr val="accent1"/>
+            </a:lnRef>
+            <a:fillRef idx="0">
+              <a:schemeClr val="accent1"/>
+            </a:fillRef>
+            <a:effectRef idx="1">
+              <a:schemeClr val="accent1"/>
+            </a:effectRef>
+            <a:fontRef idx="minor">
+              <a:schemeClr val="tx1"/>
+            </a:fontRef>
+          </p:style>
+        </p:cxnSp>
+        <p:cxnSp>
+          <p:nvCxnSpPr>
+            <p:cNvPr id="12" name="Straight Connector 11"/>
+            <p:cNvCxnSpPr/>
+            <p:nvPr/>
+          </p:nvCxnSpPr>
+          <p:spPr>
+            <a:xfrm flipH="1">
+              <a:off x="8398935" y="3985317"/>
+              <a:ext cx="1264017" cy="1264016"/>
+            </a:xfrm>
+            <a:prstGeom prst="line">
+              <a:avLst/>
+            </a:prstGeom>
+            <a:ln w="28575">
+              <a:solidFill>
+                <a:schemeClr val="tx1"/>
+              </a:solidFill>
+            </a:ln>
+          </p:spPr>
+          <p:style>
+            <a:lnRef idx="2">
+              <a:schemeClr val="accent1"/>
+            </a:lnRef>
+            <a:fillRef idx="0">
+              <a:schemeClr val="accent1"/>
+            </a:fillRef>
+            <a:effectRef idx="1">
+              <a:schemeClr val="accent1"/>
+            </a:effectRef>
+            <a:fontRef idx="minor">
+              <a:schemeClr val="tx1"/>
+            </a:fontRef>
+          </p:style>
+        </p:cxnSp>
+      </p:grpSp>
       <p:sp>
         <p:nvSpPr>
           <p:cNvPr id="2" name="Title Placeholder 1"/>
@@ -2612,12 +4814,13 @@
         </p:nvSpPr>
         <p:spPr>
           <a:xfrm>
-            <a:off x="457200" y="274638"/>
-            <a:ext cx="8229600" cy="1143000"/>
+            <a:off x="533400" y="4495800"/>
+            <a:ext cx="6554867" cy="1524000"/>
           </a:xfrm>
           <a:prstGeom prst="rect">
             <a:avLst/>
           </a:prstGeom>
+          <a:effectLst/>
         </p:spPr>
         <p:txBody>
           <a:bodyPr vert="horz" lIns="91440" tIns="45720" rIns="91440" bIns="45720" rtlCol="0" anchor="ctr">
@@ -2626,10 +4829,10 @@
           <a:lstStyle/>
           <a:p>
             <a:r>
-              <a:rPr lang="en-US" smtClean="0"/>
-              <a:t>Click to edit Master title style</a:t>
-            </a:r>
-            <a:endParaRPr lang="en-US"/>
+              <a:rPr lang="ko-KR" altLang="en-US"/>
+              <a:t>마스터 제목 스타일 편집</a:t>
+            </a:r>
+            <a:endParaRPr lang="en-US" dirty="0"/>
           </a:p>
         </p:txBody>
       </p:sp>
@@ -2645,53 +4848,53 @@
         </p:nvSpPr>
         <p:spPr>
           <a:xfrm>
-            <a:off x="457200" y="1600200"/>
-            <a:ext cx="8229600" cy="4525963"/>
+            <a:off x="533400" y="533401"/>
+            <a:ext cx="6554867" cy="3767670"/>
           </a:xfrm>
           <a:prstGeom prst="rect">
             <a:avLst/>
           </a:prstGeom>
         </p:spPr>
         <p:txBody>
-          <a:bodyPr vert="horz" lIns="91440" tIns="45720" rIns="91440" bIns="45720" rtlCol="0">
+          <a:bodyPr vert="horz" lIns="91440" tIns="45720" rIns="91440" bIns="45720" rtlCol="0" anchor="ctr">
             <a:normAutofit/>
           </a:bodyPr>
           <a:lstStyle/>
           <a:p>
             <a:pPr lvl="0"/>
             <a:r>
-              <a:rPr lang="en-US" smtClean="0"/>
-              <a:t>Click to edit Master text styles</a:t>
+              <a:rPr lang="ko-KR" altLang="en-US"/>
+              <a:t>마스터 텍스트 스타일을 편집하려면 클릭</a:t>
             </a:r>
           </a:p>
           <a:p>
             <a:pPr lvl="1"/>
             <a:r>
-              <a:rPr lang="en-US" smtClean="0"/>
-              <a:t>Second level</a:t>
+              <a:rPr lang="ko-KR" altLang="en-US"/>
+              <a:t>두 번째 수준</a:t>
             </a:r>
           </a:p>
           <a:p>
             <a:pPr lvl="2"/>
             <a:r>
-              <a:rPr lang="en-US" smtClean="0"/>
-              <a:t>Third level</a:t>
+              <a:rPr lang="ko-KR" altLang="en-US"/>
+              <a:t>세 번째 수준</a:t>
             </a:r>
           </a:p>
           <a:p>
             <a:pPr lvl="3"/>
             <a:r>
-              <a:rPr lang="en-US" smtClean="0"/>
-              <a:t>Fourth level</a:t>
+              <a:rPr lang="ko-KR" altLang="en-US"/>
+              <a:t>네 번째 수준</a:t>
             </a:r>
           </a:p>
           <a:p>
             <a:pPr lvl="4"/>
             <a:r>
-              <a:rPr lang="en-US" smtClean="0"/>
-              <a:t>Fifth level</a:t>
-            </a:r>
-            <a:endParaRPr lang="en-US"/>
+              <a:rPr lang="ko-KR" altLang="en-US"/>
+              <a:t>다섯 번째 수준</a:t>
+            </a:r>
+            <a:endParaRPr lang="en-US" dirty="0"/>
           </a:p>
         </p:txBody>
       </p:sp>
@@ -2707,30 +4910,32 @@
         </p:nvSpPr>
         <p:spPr>
           <a:xfrm>
-            <a:off x="457200" y="6356350"/>
-            <a:ext cx="2133600" cy="365125"/>
+            <a:off x="7430245" y="6172203"/>
+            <a:ext cx="1200463" cy="365125"/>
           </a:xfrm>
           <a:prstGeom prst="rect">
             <a:avLst/>
           </a:prstGeom>
         </p:spPr>
         <p:txBody>
-          <a:bodyPr vert="horz" lIns="91440" tIns="45720" rIns="91440" bIns="45720" rtlCol="0" anchor="ctr"/>
+          <a:bodyPr vert="horz" lIns="91440" tIns="45720" rIns="91440" bIns="45720" rtlCol="0" anchor="t"/>
           <a:lstStyle>
-            <a:lvl1pPr algn="l">
-              <a:defRPr sz="1200">
-                <a:solidFill>
-                  <a:schemeClr val="tx1">
-                    <a:tint val="75000"/>
+            <a:lvl1pPr algn="r">
+              <a:defRPr sz="1000" b="0" i="0">
+                <a:solidFill>
+                  <a:schemeClr val="bg2">
+                    <a:lumMod val="50000"/>
                   </a:schemeClr>
                 </a:solidFill>
+                <a:effectLst/>
+                <a:latin typeface="+mn-lt"/>
               </a:defRPr>
             </a:lvl1pPr>
           </a:lstStyle>
           <a:p>
             <a:fld id="{5BCAD085-E8A6-8845-BD4E-CB4CCA059FC4}" type="datetimeFigureOut">
               <a:rPr lang="en-US" smtClean="0"/>
-              <a:t>1/27/13</a:t>
+              <a:t>12/18/2025</a:t>
             </a:fld>
             <a:endParaRPr lang="en-US"/>
           </a:p>
@@ -2748,23 +4953,25 @@
         </p:nvSpPr>
         <p:spPr>
           <a:xfrm>
-            <a:off x="3124200" y="6356350"/>
-            <a:ext cx="2895600" cy="365125"/>
+            <a:off x="533400" y="6172200"/>
+            <a:ext cx="5811724" cy="365125"/>
           </a:xfrm>
           <a:prstGeom prst="rect">
             <a:avLst/>
           </a:prstGeom>
         </p:spPr>
         <p:txBody>
-          <a:bodyPr vert="horz" lIns="91440" tIns="45720" rIns="91440" bIns="45720" rtlCol="0" anchor="ctr"/>
+          <a:bodyPr vert="horz" lIns="91440" tIns="45720" rIns="91440" bIns="45720" rtlCol="0" anchor="t"/>
           <a:lstStyle>
-            <a:lvl1pPr algn="ctr">
-              <a:defRPr sz="1200">
-                <a:solidFill>
-                  <a:schemeClr val="tx1">
-                    <a:tint val="75000"/>
+            <a:lvl1pPr algn="l">
+              <a:defRPr sz="1000" b="0" i="0">
+                <a:solidFill>
+                  <a:schemeClr val="bg2">
+                    <a:lumMod val="50000"/>
                   </a:schemeClr>
                 </a:solidFill>
+                <a:effectLst/>
+                <a:latin typeface="+mn-lt"/>
               </a:defRPr>
             </a:lvl1pPr>
           </a:lstStyle>
@@ -2785,23 +4992,25 @@
         </p:nvSpPr>
         <p:spPr>
           <a:xfrm>
-            <a:off x="6553200" y="6356350"/>
-            <a:ext cx="2133600" cy="365125"/>
+            <a:off x="7774426" y="5578478"/>
+            <a:ext cx="856907" cy="669925"/>
           </a:xfrm>
           <a:prstGeom prst="rect">
             <a:avLst/>
           </a:prstGeom>
         </p:spPr>
         <p:txBody>
-          <a:bodyPr vert="horz" lIns="91440" tIns="45720" rIns="91440" bIns="45720" rtlCol="0" anchor="ctr"/>
+          <a:bodyPr vert="horz" lIns="91440" tIns="45720" rIns="91440" bIns="45720" rtlCol="0" anchor="b"/>
           <a:lstStyle>
             <a:lvl1pPr algn="r">
-              <a:defRPr sz="1200">
-                <a:solidFill>
-                  <a:schemeClr val="tx1">
-                    <a:tint val="75000"/>
+              <a:defRPr sz="2800" b="0" i="0">
+                <a:solidFill>
+                  <a:schemeClr val="bg2">
+                    <a:lumMod val="50000"/>
                   </a:schemeClr>
                 </a:solidFill>
+                <a:effectLst/>
+                <a:latin typeface="+mn-lt"/>
               </a:defRPr>
             </a:lvl1pPr>
           </a:lstStyle>
@@ -2817,172 +5026,328 @@
     </p:spTree>
     <p:extLst>
       <p:ext uri="{BB962C8B-B14F-4D97-AF65-F5344CB8AC3E}">
-        <p14:creationId xmlns:p14="http://schemas.microsoft.com/office/powerpoint/2010/main" val="2209977519"/>
+        <p14:creationId xmlns:p14="http://schemas.microsoft.com/office/powerpoint/2010/main" val="242558254"/>
       </p:ext>
     </p:extLst>
   </p:cSld>
-  <p:clrMap bg1="lt1" tx1="dk1" bg2="lt2" tx2="dk2" accent1="accent1" accent2="accent2" accent3="accent3" accent4="accent4" accent5="accent5" accent6="accent6" hlink="hlink" folHlink="folHlink"/>
+  <p:clrMap bg1="dk1" tx1="lt1" bg2="dk2" tx2="lt2" accent1="accent1" accent2="accent2" accent3="accent3" accent4="accent4" accent5="accent5" accent6="accent6" hlink="hlink" folHlink="folHlink"/>
   <p:sldLayoutIdLst>
-    <p:sldLayoutId id="2147483649" r:id="rId1"/>
-    <p:sldLayoutId id="2147483650" r:id="rId2"/>
-    <p:sldLayoutId id="2147483651" r:id="rId3"/>
-    <p:sldLayoutId id="2147483652" r:id="rId4"/>
-    <p:sldLayoutId id="2147483653" r:id="rId5"/>
-    <p:sldLayoutId id="2147483654" r:id="rId6"/>
-    <p:sldLayoutId id="2147483655" r:id="rId7"/>
-    <p:sldLayoutId id="2147483656" r:id="rId8"/>
-    <p:sldLayoutId id="2147483657" r:id="rId9"/>
-    <p:sldLayoutId id="2147483658" r:id="rId10"/>
-    <p:sldLayoutId id="2147483659" r:id="rId11"/>
+    <p:sldLayoutId id="2147483661" r:id="rId1"/>
+    <p:sldLayoutId id="2147483662" r:id="rId2"/>
+    <p:sldLayoutId id="2147483663" r:id="rId3"/>
+    <p:sldLayoutId id="2147483664" r:id="rId4"/>
+    <p:sldLayoutId id="2147483665" r:id="rId5"/>
+    <p:sldLayoutId id="2147483666" r:id="rId6"/>
+    <p:sldLayoutId id="2147483667" r:id="rId7"/>
+    <p:sldLayoutId id="2147483668" r:id="rId8"/>
+    <p:sldLayoutId id="2147483669" r:id="rId9"/>
+    <p:sldLayoutId id="2147483670" r:id="rId10"/>
+    <p:sldLayoutId id="2147483671" r:id="rId11"/>
+    <p:sldLayoutId id="2147483672" r:id="rId12"/>
+    <p:sldLayoutId id="2147483673" r:id="rId13"/>
+    <p:sldLayoutId id="2147483674" r:id="rId14"/>
+    <p:sldLayoutId id="2147483675" r:id="rId15"/>
+    <p:sldLayoutId id="2147483676" r:id="rId16"/>
+    <p:sldLayoutId id="2147483677" r:id="rId17"/>
   </p:sldLayoutIdLst>
   <p:txStyles>
     <p:titleStyle>
-      <a:lvl1pPr algn="ctr" defTabSz="457200" rtl="0" eaLnBrk="1" latinLnBrk="0" hangingPunct="1">
+      <a:lvl1pPr algn="l" defTabSz="457200" rtl="0" eaLnBrk="1" latinLnBrk="1" hangingPunct="1">
         <a:spcBef>
           <a:spcPct val="0"/>
         </a:spcBef>
         <a:buNone/>
-        <a:defRPr sz="4400" kern="1200">
+        <a:defRPr sz="3200" kern="1200" cap="all">
+          <a:ln w="3175" cmpd="sng">
+            <a:noFill/>
+          </a:ln>
           <a:solidFill>
             <a:schemeClr val="tx1"/>
           </a:solidFill>
+          <a:effectLst/>
           <a:latin typeface="+mj-lt"/>
           <a:ea typeface="+mj-ea"/>
           <a:cs typeface="+mj-cs"/>
         </a:defRPr>
       </a:lvl1pPr>
+      <a:lvl2pPr eaLnBrk="1" latinLnBrk="1" hangingPunct="1">
+        <a:defRPr>
+          <a:solidFill>
+            <a:schemeClr val="tx2"/>
+          </a:solidFill>
+        </a:defRPr>
+      </a:lvl2pPr>
+      <a:lvl3pPr eaLnBrk="1" latinLnBrk="1" hangingPunct="1">
+        <a:defRPr>
+          <a:solidFill>
+            <a:schemeClr val="tx2"/>
+          </a:solidFill>
+        </a:defRPr>
+      </a:lvl3pPr>
+      <a:lvl4pPr eaLnBrk="1" latinLnBrk="1" hangingPunct="1">
+        <a:defRPr>
+          <a:solidFill>
+            <a:schemeClr val="tx2"/>
+          </a:solidFill>
+        </a:defRPr>
+      </a:lvl4pPr>
+      <a:lvl5pPr eaLnBrk="1" latinLnBrk="1" hangingPunct="1">
+        <a:defRPr>
+          <a:solidFill>
+            <a:schemeClr val="tx2"/>
+          </a:solidFill>
+        </a:defRPr>
+      </a:lvl5pPr>
+      <a:lvl6pPr eaLnBrk="1" latinLnBrk="1" hangingPunct="1">
+        <a:defRPr>
+          <a:solidFill>
+            <a:schemeClr val="tx2"/>
+          </a:solidFill>
+        </a:defRPr>
+      </a:lvl6pPr>
+      <a:lvl7pPr eaLnBrk="1" latinLnBrk="1" hangingPunct="1">
+        <a:defRPr>
+          <a:solidFill>
+            <a:schemeClr val="tx2"/>
+          </a:solidFill>
+        </a:defRPr>
+      </a:lvl7pPr>
+      <a:lvl8pPr eaLnBrk="1" latinLnBrk="1" hangingPunct="1">
+        <a:defRPr>
+          <a:solidFill>
+            <a:schemeClr val="tx2"/>
+          </a:solidFill>
+        </a:defRPr>
+      </a:lvl8pPr>
+      <a:lvl9pPr eaLnBrk="1" latinLnBrk="1" hangingPunct="1">
+        <a:defRPr>
+          <a:solidFill>
+            <a:schemeClr val="tx2"/>
+          </a:solidFill>
+        </a:defRPr>
+      </a:lvl9pPr>
     </p:titleStyle>
     <p:bodyStyle>
-      <a:lvl1pPr marL="342900" indent="-342900" algn="l" defTabSz="457200" rtl="0" eaLnBrk="1" latinLnBrk="0" hangingPunct="1">
+      <a:lvl1pPr marL="285750" indent="-285750" algn="l" defTabSz="457200" rtl="0" eaLnBrk="1" latinLnBrk="1" hangingPunct="1">
         <a:spcBef>
           <a:spcPct val="20000"/>
         </a:spcBef>
-        <a:buFont typeface="Arial"/>
-        <a:buChar char="•"/>
-        <a:defRPr sz="3200" kern="1200">
+        <a:spcAft>
+          <a:spcPts val="600"/>
+        </a:spcAft>
+        <a:buClr>
+          <a:schemeClr val="tx1"/>
+        </a:buClr>
+        <a:buSzPct val="80000"/>
+        <a:buFont typeface="Wingdings 3" panose="05040102010807070707" pitchFamily="18" charset="2"/>
+        <a:buChar char=""/>
+        <a:defRPr sz="2000" kern="1200" cap="none">
           <a:solidFill>
-            <a:schemeClr val="tx1"/>
+            <a:schemeClr val="bg2">
+              <a:lumMod val="75000"/>
+            </a:schemeClr>
           </a:solidFill>
+          <a:effectLst/>
           <a:latin typeface="+mn-lt"/>
           <a:ea typeface="+mn-ea"/>
           <a:cs typeface="+mn-cs"/>
         </a:defRPr>
       </a:lvl1pPr>
-      <a:lvl2pPr marL="742950" indent="-285750" algn="l" defTabSz="457200" rtl="0" eaLnBrk="1" latinLnBrk="0" hangingPunct="1">
+      <a:lvl2pPr marL="742950" indent="-285750" algn="l" defTabSz="457200" rtl="0" eaLnBrk="1" latinLnBrk="1" hangingPunct="1">
         <a:spcBef>
           <a:spcPct val="20000"/>
         </a:spcBef>
-        <a:buFont typeface="Arial"/>
-        <a:buChar char="–"/>
-        <a:defRPr sz="2800" kern="1200">
+        <a:spcAft>
+          <a:spcPts val="600"/>
+        </a:spcAft>
+        <a:buClr>
+          <a:schemeClr val="tx1"/>
+        </a:buClr>
+        <a:buSzPct val="80000"/>
+        <a:buFont typeface="Wingdings 3" panose="05040102010807070707" pitchFamily="18" charset="2"/>
+        <a:buChar char=""/>
+        <a:defRPr sz="1800" kern="1200" cap="none">
           <a:solidFill>
-            <a:schemeClr val="tx1"/>
+            <a:schemeClr val="bg2">
+              <a:lumMod val="75000"/>
+            </a:schemeClr>
           </a:solidFill>
+          <a:effectLst/>
           <a:latin typeface="+mn-lt"/>
           <a:ea typeface="+mn-ea"/>
           <a:cs typeface="+mn-cs"/>
         </a:defRPr>
       </a:lvl2pPr>
-      <a:lvl3pPr marL="1143000" indent="-228600" algn="l" defTabSz="457200" rtl="0" eaLnBrk="1" latinLnBrk="0" hangingPunct="1">
+      <a:lvl3pPr marL="1200150" indent="-285750" algn="l" defTabSz="457200" rtl="0" eaLnBrk="1" latinLnBrk="1" hangingPunct="1">
         <a:spcBef>
           <a:spcPct val="20000"/>
         </a:spcBef>
-        <a:buFont typeface="Arial"/>
-        <a:buChar char="•"/>
-        <a:defRPr sz="2400" kern="1200">
+        <a:spcAft>
+          <a:spcPts val="600"/>
+        </a:spcAft>
+        <a:buClr>
+          <a:schemeClr val="tx1"/>
+        </a:buClr>
+        <a:buSzPct val="80000"/>
+        <a:buFont typeface="Wingdings 3" panose="05040102010807070707" pitchFamily="18" charset="2"/>
+        <a:buChar char=""/>
+        <a:defRPr sz="1600" kern="1200" cap="none">
           <a:solidFill>
-            <a:schemeClr val="tx1"/>
+            <a:schemeClr val="bg2">
+              <a:lumMod val="75000"/>
+            </a:schemeClr>
           </a:solidFill>
+          <a:effectLst/>
           <a:latin typeface="+mn-lt"/>
           <a:ea typeface="+mn-ea"/>
           <a:cs typeface="+mn-cs"/>
         </a:defRPr>
       </a:lvl3pPr>
-      <a:lvl4pPr marL="1600200" indent="-228600" algn="l" defTabSz="457200" rtl="0" eaLnBrk="1" latinLnBrk="0" hangingPunct="1">
+      <a:lvl4pPr marL="1543050" indent="-171450" algn="l" defTabSz="457200" rtl="0" eaLnBrk="1" latinLnBrk="1" hangingPunct="1">
         <a:spcBef>
           <a:spcPct val="20000"/>
         </a:spcBef>
-        <a:buFont typeface="Arial"/>
-        <a:buChar char="–"/>
-        <a:defRPr sz="2000" kern="1200">
+        <a:spcAft>
+          <a:spcPts val="600"/>
+        </a:spcAft>
+        <a:buClr>
+          <a:schemeClr val="tx1"/>
+        </a:buClr>
+        <a:buSzPct val="80000"/>
+        <a:buFont typeface="Wingdings 3" panose="05040102010807070707" pitchFamily="18" charset="2"/>
+        <a:buChar char=""/>
+        <a:defRPr sz="1400" kern="1200" cap="none">
           <a:solidFill>
-            <a:schemeClr val="tx1"/>
+            <a:schemeClr val="bg2">
+              <a:lumMod val="75000"/>
+            </a:schemeClr>
           </a:solidFill>
+          <a:effectLst/>
           <a:latin typeface="+mn-lt"/>
           <a:ea typeface="+mn-ea"/>
           <a:cs typeface="+mn-cs"/>
         </a:defRPr>
       </a:lvl4pPr>
-      <a:lvl5pPr marL="2057400" indent="-228600" algn="l" defTabSz="457200" rtl="0" eaLnBrk="1" latinLnBrk="0" hangingPunct="1">
+      <a:lvl5pPr marL="2000250" indent="-171450" algn="l" defTabSz="457200" rtl="0" eaLnBrk="1" latinLnBrk="1" hangingPunct="1">
         <a:spcBef>
           <a:spcPct val="20000"/>
         </a:spcBef>
-        <a:buFont typeface="Arial"/>
-        <a:buChar char="»"/>
-        <a:defRPr sz="2000" kern="1200">
+        <a:spcAft>
+          <a:spcPts val="600"/>
+        </a:spcAft>
+        <a:buClr>
+          <a:schemeClr val="tx1"/>
+        </a:buClr>
+        <a:buSzPct val="80000"/>
+        <a:buFont typeface="Wingdings 3" panose="05040102010807070707" pitchFamily="18" charset="2"/>
+        <a:buChar char=""/>
+        <a:defRPr sz="1400" kern="1200" cap="none">
           <a:solidFill>
-            <a:schemeClr val="tx1"/>
+            <a:schemeClr val="bg2">
+              <a:lumMod val="75000"/>
+            </a:schemeClr>
           </a:solidFill>
+          <a:effectLst/>
           <a:latin typeface="+mn-lt"/>
           <a:ea typeface="+mn-ea"/>
           <a:cs typeface="+mn-cs"/>
         </a:defRPr>
       </a:lvl5pPr>
-      <a:lvl6pPr marL="2514600" indent="-228600" algn="l" defTabSz="457200" rtl="0" eaLnBrk="1" latinLnBrk="0" hangingPunct="1">
+      <a:lvl6pPr marL="2514600" indent="-228600" algn="l" defTabSz="457200" rtl="0" eaLnBrk="1" latinLnBrk="1" hangingPunct="1">
         <a:spcBef>
           <a:spcPct val="20000"/>
         </a:spcBef>
-        <a:buFont typeface="Arial"/>
-        <a:buChar char="•"/>
-        <a:defRPr sz="2000" kern="1200">
+        <a:spcAft>
+          <a:spcPts val="600"/>
+        </a:spcAft>
+        <a:buClr>
+          <a:schemeClr val="tx1"/>
+        </a:buClr>
+        <a:buSzPct val="80000"/>
+        <a:buFont typeface="Wingdings 3" panose="05040102010807070707" pitchFamily="18" charset="2"/>
+        <a:buChar char=""/>
+        <a:defRPr sz="1400" kern="1200" cap="none">
           <a:solidFill>
-            <a:schemeClr val="tx1"/>
+            <a:schemeClr val="bg2">
+              <a:lumMod val="75000"/>
+            </a:schemeClr>
           </a:solidFill>
+          <a:effectLst/>
           <a:latin typeface="+mn-lt"/>
           <a:ea typeface="+mn-ea"/>
           <a:cs typeface="+mn-cs"/>
         </a:defRPr>
       </a:lvl6pPr>
-      <a:lvl7pPr marL="2971800" indent="-228600" algn="l" defTabSz="457200" rtl="0" eaLnBrk="1" latinLnBrk="0" hangingPunct="1">
+      <a:lvl7pPr marL="2971800" indent="-228600" algn="l" defTabSz="457200" rtl="0" eaLnBrk="1" latinLnBrk="1" hangingPunct="1">
         <a:spcBef>
           <a:spcPct val="20000"/>
         </a:spcBef>
-        <a:buFont typeface="Arial"/>
-        <a:buChar char="•"/>
-        <a:defRPr sz="2000" kern="1200">
+        <a:spcAft>
+          <a:spcPts val="600"/>
+        </a:spcAft>
+        <a:buClr>
+          <a:schemeClr val="tx1"/>
+        </a:buClr>
+        <a:buSzPct val="80000"/>
+        <a:buFont typeface="Wingdings 3" panose="05040102010807070707" pitchFamily="18" charset="2"/>
+        <a:buChar char=""/>
+        <a:defRPr sz="1400" kern="1200" cap="none">
           <a:solidFill>
-            <a:schemeClr val="tx1"/>
+            <a:schemeClr val="bg2">
+              <a:lumMod val="75000"/>
+            </a:schemeClr>
           </a:solidFill>
+          <a:effectLst/>
           <a:latin typeface="+mn-lt"/>
           <a:ea typeface="+mn-ea"/>
           <a:cs typeface="+mn-cs"/>
         </a:defRPr>
       </a:lvl7pPr>
-      <a:lvl8pPr marL="3429000" indent="-228600" algn="l" defTabSz="457200" rtl="0" eaLnBrk="1" latinLnBrk="0" hangingPunct="1">
+      <a:lvl8pPr marL="3429000" indent="-228600" algn="l" defTabSz="457200" rtl="0" eaLnBrk="1" latinLnBrk="1" hangingPunct="1">
         <a:spcBef>
           <a:spcPct val="20000"/>
         </a:spcBef>
-        <a:buFont typeface="Arial"/>
-        <a:buChar char="•"/>
-        <a:defRPr sz="2000" kern="1200">
+        <a:spcAft>
+          <a:spcPts val="600"/>
+        </a:spcAft>
+        <a:buClr>
+          <a:schemeClr val="tx1"/>
+        </a:buClr>
+        <a:buSzPct val="80000"/>
+        <a:buFont typeface="Wingdings 3" panose="05040102010807070707" pitchFamily="18" charset="2"/>
+        <a:buChar char=""/>
+        <a:defRPr sz="1400" kern="1200" cap="none">
           <a:solidFill>
-            <a:schemeClr val="tx1"/>
+            <a:schemeClr val="bg2">
+              <a:lumMod val="75000"/>
+            </a:schemeClr>
           </a:solidFill>
+          <a:effectLst/>
           <a:latin typeface="+mn-lt"/>
           <a:ea typeface="+mn-ea"/>
           <a:cs typeface="+mn-cs"/>
         </a:defRPr>
       </a:lvl8pPr>
-      <a:lvl9pPr marL="3886200" indent="-228600" algn="l" defTabSz="457200" rtl="0" eaLnBrk="1" latinLnBrk="0" hangingPunct="1">
+      <a:lvl9pPr marL="3886200" indent="-228600" algn="l" defTabSz="457200" rtl="0" eaLnBrk="1" latinLnBrk="1" hangingPunct="1">
         <a:spcBef>
           <a:spcPct val="20000"/>
         </a:spcBef>
-        <a:buFont typeface="Arial"/>
-        <a:buChar char="•"/>
-        <a:defRPr sz="2000" kern="1200">
+        <a:spcAft>
+          <a:spcPts val="600"/>
+        </a:spcAft>
+        <a:buClr>
+          <a:schemeClr val="tx1"/>
+        </a:buClr>
+        <a:buSzPct val="80000"/>
+        <a:buFont typeface="Wingdings 3" panose="05040102010807070707" pitchFamily="18" charset="2"/>
+        <a:buChar char=""/>
+        <a:defRPr sz="1400" kern="1200" cap="none">
           <a:solidFill>
-            <a:schemeClr val="tx1"/>
+            <a:schemeClr val="bg2">
+              <a:lumMod val="75000"/>
+            </a:schemeClr>
           </a:solidFill>
+          <a:effectLst/>
           <a:latin typeface="+mn-lt"/>
           <a:ea typeface="+mn-ea"/>
           <a:cs typeface="+mn-cs"/>
@@ -2993,7 +5358,7 @@
       <a:defPPr>
         <a:defRPr lang="en-US"/>
       </a:defPPr>
-      <a:lvl1pPr marL="0" algn="l" defTabSz="457200" rtl="0" eaLnBrk="1" latinLnBrk="0" hangingPunct="1">
+      <a:lvl1pPr marL="0" algn="l" defTabSz="457200" rtl="0" eaLnBrk="1" latinLnBrk="1" hangingPunct="1">
         <a:defRPr sz="1800" kern="1200">
           <a:solidFill>
             <a:schemeClr val="tx1"/>
@@ -3003,7 +5368,7 @@
           <a:cs typeface="+mn-cs"/>
         </a:defRPr>
       </a:lvl1pPr>
-      <a:lvl2pPr marL="457200" algn="l" defTabSz="457200" rtl="0" eaLnBrk="1" latinLnBrk="0" hangingPunct="1">
+      <a:lvl2pPr marL="457200" algn="l" defTabSz="457200" rtl="0" eaLnBrk="1" latinLnBrk="1" hangingPunct="1">
         <a:defRPr sz="1800" kern="1200">
           <a:solidFill>
             <a:schemeClr val="tx1"/>
@@ -3013,7 +5378,7 @@
           <a:cs typeface="+mn-cs"/>
         </a:defRPr>
       </a:lvl2pPr>
-      <a:lvl3pPr marL="914400" algn="l" defTabSz="457200" rtl="0" eaLnBrk="1" latinLnBrk="0" hangingPunct="1">
+      <a:lvl3pPr marL="914400" algn="l" defTabSz="457200" rtl="0" eaLnBrk="1" latinLnBrk="1" hangingPunct="1">
         <a:defRPr sz="1800" kern="1200">
           <a:solidFill>
             <a:schemeClr val="tx1"/>
@@ -3023,7 +5388,7 @@
           <a:cs typeface="+mn-cs"/>
         </a:defRPr>
       </a:lvl3pPr>
-      <a:lvl4pPr marL="1371600" algn="l" defTabSz="457200" rtl="0" eaLnBrk="1" latinLnBrk="0" hangingPunct="1">
+      <a:lvl4pPr marL="1371600" algn="l" defTabSz="457200" rtl="0" eaLnBrk="1" latinLnBrk="1" hangingPunct="1">
         <a:defRPr sz="1800" kern="1200">
           <a:solidFill>
             <a:schemeClr val="tx1"/>
@@ -3033,7 +5398,7 @@
           <a:cs typeface="+mn-cs"/>
         </a:defRPr>
       </a:lvl4pPr>
-      <a:lvl5pPr marL="1828800" algn="l" defTabSz="457200" rtl="0" eaLnBrk="1" latinLnBrk="0" hangingPunct="1">
+      <a:lvl5pPr marL="1828800" algn="l" defTabSz="457200" rtl="0" eaLnBrk="1" latinLnBrk="1" hangingPunct="1">
         <a:defRPr sz="1800" kern="1200">
           <a:solidFill>
             <a:schemeClr val="tx1"/>
@@ -3043,7 +5408,7 @@
           <a:cs typeface="+mn-cs"/>
         </a:defRPr>
       </a:lvl5pPr>
-      <a:lvl6pPr marL="2286000" algn="l" defTabSz="457200" rtl="0" eaLnBrk="1" latinLnBrk="0" hangingPunct="1">
+      <a:lvl6pPr marL="2286000" algn="l" defTabSz="457200" rtl="0" eaLnBrk="1" latinLnBrk="1" hangingPunct="1">
         <a:defRPr sz="1800" kern="1200">
           <a:solidFill>
             <a:schemeClr val="tx1"/>
@@ -3053,7 +5418,7 @@
           <a:cs typeface="+mn-cs"/>
         </a:defRPr>
       </a:lvl6pPr>
-      <a:lvl7pPr marL="2743200" algn="l" defTabSz="457200" rtl="0" eaLnBrk="1" latinLnBrk="0" hangingPunct="1">
+      <a:lvl7pPr marL="2743200" algn="l" defTabSz="457200" rtl="0" eaLnBrk="1" latinLnBrk="1" hangingPunct="1">
         <a:defRPr sz="1800" kern="1200">
           <a:solidFill>
             <a:schemeClr val="tx1"/>
@@ -3063,7 +5428,7 @@
           <a:cs typeface="+mn-cs"/>
         </a:defRPr>
       </a:lvl7pPr>
-      <a:lvl8pPr marL="3200400" algn="l" defTabSz="457200" rtl="0" eaLnBrk="1" latinLnBrk="0" hangingPunct="1">
+      <a:lvl8pPr marL="3200400" algn="l" defTabSz="457200" rtl="0" eaLnBrk="1" latinLnBrk="1" hangingPunct="1">
         <a:defRPr sz="1800" kern="1200">
           <a:solidFill>
             <a:schemeClr val="tx1"/>
@@ -3073,7 +5438,7 @@
           <a:cs typeface="+mn-cs"/>
         </a:defRPr>
       </a:lvl8pPr>
-      <a:lvl9pPr marL="3657600" algn="l" defTabSz="457200" rtl="0" eaLnBrk="1" latinLnBrk="0" hangingPunct="1">
+      <a:lvl9pPr marL="3657600" algn="l" defTabSz="457200" rtl="0" eaLnBrk="1" latinLnBrk="1" hangingPunct="1">
         <a:defRPr sz="1800" kern="1200">
           <a:solidFill>
             <a:schemeClr val="tx1"/>
@@ -3089,7 +5454,7 @@
 </file>
 
 <file path=ppt/slides/slide1.xml><?xml version="1.0" encoding="utf-8"?>
-<p:sld xmlns:a="http://schemas.openxmlformats.org/drawingml/2006/main" xmlns:p="http://schemas.openxmlformats.org/presentationml/2006/main" xmlns:r="http://schemas.openxmlformats.org/officeDocument/2006/relationships">
+<p:sld xmlns:a="http://schemas.openxmlformats.org/drawingml/2006/main" xmlns:r="http://schemas.openxmlformats.org/officeDocument/2006/relationships" xmlns:p="http://schemas.openxmlformats.org/presentationml/2006/main">
   <p:cSld>
     <p:bg>
       <p:bgPr>
@@ -3105,7 +5470,14 @@
         <p:cNvGrpSpPr/>
         <p:nvPr/>
       </p:nvGrpSpPr>
-      <p:grpSpPr/>
+      <p:grpSpPr>
+        <a:xfrm>
+          <a:off x="0" y="0"/>
+          <a:ext cx="0" cy="0"/>
+          <a:chOff x="0" y="0"/>
+          <a:chExt cx="0" cy="0"/>
+        </a:xfrm>
+      </p:grpSpPr>
       <p:sp>
         <p:nvSpPr>
           <p:cNvPr id="2" name="TextBox 1"/>
@@ -3114,8 +5486,8 @@
         </p:nvSpPr>
         <p:spPr>
           <a:xfrm>
-            <a:off x="457200" y="2286000"/>
-            <a:ext cx="8229600" cy="1371600"/>
+            <a:off x="2822963" y="5097293"/>
+            <a:ext cx="3498073" cy="523220"/>
           </a:xfrm>
           <a:prstGeom prst="rect">
             <a:avLst/>
@@ -3136,8 +5508,18 @@
               </a:defRPr>
             </a:pPr>
             <a:r>
-              <a:t>경주 근화여자중학교</a:t>
-            </a:r>
+              <a:rPr sz="2800" dirty="0" err="1"/>
+              <a:t>경주</a:t>
+            </a:r>
+            <a:r>
+              <a:rPr sz="2800" dirty="0"/>
+              <a:t> </a:t>
+            </a:r>
+            <a:r>
+              <a:rPr sz="2800" dirty="0" err="1"/>
+              <a:t>근화여자중학교</a:t>
+            </a:r>
+            <a:endParaRPr sz="2800" dirty="0"/>
           </a:p>
         </p:txBody>
       </p:sp>
@@ -3149,8 +5531,8 @@
         </p:nvSpPr>
         <p:spPr>
           <a:xfrm>
-            <a:off x="457200" y="3840480"/>
-            <a:ext cx="8229600" cy="731520"/>
+            <a:off x="509829" y="2699553"/>
+            <a:ext cx="8124339" cy="830997"/>
           </a:xfrm>
           <a:prstGeom prst="rect">
             <a:avLst/>
@@ -3171,8 +5553,30 @@
               </a:defRPr>
             </a:pPr>
             <a:r>
-              <a:t>1,2학년 겨울방학 자기주도학습 프로그램 제안서</a:t>
-            </a:r>
+              <a:rPr sz="4400" dirty="0" err="1"/>
+              <a:t>자기주도학습</a:t>
+            </a:r>
+            <a:r>
+              <a:rPr lang="en-US" sz="4400" dirty="0"/>
+              <a:t> </a:t>
+            </a:r>
+            <a:r>
+              <a:rPr lang="en-US" sz="4800" dirty="0"/>
+              <a:t>UP!</a:t>
+            </a:r>
+            <a:r>
+              <a:rPr lang="ko-KR" altLang="en-US" sz="4400" dirty="0" err="1"/>
+              <a:t>첼린지</a:t>
+            </a:r>
+            <a:r>
+              <a:rPr sz="4400" dirty="0"/>
+              <a:t> </a:t>
+            </a:r>
+            <a:r>
+              <a:rPr sz="4400" dirty="0" err="1"/>
+              <a:t>제안서</a:t>
+            </a:r>
+            <a:endParaRPr sz="4400" dirty="0"/>
           </a:p>
         </p:txBody>
       </p:sp>
@@ -3185,310 +5589,7 @@
 </file>
 
 <file path=ppt/slides/slide10.xml><?xml version="1.0" encoding="utf-8"?>
-<p:sld xmlns:a="http://schemas.openxmlformats.org/drawingml/2006/main" xmlns:p="http://schemas.openxmlformats.org/presentationml/2006/main" xmlns:r="http://schemas.openxmlformats.org/officeDocument/2006/relationships">
-  <p:cSld>
-    <p:bg>
-      <p:bgPr>
-        <a:solidFill>
-          <a:srgbClr val="F3E5F5"/>
-        </a:solidFill>
-        <a:effectLst/>
-      </p:bgPr>
-    </p:bg>
-    <p:spTree>
-      <p:nvGrpSpPr>
-        <p:cNvPr id="1" name=""/>
-        <p:cNvGrpSpPr/>
-        <p:nvPr/>
-      </p:nvGrpSpPr>
-      <p:grpSpPr/>
-      <p:sp>
-        <p:nvSpPr>
-          <p:cNvPr id="2" name="TextBox 1"/>
-          <p:cNvSpPr txBox="1"/>
-          <p:nvPr/>
-        </p:nvSpPr>
-        <p:spPr>
-          <a:xfrm>
-            <a:off x="914400" y="1371600"/>
-            <a:ext cx="7315200" cy="914400"/>
-          </a:xfrm>
-          <a:prstGeom prst="rect">
-            <a:avLst/>
-          </a:prstGeom>
-          <a:noFill/>
-        </p:spPr>
-        <p:txBody>
-          <a:bodyPr wrap="none">
-            <a:spAutoFit/>
-          </a:bodyPr>
-          <a:lstStyle/>
-          <a:p>
-            <a:pPr algn="ctr">
-              <a:defRPr sz="4800" b="1">
-                <a:solidFill>
-                  <a:srgbClr val="7B1FA2"/>
-                </a:solidFill>
-              </a:defRPr>
-            </a:pPr>
-            <a:r>
-              <a:t>📞 문의 및 상담</a:t>
-            </a:r>
-          </a:p>
-        </p:txBody>
-      </p:sp>
-      <p:sp>
-        <p:nvSpPr>
-          <p:cNvPr id="3" name="TextBox 2"/>
-          <p:cNvSpPr txBox="1"/>
-          <p:nvPr/>
-        </p:nvSpPr>
-        <p:spPr>
-          <a:xfrm>
-            <a:off x="1828800" y="2743200"/>
-            <a:ext cx="5486400" cy="365760"/>
-          </a:xfrm>
-          <a:prstGeom prst="rect">
-            <a:avLst/>
-          </a:prstGeom>
-          <a:noFill/>
-        </p:spPr>
-        <p:txBody>
-          <a:bodyPr wrap="none">
-            <a:spAutoFit/>
-          </a:bodyPr>
-          <a:lstStyle/>
-          <a:p>
-            <a:pPr algn="ctr">
-              <a:defRPr sz="2200">
-                <a:solidFill>
-                  <a:srgbClr val="333333"/>
-                </a:solidFill>
-              </a:defRPr>
-            </a:pPr>
-            <a:r>
-              <a:t>📱 전화: 010-2657-3481</a:t>
-            </a:r>
-          </a:p>
-        </p:txBody>
-      </p:sp>
-      <p:sp>
-        <p:nvSpPr>
-          <p:cNvPr id="4" name="TextBox 3"/>
-          <p:cNvSpPr txBox="1"/>
-          <p:nvPr/>
-        </p:nvSpPr>
-        <p:spPr>
-          <a:xfrm>
-            <a:off x="1828800" y="3154680"/>
-            <a:ext cx="5486400" cy="365760"/>
-          </a:xfrm>
-          <a:prstGeom prst="rect">
-            <a:avLst/>
-          </a:prstGeom>
-          <a:noFill/>
-        </p:spPr>
-        <p:txBody>
-          <a:bodyPr wrap="none">
-            <a:spAutoFit/>
-          </a:bodyPr>
-          <a:lstStyle/>
-          <a:p>
-            <a:pPr algn="ctr">
-              <a:defRPr sz="2200">
-                <a:solidFill>
-                  <a:srgbClr val="333333"/>
-                </a:solidFill>
-              </a:defRPr>
-            </a:pPr>
-            <a:r>
-              <a:t>👤 담당자: 정라미</a:t>
-            </a:r>
-          </a:p>
-        </p:txBody>
-      </p:sp>
-      <p:sp>
-        <p:nvSpPr>
-          <p:cNvPr id="5" name="TextBox 4"/>
-          <p:cNvSpPr txBox="1"/>
-          <p:nvPr/>
-        </p:nvSpPr>
-        <p:spPr>
-          <a:xfrm>
-            <a:off x="1828800" y="3566160"/>
-            <a:ext cx="5486400" cy="365760"/>
-          </a:xfrm>
-          <a:prstGeom prst="rect">
-            <a:avLst/>
-          </a:prstGeom>
-          <a:noFill/>
-        </p:spPr>
-        <p:txBody>
-          <a:bodyPr wrap="none">
-            <a:spAutoFit/>
-          </a:bodyPr>
-          <a:lstStyle/>
-          <a:p>
-            <a:pPr algn="ctr">
-              <a:defRPr sz="2200">
-                <a:solidFill>
-                  <a:srgbClr val="333333"/>
-                </a:solidFill>
-              </a:defRPr>
-            </a:pPr>
-            <a:r>
-              <a:t>🏫 제안 대상: 경주 근화여자중학교</a:t>
-            </a:r>
-          </a:p>
-        </p:txBody>
-      </p:sp>
-      <p:sp>
-        <p:nvSpPr>
-          <p:cNvPr id="6" name="TextBox 5"/>
-          <p:cNvSpPr txBox="1"/>
-          <p:nvPr/>
-        </p:nvSpPr>
-        <p:spPr>
-          <a:xfrm>
-            <a:off x="1828800" y="3977639"/>
-            <a:ext cx="5486400" cy="365760"/>
-          </a:xfrm>
-          <a:prstGeom prst="rect">
-            <a:avLst/>
-          </a:prstGeom>
-          <a:noFill/>
-        </p:spPr>
-        <p:txBody>
-          <a:bodyPr wrap="none">
-            <a:spAutoFit/>
-          </a:bodyPr>
-          <a:lstStyle/>
-          <a:p>
-            <a:pPr algn="ctr">
-              <a:defRPr sz="2200">
-                <a:solidFill>
-                  <a:srgbClr val="333333"/>
-                </a:solidFill>
-              </a:defRPr>
-            </a:pPr>
-            <a:r>
-              <a:t>📚 프로그램: 1,2학년 겨울방학 자기주도학습</a:t>
-            </a:r>
-          </a:p>
-        </p:txBody>
-      </p:sp>
-      <p:sp>
-        <p:nvSpPr>
-          <p:cNvPr id="7" name="TextBox 6"/>
-          <p:cNvSpPr txBox="1"/>
-          <p:nvPr/>
-        </p:nvSpPr>
-        <p:spPr>
-          <a:xfrm>
-            <a:off x="1828800" y="4389120"/>
-            <a:ext cx="5486400" cy="365760"/>
-          </a:xfrm>
-          <a:prstGeom prst="rect">
-            <a:avLst/>
-          </a:prstGeom>
-          <a:noFill/>
-        </p:spPr>
-        <p:txBody>
-          <a:bodyPr wrap="none">
-            <a:spAutoFit/>
-          </a:bodyPr>
-          <a:lstStyle/>
-          <a:p>
-            <a:pPr algn="ctr">
-              <a:defRPr sz="1200">
-                <a:solidFill>
-                  <a:srgbClr val="333333"/>
-                </a:solidFill>
-              </a:defRPr>
-            </a:pPr>
-          </a:p>
-        </p:txBody>
-      </p:sp>
-      <p:sp>
-        <p:nvSpPr>
-          <p:cNvPr id="8" name="TextBox 7"/>
-          <p:cNvSpPr txBox="1"/>
-          <p:nvPr/>
-        </p:nvSpPr>
-        <p:spPr>
-          <a:xfrm>
-            <a:off x="1828800" y="4800600"/>
-            <a:ext cx="5486400" cy="365760"/>
-          </a:xfrm>
-          <a:prstGeom prst="rect">
-            <a:avLst/>
-          </a:prstGeom>
-          <a:noFill/>
-        </p:spPr>
-        <p:txBody>
-          <a:bodyPr wrap="none">
-            <a:spAutoFit/>
-          </a:bodyPr>
-          <a:lstStyle/>
-          <a:p>
-            <a:pPr algn="ctr">
-              <a:defRPr sz="2200">
-                <a:solidFill>
-                  <a:srgbClr val="333333"/>
-                </a:solidFill>
-              </a:defRPr>
-            </a:pPr>
-            <a:r>
-              <a:t>💡 학교 맞춤형 프로그램 운영</a:t>
-            </a:r>
-          </a:p>
-        </p:txBody>
-      </p:sp>
-      <p:sp>
-        <p:nvSpPr>
-          <p:cNvPr id="9" name="TextBox 8"/>
-          <p:cNvSpPr txBox="1"/>
-          <p:nvPr/>
-        </p:nvSpPr>
-        <p:spPr>
-          <a:xfrm>
-            <a:off x="1828800" y="5212080"/>
-            <a:ext cx="5486400" cy="365760"/>
-          </a:xfrm>
-          <a:prstGeom prst="rect">
-            <a:avLst/>
-          </a:prstGeom>
-          <a:noFill/>
-        </p:spPr>
-        <p:txBody>
-          <a:bodyPr wrap="none">
-            <a:spAutoFit/>
-          </a:bodyPr>
-          <a:lstStyle/>
-          <a:p>
-            <a:pPr algn="ctr">
-              <a:defRPr sz="2200">
-                <a:solidFill>
-                  <a:srgbClr val="333333"/>
-                </a:solidFill>
-              </a:defRPr>
-            </a:pPr>
-            <a:r>
-              <a:t>💡 체계적인 학습관리 시스템</a:t>
-            </a:r>
-          </a:p>
-        </p:txBody>
-      </p:sp>
-    </p:spTree>
-  </p:cSld>
-  <p:clrMapOvr>
-    <a:masterClrMapping/>
-  </p:clrMapOvr>
-</p:sld>
-</file>
-
-<file path=ppt/slides/slide11.xml><?xml version="1.0" encoding="utf-8"?>
-<p:sld xmlns:a="http://schemas.openxmlformats.org/drawingml/2006/main" xmlns:p="http://schemas.openxmlformats.org/presentationml/2006/main" xmlns:r="http://schemas.openxmlformats.org/officeDocument/2006/relationships">
+<p:sld xmlns:a="http://schemas.openxmlformats.org/drawingml/2006/main" xmlns:r="http://schemas.openxmlformats.org/officeDocument/2006/relationships" xmlns:p="http://schemas.openxmlformats.org/presentationml/2006/main">
   <p:cSld>
     <p:bg>
       <p:bgPr>
@@ -3504,7 +5605,14 @@
         <p:cNvGrpSpPr/>
         <p:nvPr/>
       </p:nvGrpSpPr>
-      <p:grpSpPr/>
+      <p:grpSpPr>
+        <a:xfrm>
+          <a:off x="0" y="0"/>
+          <a:ext cx="0" cy="0"/>
+          <a:chOff x="0" y="0"/>
+          <a:chExt cx="0" cy="0"/>
+        </a:xfrm>
+      </p:grpSpPr>
       <p:sp>
         <p:nvSpPr>
           <p:cNvPr id="2" name="TextBox 1"/>
@@ -3513,7 +5621,7 @@
         </p:nvSpPr>
         <p:spPr>
           <a:xfrm>
-            <a:off x="457200" y="2286000"/>
+            <a:off x="457200" y="1331722"/>
             <a:ext cx="8229600" cy="1371600"/>
           </a:xfrm>
           <a:prstGeom prst="rect">
@@ -3535,8 +5643,10 @@
               </a:defRPr>
             </a:pPr>
             <a:r>
+              <a:rPr dirty="0" err="1"/>
               <a:t>감사합니다</a:t>
             </a:r>
+            <a:endParaRPr dirty="0"/>
           </a:p>
         </p:txBody>
       </p:sp>
@@ -3548,7 +5658,7 @@
         </p:nvSpPr>
         <p:spPr>
           <a:xfrm>
-            <a:off x="457200" y="3840480"/>
+            <a:off x="457200" y="2374025"/>
             <a:ext cx="8229600" cy="731520"/>
           </a:xfrm>
           <a:prstGeom prst="rect">
@@ -3570,7 +5680,300 @@
               </a:defRPr>
             </a:pPr>
             <a:r>
-              <a:t>근화여자중학교 학생들의 성장을 함께 만들어가겠습니다</a:t>
+              <a:rPr dirty="0" err="1"/>
+              <a:t>근화여자중학교</a:t>
+            </a:r>
+            <a:r>
+              <a:rPr dirty="0"/>
+              <a:t> </a:t>
+            </a:r>
+            <a:r>
+              <a:rPr dirty="0" err="1"/>
+              <a:t>학생들의</a:t>
+            </a:r>
+            <a:r>
+              <a:rPr dirty="0"/>
+              <a:t> </a:t>
+            </a:r>
+            <a:r>
+              <a:rPr dirty="0" err="1"/>
+              <a:t>성장을</a:t>
+            </a:r>
+            <a:r>
+              <a:rPr dirty="0"/>
+              <a:t> </a:t>
+            </a:r>
+            <a:r>
+              <a:rPr dirty="0" err="1"/>
+              <a:t>함께</a:t>
+            </a:r>
+            <a:r>
+              <a:rPr dirty="0"/>
+              <a:t> </a:t>
+            </a:r>
+            <a:r>
+              <a:rPr dirty="0" err="1"/>
+              <a:t>만들어가겠습니다</a:t>
+            </a:r>
+            <a:endParaRPr dirty="0"/>
+          </a:p>
+        </p:txBody>
+      </p:sp>
+      <p:sp>
+        <p:nvSpPr>
+          <p:cNvPr id="4" name="TextBox 3">
+            <a:extLst>
+              <a:ext uri="{FF2B5EF4-FFF2-40B4-BE49-F238E27FC236}">
+                <a16:creationId xmlns:a16="http://schemas.microsoft.com/office/drawing/2014/main" id="{57DFAAA9-57D8-04B9-E2D8-98ABA46F47D0}"/>
+              </a:ext>
+            </a:extLst>
+          </p:cNvPr>
+          <p:cNvSpPr txBox="1"/>
+          <p:nvPr/>
+        </p:nvSpPr>
+        <p:spPr>
+          <a:xfrm>
+            <a:off x="826851" y="4571039"/>
+            <a:ext cx="7315200" cy="338554"/>
+          </a:xfrm>
+          <a:prstGeom prst="rect">
+            <a:avLst/>
+          </a:prstGeom>
+          <a:noFill/>
+        </p:spPr>
+        <p:txBody>
+          <a:bodyPr wrap="square">
+            <a:spAutoFit/>
+          </a:bodyPr>
+          <a:lstStyle/>
+          <a:p>
+            <a:pPr algn="ctr">
+              <a:defRPr sz="4800" b="1">
+                <a:solidFill>
+                  <a:srgbClr val="7B1FA2"/>
+                </a:solidFill>
+              </a:defRPr>
+            </a:pPr>
+            <a:r>
+              <a:rPr sz="1600" dirty="0">
+                <a:solidFill>
+                  <a:srgbClr val="FFFF00"/>
+                </a:solidFill>
+              </a:rPr>
+              <a:t>📞 </a:t>
+            </a:r>
+            <a:r>
+              <a:rPr sz="1600" dirty="0" err="1">
+                <a:solidFill>
+                  <a:srgbClr val="FFFF00"/>
+                </a:solidFill>
+              </a:rPr>
+              <a:t>문의</a:t>
+            </a:r>
+            <a:r>
+              <a:rPr sz="1600" dirty="0">
+                <a:solidFill>
+                  <a:srgbClr val="FFFF00"/>
+                </a:solidFill>
+              </a:rPr>
+              <a:t> 및 </a:t>
+            </a:r>
+            <a:r>
+              <a:rPr sz="1600" dirty="0" err="1">
+                <a:solidFill>
+                  <a:srgbClr val="FFFF00"/>
+                </a:solidFill>
+              </a:rPr>
+              <a:t>상담</a:t>
+            </a:r>
+            <a:endParaRPr sz="1600" dirty="0">
+              <a:solidFill>
+                <a:srgbClr val="FFFF00"/>
+              </a:solidFill>
+            </a:endParaRPr>
+          </a:p>
+        </p:txBody>
+      </p:sp>
+      <p:sp>
+        <p:nvSpPr>
+          <p:cNvPr id="5" name="TextBox 4">
+            <a:extLst>
+              <a:ext uri="{FF2B5EF4-FFF2-40B4-BE49-F238E27FC236}">
+                <a16:creationId xmlns:a16="http://schemas.microsoft.com/office/drawing/2014/main" id="{F815B3BD-6083-D5AF-BB26-C2C6DAC91635}"/>
+              </a:ext>
+            </a:extLst>
+          </p:cNvPr>
+          <p:cNvSpPr txBox="1"/>
+          <p:nvPr/>
+        </p:nvSpPr>
+        <p:spPr>
+          <a:xfrm>
+            <a:off x="1828800" y="4946056"/>
+            <a:ext cx="5486400" cy="338554"/>
+          </a:xfrm>
+          <a:prstGeom prst="rect">
+            <a:avLst/>
+          </a:prstGeom>
+          <a:noFill/>
+        </p:spPr>
+        <p:txBody>
+          <a:bodyPr wrap="square">
+            <a:spAutoFit/>
+          </a:bodyPr>
+          <a:lstStyle/>
+          <a:p>
+            <a:pPr algn="ctr">
+              <a:defRPr sz="2200">
+                <a:solidFill>
+                  <a:srgbClr val="333333"/>
+                </a:solidFill>
+              </a:defRPr>
+            </a:pPr>
+            <a:r>
+              <a:rPr sz="1600" dirty="0"/>
+              <a:t>📱 </a:t>
+            </a:r>
+            <a:r>
+              <a:rPr sz="1600" dirty="0" err="1"/>
+              <a:t>전화</a:t>
+            </a:r>
+            <a:r>
+              <a:rPr sz="1600" dirty="0"/>
+              <a:t>: 010-2657-3481</a:t>
+            </a:r>
+          </a:p>
+        </p:txBody>
+      </p:sp>
+      <p:sp>
+        <p:nvSpPr>
+          <p:cNvPr id="6" name="TextBox 5">
+            <a:extLst>
+              <a:ext uri="{FF2B5EF4-FFF2-40B4-BE49-F238E27FC236}">
+                <a16:creationId xmlns:a16="http://schemas.microsoft.com/office/drawing/2014/main" id="{225DCEDC-BD8E-97C3-7E88-491EDA3B0C31}"/>
+              </a:ext>
+            </a:extLst>
+          </p:cNvPr>
+          <p:cNvSpPr txBox="1"/>
+          <p:nvPr/>
+        </p:nvSpPr>
+        <p:spPr>
+          <a:xfrm>
+            <a:off x="1828800" y="5403486"/>
+            <a:ext cx="5486400" cy="338554"/>
+          </a:xfrm>
+          <a:prstGeom prst="rect">
+            <a:avLst/>
+          </a:prstGeom>
+          <a:noFill/>
+        </p:spPr>
+        <p:txBody>
+          <a:bodyPr wrap="square">
+            <a:spAutoFit/>
+          </a:bodyPr>
+          <a:lstStyle/>
+          <a:p>
+            <a:pPr algn="ctr">
+              <a:defRPr sz="2200">
+                <a:solidFill>
+                  <a:srgbClr val="333333"/>
+                </a:solidFill>
+              </a:defRPr>
+            </a:pPr>
+            <a:r>
+              <a:rPr sz="1600" dirty="0"/>
+              <a:t>👤 </a:t>
+            </a:r>
+            <a:r>
+              <a:rPr sz="1600" dirty="0" err="1"/>
+              <a:t>담당자</a:t>
+            </a:r>
+            <a:r>
+              <a:rPr sz="1600" dirty="0"/>
+              <a:t>: 정라미</a:t>
+            </a:r>
+          </a:p>
+        </p:txBody>
+      </p:sp>
+      <p:sp>
+        <p:nvSpPr>
+          <p:cNvPr id="7" name="TextBox 6">
+            <a:extLst>
+              <a:ext uri="{FF2B5EF4-FFF2-40B4-BE49-F238E27FC236}">
+                <a16:creationId xmlns:a16="http://schemas.microsoft.com/office/drawing/2014/main" id="{5F65AE14-6D15-55F7-CC56-382DF0D28837}"/>
+              </a:ext>
+            </a:extLst>
+          </p:cNvPr>
+          <p:cNvSpPr txBox="1"/>
+          <p:nvPr/>
+        </p:nvSpPr>
+        <p:spPr>
+          <a:xfrm>
+            <a:off x="1828800" y="5860916"/>
+            <a:ext cx="5486400" cy="338554"/>
+          </a:xfrm>
+          <a:prstGeom prst="rect">
+            <a:avLst/>
+          </a:prstGeom>
+          <a:noFill/>
+        </p:spPr>
+        <p:txBody>
+          <a:bodyPr wrap="square">
+            <a:spAutoFit/>
+          </a:bodyPr>
+          <a:lstStyle/>
+          <a:p>
+            <a:pPr algn="ctr">
+              <a:defRPr sz="2200">
+                <a:solidFill>
+                  <a:srgbClr val="333333"/>
+                </a:solidFill>
+              </a:defRPr>
+            </a:pPr>
+            <a:r>
+              <a:rPr sz="1600"/>
+              <a:t>💡 학교 맞춤형 프로그램 운영</a:t>
+            </a:r>
+          </a:p>
+        </p:txBody>
+      </p:sp>
+      <p:sp>
+        <p:nvSpPr>
+          <p:cNvPr id="8" name="TextBox 7">
+            <a:extLst>
+              <a:ext uri="{FF2B5EF4-FFF2-40B4-BE49-F238E27FC236}">
+                <a16:creationId xmlns:a16="http://schemas.microsoft.com/office/drawing/2014/main" id="{1FFC8DBC-62BB-E78A-79D2-48B6B5FF2D4A}"/>
+              </a:ext>
+            </a:extLst>
+          </p:cNvPr>
+          <p:cNvSpPr txBox="1"/>
+          <p:nvPr/>
+        </p:nvSpPr>
+        <p:spPr>
+          <a:xfrm>
+            <a:off x="1828800" y="6272396"/>
+            <a:ext cx="5486400" cy="338554"/>
+          </a:xfrm>
+          <a:prstGeom prst="rect">
+            <a:avLst/>
+          </a:prstGeom>
+          <a:noFill/>
+        </p:spPr>
+        <p:txBody>
+          <a:bodyPr wrap="square">
+            <a:spAutoFit/>
+          </a:bodyPr>
+          <a:lstStyle/>
+          <a:p>
+            <a:pPr algn="ctr">
+              <a:defRPr sz="2200">
+                <a:solidFill>
+                  <a:srgbClr val="333333"/>
+                </a:solidFill>
+              </a:defRPr>
+            </a:pPr>
+            <a:r>
+              <a:rPr sz="1600"/>
+              <a:t>💡 체계적인 학습관리 시스템</a:t>
             </a:r>
           </a:p>
         </p:txBody>
@@ -3584,7 +5987,7 @@
 </file>
 
 <file path=ppt/slides/slide2.xml><?xml version="1.0" encoding="utf-8"?>
-<p:sld xmlns:a="http://schemas.openxmlformats.org/drawingml/2006/main" xmlns:p="http://schemas.openxmlformats.org/presentationml/2006/main" xmlns:r="http://schemas.openxmlformats.org/officeDocument/2006/relationships">
+<p:sld xmlns:a="http://schemas.openxmlformats.org/drawingml/2006/main" xmlns:r="http://schemas.openxmlformats.org/officeDocument/2006/relationships" xmlns:p="http://schemas.openxmlformats.org/presentationml/2006/main">
   <p:cSld>
     <p:bg>
       <p:bgPr>
@@ -3600,7 +6003,14 @@
         <p:cNvGrpSpPr/>
         <p:nvPr/>
       </p:nvGrpSpPr>
-      <p:grpSpPr/>
+      <p:grpSpPr>
+        <a:xfrm>
+          <a:off x="0" y="0"/>
+          <a:ext cx="0" cy="0"/>
+          <a:chOff x="0" y="0"/>
+          <a:chExt cx="0" cy="0"/>
+        </a:xfrm>
+      </p:grpSpPr>
       <p:sp>
         <p:nvSpPr>
           <p:cNvPr id="2" name="Rectangle 1"/>
@@ -3650,8 +6060,22 @@
               </a:defRPr>
             </a:pPr>
             <a:r>
-              <a:t>📋 제안 개요</a:t>
-            </a:r>
+              <a:rPr dirty="0"/>
+              <a:t>📋 </a:t>
+            </a:r>
+            <a:r>
+              <a:rPr dirty="0" err="1"/>
+              <a:t>제안</a:t>
+            </a:r>
+            <a:r>
+              <a:rPr dirty="0"/>
+              <a:t> </a:t>
+            </a:r>
+            <a:r>
+              <a:rPr dirty="0" err="1"/>
+              <a:t>개요</a:t>
+            </a:r>
+            <a:endParaRPr dirty="0"/>
           </a:p>
         </p:txBody>
       </p:sp>
@@ -3664,7 +6088,7 @@
         <p:spPr>
           <a:xfrm>
             <a:off x="731520" y="1645920"/>
-            <a:ext cx="7680960" cy="548640"/>
+            <a:ext cx="5065810" cy="400110"/>
           </a:xfrm>
           <a:prstGeom prst="rect">
             <a:avLst/>
@@ -3685,6 +6109,7 @@
               </a:defRPr>
             </a:pPr>
             <a:r>
+              <a:rPr sz="2000"/>
               <a:t>🏫 대상: 경주 근화여자중학교 1학년, 2학년</a:t>
             </a:r>
           </a:p>
@@ -3699,7 +6124,7 @@
         <p:spPr>
           <a:xfrm>
             <a:off x="731520" y="2286000"/>
-            <a:ext cx="7680960" cy="548640"/>
+            <a:ext cx="4488729" cy="400110"/>
           </a:xfrm>
           <a:prstGeom prst="rect">
             <a:avLst/>
@@ -3720,6 +6145,7 @@
               </a:defRPr>
             </a:pPr>
             <a:r>
+              <a:rPr sz="2000"/>
               <a:t>❄️ 기간: 겨울방학 30일 집중 프로그램</a:t>
             </a:r>
           </a:p>
@@ -3734,7 +6160,7 @@
         <p:spPr>
           <a:xfrm>
             <a:off x="731520" y="2926080"/>
-            <a:ext cx="7680960" cy="548640"/>
+            <a:ext cx="6197530" cy="400110"/>
           </a:xfrm>
           <a:prstGeom prst="rect">
             <a:avLst/>
@@ -3755,6 +6181,7 @@
               </a:defRPr>
             </a:pPr>
             <a:r>
+              <a:rPr sz="2000"/>
               <a:t>🎯 목표: 자기주도학습 능력 향상 및 학업 성취도 제고</a:t>
             </a:r>
           </a:p>
@@ -3769,7 +6196,7 @@
         <p:spPr>
           <a:xfrm>
             <a:off x="731520" y="3566159"/>
-            <a:ext cx="7680960" cy="548640"/>
+            <a:ext cx="4485523" cy="400110"/>
           </a:xfrm>
           <a:prstGeom prst="rect">
             <a:avLst/>
@@ -3790,6 +6217,7 @@
               </a:defRPr>
             </a:pPr>
             <a:r>
+              <a:rPr sz="2000"/>
               <a:t>👩‍🏫 방식: 학교 맞춤형 체계적 학습관리</a:t>
             </a:r>
           </a:p>
@@ -3804,7 +6232,7 @@
         <p:spPr>
           <a:xfrm>
             <a:off x="731520" y="4206240"/>
-            <a:ext cx="7680960" cy="548640"/>
+            <a:ext cx="4600940" cy="400110"/>
           </a:xfrm>
           <a:prstGeom prst="rect">
             <a:avLst/>
@@ -3825,6 +6253,7 @@
               </a:defRPr>
             </a:pPr>
             <a:r>
+              <a:rPr sz="2000"/>
               <a:t>📊 특징: 개인별 맞춤 지도 및 진도 관리</a:t>
             </a:r>
           </a:p>
@@ -3839,7 +6268,7 @@
         <p:spPr>
           <a:xfrm>
             <a:off x="731520" y="4846320"/>
-            <a:ext cx="7680960" cy="548640"/>
+            <a:ext cx="4742004" cy="400110"/>
           </a:xfrm>
           <a:prstGeom prst="rect">
             <a:avLst/>
@@ -3860,6 +6289,7 @@
               </a:defRPr>
             </a:pPr>
             <a:r>
+              <a:rPr sz="2000"/>
               <a:t>💻 시스템: 온라인 학습관리 플랫폼 제공</a:t>
             </a:r>
           </a:p>
@@ -3874,7 +6304,7 @@
 </file>
 
 <file path=ppt/slides/slide3.xml><?xml version="1.0" encoding="utf-8"?>
-<p:sld xmlns:a="http://schemas.openxmlformats.org/drawingml/2006/main" xmlns:p="http://schemas.openxmlformats.org/presentationml/2006/main" xmlns:r="http://schemas.openxmlformats.org/officeDocument/2006/relationships">
+<p:sld xmlns:a="http://schemas.openxmlformats.org/drawingml/2006/main" xmlns:r="http://schemas.openxmlformats.org/officeDocument/2006/relationships" xmlns:p="http://schemas.openxmlformats.org/presentationml/2006/main">
   <p:cSld>
     <p:bg>
       <p:bgPr>
@@ -3890,7 +6320,14 @@
         <p:cNvGrpSpPr/>
         <p:nvPr/>
       </p:nvGrpSpPr>
-      <p:grpSpPr/>
+      <p:grpSpPr>
+        <a:xfrm>
+          <a:off x="0" y="0"/>
+          <a:ext cx="0" cy="0"/>
+          <a:chOff x="0" y="0"/>
+          <a:chExt cx="0" cy="0"/>
+        </a:xfrm>
+      </p:grpSpPr>
       <p:sp>
         <p:nvSpPr>
           <p:cNvPr id="2" name="Rectangle 1"/>
@@ -3954,7 +6391,7 @@
         <p:spPr>
           <a:xfrm>
             <a:off x="731520" y="1645920"/>
-            <a:ext cx="7680960" cy="548640"/>
+            <a:ext cx="4628190" cy="400110"/>
           </a:xfrm>
           <a:prstGeom prst="rect">
             <a:avLst/>
@@ -3975,6 +6412,7 @@
               </a:defRPr>
             </a:pPr>
             <a:r>
+              <a:rPr sz="2000"/>
               <a:t>✓ 겨울방학 학습 공백 방지 및 학력 향상</a:t>
             </a:r>
           </a:p>
@@ -3989,7 +6427,7 @@
         <p:spPr>
           <a:xfrm>
             <a:off x="731520" y="2286000"/>
-            <a:ext cx="7680960" cy="548640"/>
+            <a:ext cx="4769254" cy="400110"/>
           </a:xfrm>
           <a:prstGeom prst="rect">
             <a:avLst/>
@@ -4010,6 +6448,7 @@
               </a:defRPr>
             </a:pPr>
             <a:r>
+              <a:rPr sz="2000"/>
               <a:t>✓ 자기주도학습 습관 형성의 중요한 시기</a:t>
             </a:r>
           </a:p>
@@ -4024,7 +6463,7 @@
         <p:spPr>
           <a:xfrm>
             <a:off x="731520" y="2926080"/>
-            <a:ext cx="7680960" cy="548640"/>
+            <a:ext cx="4512774" cy="400110"/>
           </a:xfrm>
           <a:prstGeom prst="rect">
             <a:avLst/>
@@ -4045,6 +6484,7 @@
               </a:defRPr>
             </a:pPr>
             <a:r>
+              <a:rPr sz="2000"/>
               <a:t>✓ 중학교 학습의 기초를 탄탄히 다지기</a:t>
             </a:r>
           </a:p>
@@ -4059,7 +6499,7 @@
         <p:spPr>
           <a:xfrm>
             <a:off x="731520" y="3566159"/>
-            <a:ext cx="7680960" cy="548640"/>
+            <a:ext cx="4512774" cy="400110"/>
           </a:xfrm>
           <a:prstGeom prst="rect">
             <a:avLst/>
@@ -4080,6 +6520,7 @@
               </a:defRPr>
             </a:pPr>
             <a:r>
+              <a:rPr sz="2000"/>
               <a:t>✓ 체계적인 학습관리를 통한 성적 향상</a:t>
             </a:r>
           </a:p>
@@ -4094,7 +6535,7 @@
         <p:spPr>
           <a:xfrm>
             <a:off x="731520" y="4206240"/>
-            <a:ext cx="7680960" cy="548640"/>
+            <a:ext cx="4826962" cy="400110"/>
           </a:xfrm>
           <a:prstGeom prst="rect">
             <a:avLst/>
@@ -4115,6 +6556,7 @@
               </a:defRPr>
             </a:pPr>
             <a:r>
+              <a:rPr sz="2000"/>
               <a:t>✓ 개인별 맞춤 교육으로 학습 효율 극대화</a:t>
             </a:r>
           </a:p>
@@ -4129,7 +6571,7 @@
         <p:spPr>
           <a:xfrm>
             <a:off x="731520" y="4846320"/>
-            <a:ext cx="7680960" cy="548640"/>
+            <a:ext cx="4115229" cy="400110"/>
           </a:xfrm>
           <a:prstGeom prst="rect">
             <a:avLst/>
@@ -4150,6 +6592,7 @@
               </a:defRPr>
             </a:pPr>
             <a:r>
+              <a:rPr sz="2000"/>
               <a:t>✓ 진로 탐색 및 목표 설정 기회 제공</a:t>
             </a:r>
           </a:p>
@@ -4164,7 +6607,7 @@
 </file>
 
 <file path=ppt/slides/slide4.xml><?xml version="1.0" encoding="utf-8"?>
-<p:sld xmlns:a="http://schemas.openxmlformats.org/drawingml/2006/main" xmlns:p="http://schemas.openxmlformats.org/presentationml/2006/main" xmlns:r="http://schemas.openxmlformats.org/officeDocument/2006/relationships">
+<p:sld xmlns:a="http://schemas.openxmlformats.org/drawingml/2006/main" xmlns:r="http://schemas.openxmlformats.org/officeDocument/2006/relationships" xmlns:p="http://schemas.openxmlformats.org/presentationml/2006/main">
   <p:cSld>
     <p:bg>
       <p:bgPr>
@@ -4180,7 +6623,14 @@
         <p:cNvGrpSpPr/>
         <p:nvPr/>
       </p:nvGrpSpPr>
-      <p:grpSpPr/>
+      <p:grpSpPr>
+        <a:xfrm>
+          <a:off x="0" y="0"/>
+          <a:ext cx="0" cy="0"/>
+          <a:chOff x="0" y="0"/>
+          <a:chExt cx="0" cy="0"/>
+        </a:xfrm>
+      </p:grpSpPr>
       <p:sp>
         <p:nvSpPr>
           <p:cNvPr id="2" name="Rectangle 1"/>
@@ -4244,7 +6694,7 @@
         <p:spPr>
           <a:xfrm>
             <a:off x="731520" y="1645920"/>
-            <a:ext cx="7680960" cy="548640"/>
+            <a:ext cx="4987263" cy="400110"/>
           </a:xfrm>
           <a:prstGeom prst="rect">
             <a:avLst/>
@@ -4265,6 +6715,7 @@
               </a:defRPr>
             </a:pPr>
             <a:r>
+              <a:rPr sz="2000"/>
               <a:t>🎯 여학생 특성을 고려한 맞춤형 학습 지도</a:t>
             </a:r>
           </a:p>
@@ -4279,7 +6730,7 @@
         <p:spPr>
           <a:xfrm>
             <a:off x="731520" y="2286000"/>
-            <a:ext cx="7680960" cy="548640"/>
+            <a:ext cx="4477508" cy="400110"/>
           </a:xfrm>
           <a:prstGeom prst="rect">
             <a:avLst/>
@@ -4300,6 +6751,7 @@
               </a:defRPr>
             </a:pPr>
             <a:r>
+              <a:rPr sz="2000"/>
               <a:t>📚 30일 집중 학습으로 학습 습관 완성</a:t>
             </a:r>
           </a:p>
@@ -4314,7 +6766,7 @@
         <p:spPr>
           <a:xfrm>
             <a:off x="731520" y="2926080"/>
-            <a:ext cx="7680960" cy="548640"/>
+            <a:ext cx="3975768" cy="400110"/>
           </a:xfrm>
           <a:prstGeom prst="rect">
             <a:avLst/>
@@ -4335,6 +6787,7 @@
               </a:defRPr>
             </a:pPr>
             <a:r>
+              <a:rPr sz="2000"/>
               <a:t>👩‍🏫 1:1 개인별 학습관리 및 피드백</a:t>
             </a:r>
           </a:p>
@@ -4349,7 +6802,7 @@
         <p:spPr>
           <a:xfrm>
             <a:off x="731520" y="3566159"/>
-            <a:ext cx="7680960" cy="548640"/>
+            <a:ext cx="4474302" cy="400110"/>
           </a:xfrm>
           <a:prstGeom prst="rect">
             <a:avLst/>
@@ -4370,6 +6823,7 @@
               </a:defRPr>
             </a:pPr>
             <a:r>
+              <a:rPr sz="2000"/>
               <a:t>📊 체계적인 진도 관리 및 성취도 평가</a:t>
             </a:r>
           </a:p>
@@ -4384,7 +6838,7 @@
         <p:spPr>
           <a:xfrm>
             <a:off x="731520" y="4206240"/>
-            <a:ext cx="7680960" cy="548640"/>
+            <a:ext cx="3845925" cy="400110"/>
           </a:xfrm>
           <a:prstGeom prst="rect">
             <a:avLst/>
@@ -4405,6 +6859,7 @@
               </a:defRPr>
             </a:pPr>
             <a:r>
+              <a:rPr sz="2000"/>
               <a:t>💻 온라인 학습관리 시스템 활용</a:t>
             </a:r>
           </a:p>
@@ -4419,7 +6874,7 @@
         <p:spPr>
           <a:xfrm>
             <a:off x="731520" y="4846320"/>
-            <a:ext cx="7680960" cy="548640"/>
+            <a:ext cx="3076483" cy="400110"/>
           </a:xfrm>
           <a:prstGeom prst="rect">
             <a:avLst/>
@@ -4440,8 +6895,38 @@
               </a:defRPr>
             </a:pPr>
             <a:r>
-              <a:t>📞 학부모 상담 및 정기 학습 리포트 제공</a:t>
-            </a:r>
+              <a:rPr sz="2000" dirty="0"/>
+              <a:t>📞 </a:t>
+            </a:r>
+            <a:r>
+              <a:rPr sz="2000" dirty="0" err="1"/>
+              <a:t>정기</a:t>
+            </a:r>
+            <a:r>
+              <a:rPr sz="2000" dirty="0"/>
+              <a:t> </a:t>
+            </a:r>
+            <a:r>
+              <a:rPr sz="2000" dirty="0" err="1"/>
+              <a:t>학습</a:t>
+            </a:r>
+            <a:r>
+              <a:rPr sz="2000" dirty="0"/>
+              <a:t> </a:t>
+            </a:r>
+            <a:r>
+              <a:rPr sz="2000" dirty="0" err="1"/>
+              <a:t>리포트</a:t>
+            </a:r>
+            <a:r>
+              <a:rPr sz="2000" dirty="0"/>
+              <a:t> </a:t>
+            </a:r>
+            <a:r>
+              <a:rPr sz="2000" dirty="0" err="1"/>
+              <a:t>제공</a:t>
+            </a:r>
+            <a:endParaRPr sz="2000" dirty="0"/>
           </a:p>
         </p:txBody>
       </p:sp>
@@ -4454,7 +6939,7 @@
         <p:spPr>
           <a:xfrm>
             <a:off x="731520" y="5486399"/>
-            <a:ext cx="7680960" cy="548640"/>
+            <a:ext cx="3704860" cy="400110"/>
           </a:xfrm>
           <a:prstGeom prst="rect">
             <a:avLst/>
@@ -4475,6 +6960,7 @@
               </a:defRPr>
             </a:pPr>
             <a:r>
+              <a:rPr sz="2000"/>
               <a:t>🎓 진로 탐색 및 학습 동기 부여</a:t>
             </a:r>
           </a:p>
@@ -4489,7 +6975,7 @@
 </file>
 
 <file path=ppt/slides/slide5.xml><?xml version="1.0" encoding="utf-8"?>
-<p:sld xmlns:a="http://schemas.openxmlformats.org/drawingml/2006/main" xmlns:p="http://schemas.openxmlformats.org/presentationml/2006/main" xmlns:r="http://schemas.openxmlformats.org/officeDocument/2006/relationships">
+<p:sld xmlns:a="http://schemas.openxmlformats.org/drawingml/2006/main" xmlns:r="http://schemas.openxmlformats.org/officeDocument/2006/relationships" xmlns:p="http://schemas.openxmlformats.org/presentationml/2006/main">
   <p:cSld>
     <p:bg>
       <p:bgPr>
@@ -4505,7 +6991,14 @@
         <p:cNvGrpSpPr/>
         <p:nvPr/>
       </p:nvGrpSpPr>
-      <p:grpSpPr/>
+      <p:grpSpPr>
+        <a:xfrm>
+          <a:off x="0" y="0"/>
+          <a:ext cx="0" cy="0"/>
+          <a:chOff x="0" y="0"/>
+          <a:chExt cx="0" cy="0"/>
+        </a:xfrm>
+      </p:grpSpPr>
       <p:sp>
         <p:nvSpPr>
           <p:cNvPr id="2" name="Rectangle 1"/>
@@ -4602,6 +7095,7 @@
           <a:lstStyle/>
           <a:p>
             <a:pPr algn="ctr"/>
+            <a:endParaRPr/>
           </a:p>
         </p:txBody>
       </p:sp>
@@ -4717,6 +7211,7 @@
           <a:lstStyle/>
           <a:p>
             <a:pPr algn="ctr"/>
+            <a:endParaRPr/>
           </a:p>
         </p:txBody>
       </p:sp>
@@ -4832,6 +7327,7 @@
           <a:lstStyle/>
           <a:p>
             <a:pPr algn="ctr"/>
+            <a:endParaRPr/>
           </a:p>
         </p:txBody>
       </p:sp>
@@ -4914,7 +7410,7 @@
 </file>
 
 <file path=ppt/slides/slide6.xml><?xml version="1.0" encoding="utf-8"?>
-<p:sld xmlns:a="http://schemas.openxmlformats.org/drawingml/2006/main" xmlns:p="http://schemas.openxmlformats.org/presentationml/2006/main" xmlns:r="http://schemas.openxmlformats.org/officeDocument/2006/relationships">
+<p:sld xmlns:a="http://schemas.openxmlformats.org/drawingml/2006/main" xmlns:r="http://schemas.openxmlformats.org/officeDocument/2006/relationships" xmlns:p="http://schemas.openxmlformats.org/presentationml/2006/main">
   <p:cSld>
     <p:bg>
       <p:bgPr>
@@ -4930,7 +7426,14 @@
         <p:cNvGrpSpPr/>
         <p:nvPr/>
       </p:nvGrpSpPr>
-      <p:grpSpPr/>
+      <p:grpSpPr>
+        <a:xfrm>
+          <a:off x="0" y="0"/>
+          <a:ext cx="0" cy="0"/>
+          <a:chOff x="0" y="0"/>
+          <a:chExt cx="0" cy="0"/>
+        </a:xfrm>
+      </p:grpSpPr>
       <p:sp>
         <p:nvSpPr>
           <p:cNvPr id="2" name="Rectangle 1"/>
@@ -5027,6 +7530,7 @@
           <a:lstStyle/>
           <a:p>
             <a:pPr algn="ctr"/>
+            <a:endParaRPr/>
           </a:p>
         </p:txBody>
       </p:sp>
@@ -5142,6 +7646,7 @@
           <a:lstStyle/>
           <a:p>
             <a:pPr algn="ctr"/>
+            <a:endParaRPr/>
           </a:p>
         </p:txBody>
       </p:sp>
@@ -5257,6 +7762,7 @@
           <a:lstStyle/>
           <a:p>
             <a:pPr algn="ctr"/>
+            <a:endParaRPr/>
           </a:p>
         </p:txBody>
       </p:sp>
@@ -5339,7 +7845,7 @@
 </file>
 
 <file path=ppt/slides/slide7.xml><?xml version="1.0" encoding="utf-8"?>
-<p:sld xmlns:a="http://schemas.openxmlformats.org/drawingml/2006/main" xmlns:p="http://schemas.openxmlformats.org/presentationml/2006/main" xmlns:r="http://schemas.openxmlformats.org/officeDocument/2006/relationships">
+<p:sld xmlns:a="http://schemas.openxmlformats.org/drawingml/2006/main" xmlns:r="http://schemas.openxmlformats.org/officeDocument/2006/relationships" xmlns:p="http://schemas.openxmlformats.org/presentationml/2006/main">
   <p:cSld>
     <p:bg>
       <p:bgPr>
@@ -5355,7 +7861,14 @@
         <p:cNvGrpSpPr/>
         <p:nvPr/>
       </p:nvGrpSpPr>
-      <p:grpSpPr/>
+      <p:grpSpPr>
+        <a:xfrm>
+          <a:off x="0" y="0"/>
+          <a:ext cx="0" cy="0"/>
+          <a:chOff x="0" y="0"/>
+          <a:chExt cx="0" cy="0"/>
+        </a:xfrm>
+      </p:grpSpPr>
       <p:sp>
         <p:nvSpPr>
           <p:cNvPr id="2" name="Rectangle 1"/>
@@ -5405,8 +7918,34 @@
               </a:defRPr>
             </a:pPr>
             <a:r>
-              <a:t>⚙️ 체계적인 학습관리 시스템</a:t>
-            </a:r>
+              <a:rPr dirty="0"/>
+              <a:t>⚙️ </a:t>
+            </a:r>
+            <a:r>
+              <a:rPr dirty="0" err="1"/>
+              <a:t>체계적인</a:t>
+            </a:r>
+            <a:r>
+              <a:rPr dirty="0"/>
+              <a:t> </a:t>
+            </a:r>
+            <a:r>
+              <a:rPr lang="en-US" sz="4800" dirty="0" err="1"/>
+              <a:t>AI</a:t>
+            </a:r>
+            <a:r>
+              <a:rPr dirty="0" err="1"/>
+              <a:t>학습관리</a:t>
+            </a:r>
+            <a:r>
+              <a:rPr dirty="0"/>
+              <a:t> </a:t>
+            </a:r>
+            <a:r>
+              <a:rPr dirty="0" err="1"/>
+              <a:t>시스템</a:t>
+            </a:r>
+            <a:endParaRPr dirty="0"/>
           </a:p>
         </p:txBody>
       </p:sp>
@@ -5419,7 +7958,7 @@
         <p:spPr>
           <a:xfrm>
             <a:off x="731520" y="1645920"/>
-            <a:ext cx="7680960" cy="548640"/>
+            <a:ext cx="4275529" cy="400110"/>
           </a:xfrm>
           <a:prstGeom prst="rect">
             <a:avLst/>
@@ -5440,6 +7979,7 @@
               </a:defRPr>
             </a:pPr>
             <a:r>
+              <a:rPr sz="2000"/>
               <a:t>📅 일일 학습 목표 설정 및 진도 체크</a:t>
             </a:r>
           </a:p>
@@ -5454,7 +7994,7 @@
         <p:spPr>
           <a:xfrm>
             <a:off x="731520" y="2286000"/>
-            <a:ext cx="7680960" cy="548640"/>
+            <a:ext cx="3704860" cy="400110"/>
           </a:xfrm>
           <a:prstGeom prst="rect">
             <a:avLst/>
@@ -5475,6 +8015,7 @@
               </a:defRPr>
             </a:pPr>
             <a:r>
+              <a:rPr sz="2000"/>
               <a:t>✍️ 학습 일지 작성 및 자기 점검</a:t>
             </a:r>
           </a:p>
@@ -5489,7 +8030,7 @@
         <p:spPr>
           <a:xfrm>
             <a:off x="731520" y="2926080"/>
-            <a:ext cx="7680960" cy="548640"/>
+            <a:ext cx="3961341" cy="400110"/>
           </a:xfrm>
           <a:prstGeom prst="rect">
             <a:avLst/>
@@ -5510,6 +8051,7 @@
               </a:defRPr>
             </a:pPr>
             <a:r>
+              <a:rPr sz="2000"/>
               <a:t>📊 주간 학습 평가 및 성취도 분석</a:t>
             </a:r>
           </a:p>
@@ -5524,7 +8066,7 @@
         <p:spPr>
           <a:xfrm>
             <a:off x="731520" y="3566159"/>
-            <a:ext cx="7680960" cy="548640"/>
+            <a:ext cx="3647152" cy="400110"/>
           </a:xfrm>
           <a:prstGeom prst="rect">
             <a:avLst/>
@@ -5545,6 +8087,7 @@
               </a:defRPr>
             </a:pPr>
             <a:r>
+              <a:rPr sz="2000"/>
               <a:t>👩‍🏫 개인별 학습 상담 및 피드백</a:t>
             </a:r>
           </a:p>
@@ -5559,7 +8102,7 @@
         <p:spPr>
           <a:xfrm>
             <a:off x="731520" y="4206240"/>
-            <a:ext cx="7680960" cy="548640"/>
+            <a:ext cx="4474302" cy="400110"/>
           </a:xfrm>
           <a:prstGeom prst="rect">
             <a:avLst/>
@@ -5580,8 +8123,42 @@
               </a:defRPr>
             </a:pPr>
             <a:r>
-              <a:t>📞 학부모 주간 리포트 및 정기 상담</a:t>
-            </a:r>
+              <a:rPr sz="2000" dirty="0"/>
+              <a:t>📞 </a:t>
+            </a:r>
+            <a:r>
+              <a:rPr sz="2000" dirty="0" err="1"/>
+              <a:t>학부모</a:t>
+            </a:r>
+            <a:r>
+              <a:rPr sz="2000" dirty="0"/>
+              <a:t> </a:t>
+            </a:r>
+            <a:r>
+              <a:rPr sz="2000" dirty="0" err="1"/>
+              <a:t>주간</a:t>
+            </a:r>
+            <a:r>
+              <a:rPr sz="2000" dirty="0"/>
+              <a:t> </a:t>
+            </a:r>
+            <a:r>
+              <a:rPr sz="2000" dirty="0" err="1"/>
+              <a:t>리포트</a:t>
+            </a:r>
+            <a:r>
+              <a:rPr sz="2000" dirty="0"/>
+              <a:t> 및 </a:t>
+            </a:r>
+            <a:r>
+              <a:rPr sz="2000" dirty="0" err="1"/>
+              <a:t>정기</a:t>
+            </a:r>
+            <a:r>
+              <a:rPr lang="ko-KR" altLang="en-US" sz="2000" dirty="0"/>
+              <a:t> 보고서</a:t>
+            </a:r>
+            <a:endParaRPr sz="2000" dirty="0"/>
           </a:p>
         </p:txBody>
       </p:sp>
@@ -5594,7 +8171,7 @@
         <p:spPr>
           <a:xfrm>
             <a:off x="731520" y="4846320"/>
-            <a:ext cx="7680960" cy="548640"/>
+            <a:ext cx="4160113" cy="400110"/>
           </a:xfrm>
           <a:prstGeom prst="rect">
             <a:avLst/>
@@ -5615,6 +8192,7 @@
               </a:defRPr>
             </a:pPr>
             <a:r>
+              <a:rPr sz="2000"/>
               <a:t>💻 온라인 플랫폼을 통한 학습 관리</a:t>
             </a:r>
           </a:p>
@@ -5629,7 +8207,7 @@
         <p:spPr>
           <a:xfrm>
             <a:off x="731520" y="5486399"/>
-            <a:ext cx="7680960" cy="548640"/>
+            <a:ext cx="3647152" cy="400110"/>
           </a:xfrm>
           <a:prstGeom prst="rect">
             <a:avLst/>
@@ -5650,6 +8228,7 @@
               </a:defRPr>
             </a:pPr>
             <a:r>
+              <a:rPr sz="2000"/>
               <a:t>📈 모의고사 및 실력 진단 평가</a:t>
             </a:r>
           </a:p>
@@ -5664,7 +8243,7 @@
 </file>
 
 <file path=ppt/slides/slide8.xml><?xml version="1.0" encoding="utf-8"?>
-<p:sld xmlns:a="http://schemas.openxmlformats.org/drawingml/2006/main" xmlns:p="http://schemas.openxmlformats.org/presentationml/2006/main" xmlns:r="http://schemas.openxmlformats.org/officeDocument/2006/relationships">
+<p:sld xmlns:a="http://schemas.openxmlformats.org/drawingml/2006/main" xmlns:r="http://schemas.openxmlformats.org/officeDocument/2006/relationships" xmlns:p="http://schemas.openxmlformats.org/presentationml/2006/main">
   <p:cSld>
     <p:bg>
       <p:bgPr>
@@ -5680,7 +8259,14 @@
         <p:cNvGrpSpPr/>
         <p:nvPr/>
       </p:nvGrpSpPr>
-      <p:grpSpPr/>
+      <p:grpSpPr>
+        <a:xfrm>
+          <a:off x="0" y="0"/>
+          <a:ext cx="0" cy="0"/>
+          <a:chOff x="0" y="0"/>
+          <a:chExt cx="0" cy="0"/>
+        </a:xfrm>
+      </p:grpSpPr>
       <p:sp>
         <p:nvSpPr>
           <p:cNvPr id="2" name="Rectangle 1"/>
@@ -5744,7 +8330,7 @@
         <p:spPr>
           <a:xfrm>
             <a:off x="731520" y="1645920"/>
-            <a:ext cx="7680960" cy="548640"/>
+            <a:ext cx="4891083" cy="400110"/>
           </a:xfrm>
           <a:prstGeom prst="rect">
             <a:avLst/>
@@ -5765,7 +8351,48 @@
               </a:defRPr>
             </a:pPr>
             <a:r>
-              <a:t>📅 운영 기간: 겨울방학 중 30일 (협의 후 확정)</a:t>
+              <a:rPr sz="2000" dirty="0"/>
+              <a:t>📅 </a:t>
+            </a:r>
+            <a:r>
+              <a:rPr sz="2000" dirty="0" err="1"/>
+              <a:t>운영</a:t>
+            </a:r>
+            <a:r>
+              <a:rPr sz="2000" dirty="0"/>
+              <a:t> </a:t>
+            </a:r>
+            <a:r>
+              <a:rPr sz="2000" dirty="0" err="1"/>
+              <a:t>기간</a:t>
+            </a:r>
+            <a:r>
+              <a:rPr sz="2000" dirty="0"/>
+              <a:t>: </a:t>
+            </a:r>
+            <a:r>
+              <a:rPr sz="2000" dirty="0" err="1"/>
+              <a:t>겨울방학</a:t>
+            </a:r>
+            <a:r>
+              <a:rPr sz="2000" dirty="0"/>
+              <a:t> 중 30일 (</a:t>
+            </a:r>
+            <a:r>
+              <a:rPr lang="ko-KR" altLang="en-US" sz="2000" dirty="0"/>
+              <a:t>혹은 </a:t>
+            </a:r>
+            <a:r>
+              <a:rPr lang="en-US" altLang="ko-KR" sz="2000" dirty="0"/>
+              <a:t>4</a:t>
+            </a:r>
+            <a:r>
+              <a:rPr lang="ko-KR" altLang="en-US" sz="2000" dirty="0"/>
+              <a:t>주</a:t>
+            </a:r>
+            <a:r>
+              <a:rPr sz="2000" dirty="0"/>
+              <a:t>)</a:t>
             </a:r>
           </a:p>
         </p:txBody>
@@ -5779,7 +8406,7 @@
         <p:spPr>
           <a:xfrm>
             <a:off x="731520" y="2286000"/>
-            <a:ext cx="7680960" cy="548640"/>
+            <a:ext cx="3796232" cy="400110"/>
           </a:xfrm>
           <a:prstGeom prst="rect">
             <a:avLst/>
@@ -5800,7 +8427,40 @@
               </a:defRPr>
             </a:pPr>
             <a:r>
-              <a:t>⏰ 운영 시간: 평일 09:00 ~ 17:00 (점심시간 포함)</a:t>
+              <a:rPr sz="2000" dirty="0"/>
+              <a:t>⏰ </a:t>
+            </a:r>
+            <a:r>
+              <a:rPr sz="2000" dirty="0" err="1"/>
+              <a:t>운영</a:t>
+            </a:r>
+            <a:r>
+              <a:rPr sz="2000" dirty="0"/>
+              <a:t> </a:t>
+            </a:r>
+            <a:r>
+              <a:rPr sz="2000" dirty="0" err="1"/>
+              <a:t>시간</a:t>
+            </a:r>
+            <a:r>
+              <a:rPr sz="2000" dirty="0"/>
+              <a:t>: </a:t>
+            </a:r>
+            <a:r>
+              <a:rPr sz="2000" dirty="0" err="1"/>
+              <a:t>평일</a:t>
+            </a:r>
+            <a:r>
+              <a:rPr sz="2000" dirty="0"/>
+              <a:t> 09:00 ~ </a:t>
+            </a:r>
+            <a:r>
+              <a:rPr lang="en-US" sz="2000" dirty="0"/>
+              <a:t>12</a:t>
+            </a:r>
+            <a:r>
+              <a:rPr sz="2000" dirty="0"/>
+              <a:t>:00</a:t>
             </a:r>
           </a:p>
         </p:txBody>
@@ -5814,7 +8474,7 @@
         <p:spPr>
           <a:xfrm>
             <a:off x="731520" y="2926080"/>
-            <a:ext cx="7680960" cy="548640"/>
+            <a:ext cx="5370381" cy="400110"/>
           </a:xfrm>
           <a:prstGeom prst="rect">
             <a:avLst/>
@@ -5835,6 +8495,7 @@
               </a:defRPr>
             </a:pPr>
             <a:r>
+              <a:rPr sz="2000"/>
               <a:t>👥 운영 인원: 학년별 소그룹 또는 개인별 맞춤</a:t>
             </a:r>
           </a:p>
@@ -5849,7 +8510,7 @@
         <p:spPr>
           <a:xfrm>
             <a:off x="731520" y="3566159"/>
-            <a:ext cx="7680960" cy="548640"/>
+            <a:ext cx="3459601" cy="400110"/>
           </a:xfrm>
           <a:prstGeom prst="rect">
             <a:avLst/>
@@ -5870,8 +8531,38 @@
               </a:defRPr>
             </a:pPr>
             <a:r>
-              <a:t>📍 운영 장소: 학교 또는 DA.UM 학습센터</a:t>
-            </a:r>
+              <a:rPr sz="2000" dirty="0"/>
+              <a:t>📍 </a:t>
+            </a:r>
+            <a:r>
+              <a:rPr sz="2000" dirty="0" err="1"/>
+              <a:t>운영</a:t>
+            </a:r>
+            <a:r>
+              <a:rPr sz="2000" dirty="0"/>
+              <a:t> </a:t>
+            </a:r>
+            <a:r>
+              <a:rPr sz="2000" dirty="0" err="1"/>
+              <a:t>장소</a:t>
+            </a:r>
+            <a:r>
+              <a:rPr sz="2000" dirty="0"/>
+              <a:t>: </a:t>
+            </a:r>
+            <a:r>
+              <a:rPr sz="2000" dirty="0" err="1"/>
+              <a:t>학교</a:t>
+            </a:r>
+            <a:r>
+              <a:rPr sz="2000" dirty="0"/>
+              <a:t> </a:t>
+            </a:r>
+            <a:r>
+              <a:rPr lang="ko-KR" altLang="en-US" sz="2000" dirty="0"/>
+              <a:t>또는 가정</a:t>
+            </a:r>
+            <a:endParaRPr sz="2000" dirty="0"/>
           </a:p>
         </p:txBody>
       </p:sp>
@@ -5883,8 +8574,8 @@
         </p:nvSpPr>
         <p:spPr>
           <a:xfrm>
-            <a:off x="731520" y="4206240"/>
-            <a:ext cx="7680960" cy="548640"/>
+            <a:off x="760709" y="4282116"/>
+            <a:ext cx="5827236" cy="400110"/>
           </a:xfrm>
           <a:prstGeom prst="rect">
             <a:avLst/>
@@ -5905,21 +8596,79 @@
               </a:defRPr>
             </a:pPr>
             <a:r>
-              <a:t>📚 교재 및 자료: 학교 교과서 + 맞춤형 학습 자료</a:t>
-            </a:r>
-          </a:p>
-        </p:txBody>
-      </p:sp>
-      <p:sp>
-        <p:nvSpPr>
-          <p:cNvPr id="8" name="TextBox 7"/>
+              <a:rPr sz="2000" dirty="0"/>
+              <a:t>📚 </a:t>
+            </a:r>
+            <a:r>
+              <a:rPr sz="2000" dirty="0" err="1"/>
+              <a:t>교재</a:t>
+            </a:r>
+            <a:r>
+              <a:rPr sz="2000" dirty="0"/>
+              <a:t> 및 </a:t>
+            </a:r>
+            <a:r>
+              <a:rPr sz="2000" dirty="0" err="1"/>
+              <a:t>자료</a:t>
+            </a:r>
+            <a:r>
+              <a:rPr sz="2000" dirty="0"/>
+              <a:t>: </a:t>
+            </a:r>
+            <a:r>
+              <a:rPr sz="2000" dirty="0" err="1"/>
+              <a:t>학교</a:t>
+            </a:r>
+            <a:r>
+              <a:rPr sz="2000" dirty="0"/>
+              <a:t> </a:t>
+            </a:r>
+            <a:r>
+              <a:rPr sz="2000" dirty="0" err="1"/>
+              <a:t>교과서</a:t>
+            </a:r>
+            <a:r>
+              <a:rPr sz="2000" dirty="0"/>
+              <a:t> + </a:t>
+            </a:r>
+            <a:r>
+              <a:rPr lang="en-US" sz="2000" dirty="0" err="1"/>
+              <a:t>AI</a:t>
+            </a:r>
+            <a:r>
+              <a:rPr sz="2000" dirty="0" err="1"/>
+              <a:t>맞춤형</a:t>
+            </a:r>
+            <a:r>
+              <a:rPr sz="2000" dirty="0"/>
+              <a:t> </a:t>
+            </a:r>
+            <a:r>
+              <a:rPr sz="2000" dirty="0" err="1"/>
+              <a:t>학습</a:t>
+            </a:r>
+            <a:r>
+              <a:rPr sz="2000" dirty="0"/>
+              <a:t> </a:t>
+            </a:r>
+            <a:r>
+              <a:rPr sz="2000" dirty="0" err="1"/>
+              <a:t>자료</a:t>
+            </a:r>
+            <a:endParaRPr sz="2000" dirty="0"/>
+          </a:p>
+        </p:txBody>
+      </p:sp>
+      <p:sp>
+        <p:nvSpPr>
+          <p:cNvPr id="9" name="TextBox 8"/>
           <p:cNvSpPr txBox="1"/>
           <p:nvPr/>
         </p:nvSpPr>
         <p:spPr>
           <a:xfrm>
-            <a:off x="731520" y="4846320"/>
-            <a:ext cx="7680960" cy="548640"/>
+            <a:off x="760709" y="5009171"/>
+            <a:ext cx="3401893" cy="400110"/>
           </a:xfrm>
           <a:prstGeom prst="rect">
             <a:avLst/>
@@ -5940,43 +8689,38 @@
               </a:defRPr>
             </a:pPr>
             <a:r>
-              <a:t>👩‍🏫 지도 교사: 과목별 전문 강사진</a:t>
-            </a:r>
-          </a:p>
-        </p:txBody>
-      </p:sp>
-      <p:sp>
-        <p:nvSpPr>
-          <p:cNvPr id="9" name="TextBox 8"/>
-          <p:cNvSpPr txBox="1"/>
-          <p:nvPr/>
-        </p:nvSpPr>
-        <p:spPr>
-          <a:xfrm>
-            <a:off x="731520" y="5486399"/>
-            <a:ext cx="7680960" cy="548640"/>
-          </a:xfrm>
-          <a:prstGeom prst="rect">
-            <a:avLst/>
-          </a:prstGeom>
-          <a:noFill/>
-        </p:spPr>
-        <p:txBody>
-          <a:bodyPr wrap="none">
-            <a:spAutoFit/>
-          </a:bodyPr>
-          <a:lstStyle/>
-          <a:p>
-            <a:pPr>
-              <a:defRPr sz="2400">
-                <a:solidFill>
-                  <a:srgbClr val="333333"/>
-                </a:solidFill>
-              </a:defRPr>
-            </a:pPr>
-            <a:r>
-              <a:t>💻 온라인 지원: 학습관리 앱 및 온라인 상담</a:t>
-            </a:r>
+              <a:rPr sz="2000" dirty="0"/>
+              <a:t>💻 </a:t>
+            </a:r>
+            <a:r>
+              <a:rPr sz="2000" dirty="0" err="1"/>
+              <a:t>온라인</a:t>
+            </a:r>
+            <a:r>
+              <a:rPr sz="2000" dirty="0"/>
+              <a:t> </a:t>
+            </a:r>
+            <a:r>
+              <a:rPr sz="2000" dirty="0" err="1"/>
+              <a:t>지원</a:t>
+            </a:r>
+            <a:r>
+              <a:rPr sz="2000" dirty="0"/>
+              <a:t>: </a:t>
+            </a:r>
+            <a:r>
+              <a:rPr sz="2000" dirty="0" err="1"/>
+              <a:t>학습관리</a:t>
+            </a:r>
+            <a:r>
+              <a:rPr sz="2000" dirty="0"/>
+              <a:t> </a:t>
+            </a:r>
+            <a:r>
+              <a:rPr lang="ko-KR" altLang="en-US" sz="2000" dirty="0"/>
+              <a:t>웹</a:t>
+            </a:r>
+            <a:endParaRPr sz="2000" dirty="0"/>
           </a:p>
         </p:txBody>
       </p:sp>
@@ -5989,7 +8733,7 @@
 </file>
 
 <file path=ppt/slides/slide9.xml><?xml version="1.0" encoding="utf-8"?>
-<p:sld xmlns:a="http://schemas.openxmlformats.org/drawingml/2006/main" xmlns:p="http://schemas.openxmlformats.org/presentationml/2006/main" xmlns:r="http://schemas.openxmlformats.org/officeDocument/2006/relationships">
+<p:sld xmlns:a="http://schemas.openxmlformats.org/drawingml/2006/main" xmlns:r="http://schemas.openxmlformats.org/officeDocument/2006/relationships" xmlns:p="http://schemas.openxmlformats.org/presentationml/2006/main">
   <p:cSld>
     <p:bg>
       <p:bgPr>
@@ -6005,7 +8749,14 @@
         <p:cNvGrpSpPr/>
         <p:nvPr/>
       </p:nvGrpSpPr>
-      <p:grpSpPr/>
+      <p:grpSpPr>
+        <a:xfrm>
+          <a:off x="0" y="0"/>
+          <a:ext cx="0" cy="0"/>
+          <a:chOff x="0" y="0"/>
+          <a:chExt cx="0" cy="0"/>
+        </a:xfrm>
+      </p:grpSpPr>
       <p:sp>
         <p:nvSpPr>
           <p:cNvPr id="2" name="Rectangle 1"/>
@@ -6069,7 +8820,7 @@
         <p:spPr>
           <a:xfrm>
             <a:off x="731520" y="1645920"/>
-            <a:ext cx="7680960" cy="548640"/>
+            <a:ext cx="3275256" cy="400110"/>
           </a:xfrm>
           <a:prstGeom prst="rect">
             <a:avLst/>
@@ -6090,7 +8841,32 @@
               </a:defRPr>
             </a:pPr>
             <a:r>
-              <a:t>🌟 자기주도학습 습관 완성</a:t>
+              <a:rPr sz="2000" dirty="0"/>
+              <a:t>🌟 </a:t>
+            </a:r>
+            <a:r>
+              <a:rPr sz="2000" dirty="0" err="1"/>
+              <a:t>자기주도학습</a:t>
+            </a:r>
+            <a:r>
+              <a:rPr sz="2000" dirty="0"/>
+              <a:t> </a:t>
+            </a:r>
+            <a:r>
+              <a:rPr sz="2000" dirty="0" err="1"/>
+              <a:t>습관</a:t>
+            </a:r>
+            <a:r>
+              <a:rPr sz="2000" dirty="0"/>
+              <a:t> </a:t>
+            </a:r>
+            <a:r>
+              <a:rPr lang="ko-KR" altLang="en-US" sz="2000" dirty="0"/>
+              <a:t>형</a:t>
+            </a:r>
+            <a:r>
+              <a:rPr sz="2000" dirty="0"/>
+              <a:t>성</a:t>
             </a:r>
           </a:p>
         </p:txBody>
@@ -6104,7 +8880,7 @@
         <p:spPr>
           <a:xfrm>
             <a:off x="731520" y="2286000"/>
-            <a:ext cx="7680960" cy="548640"/>
+            <a:ext cx="3903633" cy="400110"/>
           </a:xfrm>
           <a:prstGeom prst="rect">
             <a:avLst/>
@@ -6125,8 +8901,38 @@
               </a:defRPr>
             </a:pPr>
             <a:r>
-              <a:t>📈 학업 성취도 및 내신 성적 향상</a:t>
-            </a:r>
+              <a:rPr sz="2000" dirty="0"/>
+              <a:t>📈 </a:t>
+            </a:r>
+            <a:r>
+              <a:rPr sz="2000" dirty="0" err="1"/>
+              <a:t>학업</a:t>
+            </a:r>
+            <a:r>
+              <a:rPr sz="2000" dirty="0"/>
+              <a:t> </a:t>
+            </a:r>
+            <a:r>
+              <a:rPr sz="2000" dirty="0" err="1"/>
+              <a:t>성취도</a:t>
+            </a:r>
+            <a:r>
+              <a:rPr sz="2000" dirty="0"/>
+              <a:t> 및 </a:t>
+            </a:r>
+            <a:r>
+              <a:rPr lang="ko-KR" altLang="en-US" sz="2000" dirty="0"/>
+              <a:t>학습태도</a:t>
+            </a:r>
+            <a:r>
+              <a:rPr sz="2000" dirty="0"/>
+              <a:t> </a:t>
+            </a:r>
+            <a:r>
+              <a:rPr sz="2000" dirty="0" err="1"/>
+              <a:t>향상</a:t>
+            </a:r>
+            <a:endParaRPr sz="2000" dirty="0"/>
           </a:p>
         </p:txBody>
       </p:sp>
@@ -6139,7 +8945,7 @@
         <p:spPr>
           <a:xfrm>
             <a:off x="731520" y="2926080"/>
-            <a:ext cx="7680960" cy="548640"/>
+            <a:ext cx="3390672" cy="400110"/>
           </a:xfrm>
           <a:prstGeom prst="rect">
             <a:avLst/>
@@ -6160,6 +8966,7 @@
               </a:defRPr>
             </a:pPr>
             <a:r>
+              <a:rPr sz="2000"/>
               <a:t>💪 학습 자신감 및 동기 부여</a:t>
             </a:r>
           </a:p>
@@ -6174,7 +8981,7 @@
         <p:spPr>
           <a:xfrm>
             <a:off x="731520" y="3566159"/>
-            <a:ext cx="7680960" cy="548640"/>
+            <a:ext cx="5416868" cy="400110"/>
           </a:xfrm>
           <a:prstGeom prst="rect">
             <a:avLst/>
@@ -6195,8 +9002,58 @@
               </a:defRPr>
             </a:pPr>
             <a:r>
-              <a:t>🎯 명확한 학습 목표 및 진로 방향 설정</a:t>
-            </a:r>
+              <a:rPr sz="2000" dirty="0"/>
+              <a:t>🎯  </a:t>
+            </a:r>
+            <a:r>
+              <a:rPr lang="ko-KR" altLang="en-US" sz="2000" dirty="0" err="1"/>
+              <a:t>새학년</a:t>
+            </a:r>
+            <a:r>
+              <a:rPr lang="ko-KR" altLang="en-US" sz="2000" dirty="0"/>
+              <a:t> </a:t>
+            </a:r>
+            <a:r>
+              <a:rPr sz="2000" dirty="0" err="1"/>
+              <a:t>학습</a:t>
+            </a:r>
+            <a:r>
+              <a:rPr sz="2000" dirty="0"/>
+              <a:t> </a:t>
+            </a:r>
+            <a:r>
+              <a:rPr sz="2000" dirty="0" err="1"/>
+              <a:t>목표</a:t>
+            </a:r>
+            <a:r>
+              <a:rPr sz="2000" dirty="0"/>
+              <a:t> 및 </a:t>
+            </a:r>
+            <a:r>
+              <a:rPr sz="2000" dirty="0" err="1"/>
+              <a:t>진로</a:t>
+            </a:r>
+            <a:r>
+              <a:rPr sz="2000" dirty="0"/>
+              <a:t> </a:t>
+            </a:r>
+            <a:r>
+              <a:rPr sz="2000" dirty="0" err="1"/>
+              <a:t>방향</a:t>
+            </a:r>
+            <a:r>
+              <a:rPr sz="2000" dirty="0"/>
+              <a:t> </a:t>
+            </a:r>
+            <a:r>
+              <a:rPr sz="2000" dirty="0" err="1"/>
+              <a:t>설정</a:t>
+            </a:r>
+            <a:r>
+              <a:rPr lang="ko-KR" altLang="en-US" sz="2000" dirty="0"/>
+              <a:t>에 도움</a:t>
+            </a:r>
+            <a:endParaRPr sz="2000" dirty="0"/>
           </a:p>
         </p:txBody>
       </p:sp>
@@ -6209,7 +9066,7 @@
         <p:spPr>
           <a:xfrm>
             <a:off x="731520" y="4206240"/>
-            <a:ext cx="7680960" cy="548640"/>
+            <a:ext cx="3903633" cy="400110"/>
           </a:xfrm>
           <a:prstGeom prst="rect">
             <a:avLst/>
@@ -6230,8 +9087,46 @@
               </a:defRPr>
             </a:pPr>
             <a:r>
-              <a:t>📚 중학교 학업 기초 완벽 다지기</a:t>
-            </a:r>
+              <a:rPr sz="2000" dirty="0"/>
+              <a:t>📚 </a:t>
+            </a:r>
+            <a:r>
+              <a:rPr lang="ko-KR" altLang="en-US" sz="2000" dirty="0"/>
+              <a:t>학년별</a:t>
+            </a:r>
+            <a:r>
+              <a:rPr sz="2000" dirty="0"/>
+              <a:t> </a:t>
+            </a:r>
+            <a:r>
+              <a:rPr sz="2000" dirty="0" err="1"/>
+              <a:t>학업</a:t>
+            </a:r>
+            <a:r>
+              <a:rPr sz="2000" dirty="0"/>
+              <a:t> </a:t>
+            </a:r>
+            <a:r>
+              <a:rPr sz="2000" dirty="0" err="1"/>
+              <a:t>기초</a:t>
+            </a:r>
+            <a:r>
+              <a:rPr sz="2000" dirty="0"/>
+              <a:t> </a:t>
+            </a:r>
+            <a:r>
+              <a:rPr sz="2000" dirty="0" err="1"/>
+              <a:t>완벽</a:t>
+            </a:r>
+            <a:r>
+              <a:rPr sz="2000" dirty="0"/>
+              <a:t> </a:t>
+            </a:r>
+            <a:r>
+              <a:rPr sz="2000" dirty="0" err="1"/>
+              <a:t>다지기</a:t>
+            </a:r>
+            <a:endParaRPr sz="2000" dirty="0"/>
           </a:p>
         </p:txBody>
       </p:sp>
@@ -6244,7 +9139,7 @@
         <p:spPr>
           <a:xfrm>
             <a:off x="731520" y="4846320"/>
-            <a:ext cx="7680960" cy="548640"/>
+            <a:ext cx="3299301" cy="400110"/>
           </a:xfrm>
           <a:prstGeom prst="rect">
             <a:avLst/>
@@ -6265,8 +9160,30 @@
               </a:defRPr>
             </a:pPr>
             <a:r>
-              <a:t>👩‍👧 학부모와의 긴밀한 소통 및 협력</a:t>
-            </a:r>
+              <a:rPr sz="2000" dirty="0"/>
+              <a:t>👩‍👧 </a:t>
+            </a:r>
+            <a:r>
+              <a:rPr sz="2000" dirty="0" err="1"/>
+              <a:t>학부모와의</a:t>
+            </a:r>
+            <a:r>
+              <a:rPr sz="2000" dirty="0"/>
+              <a:t>  </a:t>
+            </a:r>
+            <a:r>
+              <a:rPr sz="2000" dirty="0" err="1"/>
+              <a:t>소통</a:t>
+            </a:r>
+            <a:r>
+              <a:rPr sz="2000" dirty="0"/>
+              <a:t> 및 </a:t>
+            </a:r>
+            <a:r>
+              <a:rPr sz="2000" dirty="0" err="1"/>
+              <a:t>협력</a:t>
+            </a:r>
+            <a:endParaRPr sz="2000" dirty="0"/>
           </a:p>
         </p:txBody>
       </p:sp>
@@ -6279,7 +9196,7 @@
         <p:spPr>
           <a:xfrm>
             <a:off x="731520" y="5486399"/>
-            <a:ext cx="7680960" cy="548640"/>
+            <a:ext cx="4673074" cy="400110"/>
           </a:xfrm>
           <a:prstGeom prst="rect">
             <a:avLst/>
@@ -6300,6 +9217,7 @@
               </a:defRPr>
             </a:pPr>
             <a:r>
+              <a:rPr sz="2000"/>
               <a:t>✨ 근화여중 학생들의 학업 경쟁력 강화</a:t>
             </a:r>
           </a:p>
@@ -6314,9 +9232,9 @@
 </file>
 
 <file path=ppt/theme/theme1.xml><?xml version="1.0" encoding="utf-8"?>
-<a:theme xmlns:a="http://schemas.openxmlformats.org/drawingml/2006/main" name="Office Theme">
+<a:theme xmlns:a="http://schemas.openxmlformats.org/drawingml/2006/main" name="슬라이스">
   <a:themeElements>
-    <a:clrScheme name="Office">
+    <a:clrScheme name="슬라이스">
       <a:dk1>
         <a:sysClr val="windowText" lastClr="000000"/>
       </a:dk1>
@@ -6324,83 +9242,48 @@
         <a:sysClr val="window" lastClr="FFFFFF"/>
       </a:lt1>
       <a:dk2>
-        <a:srgbClr val="1F497D"/>
+        <a:srgbClr val="146194"/>
       </a:dk2>
       <a:lt2>
-        <a:srgbClr val="EEECE1"/>
+        <a:srgbClr val="76DBF4"/>
       </a:lt2>
       <a:accent1>
-        <a:srgbClr val="4F81BD"/>
+        <a:srgbClr val="052F61"/>
       </a:accent1>
       <a:accent2>
-        <a:srgbClr val="C0504D"/>
+        <a:srgbClr val="A50E82"/>
       </a:accent2>
       <a:accent3>
-        <a:srgbClr val="9BBB59"/>
+        <a:srgbClr val="14967C"/>
       </a:accent3>
       <a:accent4>
-        <a:srgbClr val="8064A2"/>
+        <a:srgbClr val="6A9E1F"/>
       </a:accent4>
       <a:accent5>
-        <a:srgbClr val="4BACC6"/>
+        <a:srgbClr val="E87D37"/>
       </a:accent5>
       <a:accent6>
-        <a:srgbClr val="F79646"/>
+        <a:srgbClr val="C62324"/>
       </a:accent6>
       <a:hlink>
-        <a:srgbClr val="0000FF"/>
+        <a:srgbClr val="0D2E46"/>
       </a:hlink>
       <a:folHlink>
-        <a:srgbClr val="800080"/>
+        <a:srgbClr val="356A95"/>
       </a:folHlink>
     </a:clrScheme>
-    <a:fontScheme name="Office">
+    <a:fontScheme name="슬라이스">
       <a:majorFont>
-        <a:latin typeface="Calibri"/>
+        <a:latin typeface="Century Gothic" panose="020B0502020202020204"/>
         <a:ea typeface=""/>
         <a:cs typeface=""/>
-        <a:font script="Jpan" typeface="ＭＳ Ｐゴシック"/>
-        <a:font script="Hang" typeface="맑은 고딕"/>
-        <a:font script="Hans" typeface="宋体"/>
-        <a:font script="Hant" typeface="新細明體"/>
-        <a:font script="Arab" typeface="Times New Roman"/>
-        <a:font script="Hebr" typeface="Times New Roman"/>
-        <a:font script="Thai" typeface="Angsana New"/>
-        <a:font script="Ethi" typeface="Nyala"/>
-        <a:font script="Beng" typeface="Vrinda"/>
-        <a:font script="Gujr" typeface="Shruti"/>
-        <a:font script="Khmr" typeface="MoolBoran"/>
-        <a:font script="Knda" typeface="Tunga"/>
-        <a:font script="Guru" typeface="Raavi"/>
-        <a:font script="Cans" typeface="Euphemia"/>
-        <a:font script="Cher" typeface="Plantagenet Cherokee"/>
-        <a:font script="Yiii" typeface="Microsoft Yi Baiti"/>
-        <a:font script="Tibt" typeface="Microsoft Himalaya"/>
-        <a:font script="Thaa" typeface="MV Boli"/>
-        <a:font script="Deva" typeface="Mangal"/>
-        <a:font script="Telu" typeface="Gautami"/>
-        <a:font script="Taml" typeface="Latha"/>
-        <a:font script="Syrc" typeface="Estrangelo Edessa"/>
-        <a:font script="Orya" typeface="Kalinga"/>
-        <a:font script="Mlym" typeface="Kartika"/>
-        <a:font script="Laoo" typeface="DokChampa"/>
-        <a:font script="Sinh" typeface="Iskoola Pota"/>
-        <a:font script="Mong" typeface="Mongolian Baiti"/>
-        <a:font script="Viet" typeface="Times New Roman"/>
-        <a:font script="Uigh" typeface="Microsoft Uighur"/>
-        <a:font script="Geor" typeface="Sylfaen"/>
-      </a:majorFont>
-      <a:minorFont>
-        <a:latin typeface="Calibri"/>
-        <a:ea typeface=""/>
-        <a:cs typeface=""/>
-        <a:font script="Jpan" typeface="ＭＳ Ｐゴシック"/>
-        <a:font script="Hang" typeface="맑은 고딕"/>
-        <a:font script="Hans" typeface="宋体"/>
-        <a:font script="Hant" typeface="新細明體"/>
-        <a:font script="Arab" typeface="Arial"/>
-        <a:font script="Hebr" typeface="Arial"/>
-        <a:font script="Thai" typeface="Cordia New"/>
+        <a:font script="Jpan" typeface="メイリオ"/>
+        <a:font script="Hang" typeface="HY중고딕"/>
+        <a:font script="Hans" typeface="幼圆"/>
+        <a:font script="Hant" typeface="微軟正黑體"/>
+        <a:font script="Arab" typeface="Tahoma"/>
+        <a:font script="Hebr" typeface="Gisha"/>
+        <a:font script="Thai" typeface="DilleniaUPC"/>
         <a:font script="Ethi" typeface="Nyala"/>
         <a:font script="Beng" typeface="Vrinda"/>
         <a:font script="Gujr" typeface="Shruti"/>
@@ -6421,12 +9304,47 @@
         <a:font script="Laoo" typeface="DokChampa"/>
         <a:font script="Sinh" typeface="Iskoola Pota"/>
         <a:font script="Mong" typeface="Mongolian Baiti"/>
-        <a:font script="Viet" typeface="Arial"/>
+        <a:font script="Viet" typeface="Tahoma"/>
+        <a:font script="Uigh" typeface="Microsoft Uighur"/>
+        <a:font script="Geor" typeface="Sylfaen"/>
+      </a:majorFont>
+      <a:minorFont>
+        <a:latin typeface="Century Gothic" panose="020B0502020202020204"/>
+        <a:ea typeface=""/>
+        <a:cs typeface=""/>
+        <a:font script="Jpan" typeface="メイリオ"/>
+        <a:font script="Hang" typeface="HY중고딕"/>
+        <a:font script="Hans" typeface="幼圆"/>
+        <a:font script="Hant" typeface="微軟正黑體"/>
+        <a:font script="Arab" typeface="Tahoma"/>
+        <a:font script="Hebr" typeface="Gisha"/>
+        <a:font script="Thai" typeface="DilleniaUPC"/>
+        <a:font script="Ethi" typeface="Nyala"/>
+        <a:font script="Beng" typeface="Vrinda"/>
+        <a:font script="Gujr" typeface="Shruti"/>
+        <a:font script="Khmr" typeface="DaunPenh"/>
+        <a:font script="Knda" typeface="Tunga"/>
+        <a:font script="Guru" typeface="Raavi"/>
+        <a:font script="Cans" typeface="Euphemia"/>
+        <a:font script="Cher" typeface="Plantagenet Cherokee"/>
+        <a:font script="Yiii" typeface="Microsoft Yi Baiti"/>
+        <a:font script="Tibt" typeface="Microsoft Himalaya"/>
+        <a:font script="Thaa" typeface="MV Boli"/>
+        <a:font script="Deva" typeface="Mangal"/>
+        <a:font script="Telu" typeface="Gautami"/>
+        <a:font script="Taml" typeface="Latha"/>
+        <a:font script="Syrc" typeface="Estrangelo Edessa"/>
+        <a:font script="Orya" typeface="Kalinga"/>
+        <a:font script="Mlym" typeface="Kartika"/>
+        <a:font script="Laoo" typeface="DokChampa"/>
+        <a:font script="Sinh" typeface="Iskoola Pota"/>
+        <a:font script="Mong" typeface="Mongolian Baiti"/>
+        <a:font script="Viet" typeface="Tahoma"/>
         <a:font script="Uigh" typeface="Microsoft Uighur"/>
         <a:font script="Geor" typeface="Sylfaen"/>
       </a:minorFont>
     </a:fontScheme>
-    <a:fmtScheme name="Office">
+    <a:fmtScheme name="슬라이스">
       <a:fillStyleLst>
         <a:solidFill>
           <a:schemeClr val="phClr"/>
@@ -6435,62 +9353,61 @@
           <a:gsLst>
             <a:gs pos="0">
               <a:schemeClr val="phClr">
-                <a:tint val="50000"/>
-                <a:satMod val="300000"/>
-              </a:schemeClr>
-            </a:gs>
-            <a:gs pos="35000">
-              <a:schemeClr val="phClr">
-                <a:tint val="37000"/>
-                <a:satMod val="300000"/>
+                <a:tint val="62000"/>
+                <a:hueMod val="94000"/>
+                <a:satMod val="140000"/>
+                <a:lumMod val="110000"/>
               </a:schemeClr>
             </a:gs>
             <a:gs pos="100000">
               <a:schemeClr val="phClr">
-                <a:tint val="15000"/>
-                <a:satMod val="350000"/>
+                <a:tint val="84000"/>
+                <a:satMod val="160000"/>
               </a:schemeClr>
             </a:gs>
           </a:gsLst>
-          <a:lin ang="16200000" scaled="1"/>
+          <a:lin ang="5400000" scaled="0"/>
         </a:gradFill>
         <a:gradFill rotWithShape="1">
           <a:gsLst>
             <a:gs pos="0">
               <a:schemeClr val="phClr">
-                <a:tint val="100000"/>
-                <a:shade val="100000"/>
+                <a:tint val="98000"/>
+                <a:hueMod val="94000"/>
                 <a:satMod val="130000"/>
+                <a:lumMod val="138000"/>
               </a:schemeClr>
             </a:gs>
             <a:gs pos="100000">
               <a:schemeClr val="phClr">
-                <a:tint val="50000"/>
-                <a:shade val="100000"/>
-                <a:satMod val="350000"/>
+                <a:shade val="94000"/>
+                <a:lumMod val="88000"/>
               </a:schemeClr>
             </a:gs>
           </a:gsLst>
-          <a:lin ang="16200000" scaled="0"/>
+          <a:lin ang="5400000" scaled="0"/>
         </a:gradFill>
       </a:fillStyleLst>
       <a:lnStyleLst>
-        <a:ln w="9525" cap="flat" cmpd="sng" algn="ctr">
+        <a:ln w="9525" cap="rnd" cmpd="sng" algn="ctr">
           <a:solidFill>
             <a:schemeClr val="phClr">
-              <a:shade val="95000"/>
-              <a:satMod val="105000"/>
+              <a:tint val="76000"/>
+              <a:alpha val="60000"/>
+              <a:hueMod val="94000"/>
             </a:schemeClr>
           </a:solidFill>
           <a:prstDash val="solid"/>
         </a:ln>
-        <a:ln w="25400" cap="flat" cmpd="sng" algn="ctr">
+        <a:ln w="12700" cap="rnd" cmpd="sng" algn="ctr">
           <a:solidFill>
-            <a:schemeClr val="phClr"/>
+            <a:schemeClr val="phClr">
+              <a:hueMod val="94000"/>
+            </a:schemeClr>
           </a:solidFill>
           <a:prstDash val="solid"/>
         </a:ln>
-        <a:ln w="38100" cap="flat" cmpd="sng" algn="ctr">
+        <a:ln w="28575" cap="rnd" cmpd="sng" algn="ctr">
           <a:solidFill>
             <a:schemeClr val="phClr"/>
           </a:solidFill>
@@ -6499,28 +9416,22 @@
       </a:lnStyleLst>
       <a:effectStyleLst>
         <a:effectStyle>
+          <a:effectLst/>
+        </a:effectStyle>
+        <a:effectStyle>
           <a:effectLst>
-            <a:outerShdw blurRad="40000" dist="20000" dir="5400000" rotWithShape="0">
+            <a:innerShdw blurRad="25400" dist="12700" dir="13500000">
               <a:srgbClr val="000000">
-                <a:alpha val="38000"/>
+                <a:alpha val="45000"/>
               </a:srgbClr>
-            </a:outerShdw>
+            </a:innerShdw>
           </a:effectLst>
         </a:effectStyle>
         <a:effectStyle>
           <a:effectLst>
-            <a:outerShdw blurRad="40000" dist="23000" dir="5400000" rotWithShape="0">
+            <a:outerShdw blurRad="50800" dist="38100" dir="5400000" rotWithShape="0">
               <a:srgbClr val="000000">
-                <a:alpha val="35000"/>
-              </a:srgbClr>
-            </a:outerShdw>
-          </a:effectLst>
-        </a:effectStyle>
-        <a:effectStyle>
-          <a:effectLst>
-            <a:outerShdw blurRad="40000" dist="23000" dir="5400000" rotWithShape="0">
-              <a:srgbClr val="000000">
-                <a:alpha val="35000"/>
+                <a:alpha val="46000"/>
               </a:srgbClr>
             </a:outerShdw>
           </a:effectLst>
@@ -6528,12 +9439,10 @@
             <a:camera prst="orthographicFront">
               <a:rot lat="0" lon="0" rev="0"/>
             </a:camera>
-            <a:lightRig rig="threePt" dir="t">
-              <a:rot lat="0" lon="0" rev="1200000"/>
-            </a:lightRig>
+            <a:lightRig rig="threePt" dir="t"/>
           </a:scene3d>
-          <a:sp3d>
-            <a:bevelT w="63500" h="25400"/>
+          <a:sp3d prstMaterial="plastic">
+            <a:bevelT w="25400" h="25400"/>
           </a:sp3d>
         </a:effectStyle>
       </a:effectStyleLst>
@@ -6543,92 +9452,55 @@
         </a:solidFill>
         <a:gradFill rotWithShape="1">
           <a:gsLst>
-            <a:gs pos="0">
+            <a:gs pos="10000">
               <a:schemeClr val="phClr">
-                <a:tint val="40000"/>
-                <a:satMod val="350000"/>
-              </a:schemeClr>
-            </a:gs>
-            <a:gs pos="40000">
-              <a:schemeClr val="phClr">
-                <a:tint val="45000"/>
-                <a:shade val="99000"/>
-                <a:satMod val="350000"/>
+                <a:tint val="97000"/>
+                <a:hueMod val="92000"/>
+                <a:satMod val="169000"/>
+                <a:lumMod val="164000"/>
               </a:schemeClr>
             </a:gs>
             <a:gs pos="100000">
               <a:schemeClr val="phClr">
-                <a:shade val="20000"/>
-                <a:satMod val="255000"/>
+                <a:shade val="96000"/>
+                <a:satMod val="120000"/>
+                <a:lumMod val="90000"/>
               </a:schemeClr>
             </a:gs>
           </a:gsLst>
-          <a:path path="circle">
-            <a:fillToRect l="50000" t="-80000" r="50000" b="180000"/>
-          </a:path>
+          <a:lin ang="6120000" scaled="1"/>
         </a:gradFill>
         <a:gradFill rotWithShape="1">
           <a:gsLst>
             <a:gs pos="0">
               <a:schemeClr val="phClr">
-                <a:tint val="80000"/>
-                <a:satMod val="300000"/>
+                <a:tint val="97000"/>
+                <a:hueMod val="92000"/>
+                <a:satMod val="169000"/>
+                <a:lumMod val="164000"/>
               </a:schemeClr>
             </a:gs>
             <a:gs pos="100000">
               <a:schemeClr val="phClr">
-                <a:shade val="30000"/>
-                <a:satMod val="200000"/>
+                <a:shade val="96000"/>
+                <a:satMod val="120000"/>
+                <a:lumMod val="90000"/>
               </a:schemeClr>
             </a:gs>
           </a:gsLst>
           <a:path path="circle">
-            <a:fillToRect l="50000" t="50000" r="50000" b="50000"/>
+            <a:fillToRect b="100000"/>
           </a:path>
         </a:gradFill>
       </a:bgFillStyleLst>
     </a:fmtScheme>
   </a:themeElements>
-  <a:objectDefaults>
-    <a:spDef>
-      <a:spPr/>
-      <a:bodyPr/>
-      <a:lstStyle/>
-      <a:style>
-        <a:lnRef idx="1">
-          <a:schemeClr val="accent1"/>
-        </a:lnRef>
-        <a:fillRef idx="3">
-          <a:schemeClr val="accent1"/>
-        </a:fillRef>
-        <a:effectRef idx="2">
-          <a:schemeClr val="accent1"/>
-        </a:effectRef>
-        <a:fontRef idx="minor">
-          <a:schemeClr val="lt1"/>
-        </a:fontRef>
-      </a:style>
-    </a:spDef>
-    <a:lnDef>
-      <a:spPr/>
-      <a:bodyPr/>
-      <a:lstStyle/>
-      <a:style>
-        <a:lnRef idx="2">
-          <a:schemeClr val="accent1"/>
-        </a:lnRef>
-        <a:fillRef idx="0">
-          <a:schemeClr val="accent1"/>
-        </a:fillRef>
-        <a:effectRef idx="1">
-          <a:schemeClr val="accent1"/>
-        </a:effectRef>
-        <a:fontRef idx="minor">
-          <a:schemeClr val="tx1"/>
-        </a:fontRef>
-      </a:style>
-    </a:lnDef>
-  </a:objectDefaults>
+  <a:objectDefaults/>
   <a:extraClrSchemeLst/>
+  <a:extLst>
+    <a:ext uri="{05A4C25C-085E-4340-85A3-A5531E510DB2}">
+      <thm15:themeFamily xmlns:thm15="http://schemas.microsoft.com/office/thememl/2012/main" name="Slice" id="{0507925B-6AC9-4358-8E18-C330545D08F8}" vid="{13FEC7C6-62A9-40C4-99D2-581AACACAA2F}"/>
+    </a:ext>
+  </a:extLst>
 </a:theme>
 </file>